--- a/TERRARIUM-Presentation.pptx
+++ b/TERRARIUM-Presentation.pptx
@@ -2683,7 +2683,7 @@
                             <a:schemeClr val="tx1"/>
                           </a:solidFill>
                         </a:rPr>
-                        <a:t/>
+                        <a:t>23-54520-3</a:t>
                       </a:r>
                     </a:p>
                   </a:txBody>
@@ -2701,7 +2701,7 @@
                             <a:schemeClr val="tx1"/>
                           </a:solidFill>
                         </a:rPr>
-                        <a:t/>
+                        <a:t>Kishor Tarafder</a:t>
                       </a:r>
                     </a:p>
                   </a:txBody>
@@ -2719,7 +2719,7 @@
                             <a:schemeClr val="tx1"/>
                           </a:solidFill>
                         </a:rPr>
-                        <a:t/>
+                        <a:t>BSc in EEE</a:t>
                       </a:r>
                     </a:p>
                   </a:txBody>
@@ -2795,7 +2795,7 @@
                             <a:schemeClr val="tx1"/>
                           </a:solidFill>
                         </a:rPr>
-                        <a:t/>
+                        <a:t>23-55027-3</a:t>
                       </a:r>
                     </a:p>
                   </a:txBody>
@@ -2813,7 +2813,7 @@
                             <a:schemeClr val="tx1"/>
                           </a:solidFill>
                         </a:rPr>
-                        <a:t/>
+                        <a:t>Tahomina Era</a:t>
                       </a:r>
                     </a:p>
                   </a:txBody>
@@ -2831,7 +2831,7 @@
                             <a:schemeClr val="tx1"/>
                           </a:solidFill>
                         </a:rPr>
-                        <a:t/>
+                        <a:t>BSc in EEE</a:t>
                       </a:r>
                     </a:p>
                   </a:txBody>
@@ -2901,6 +2901,14 @@
                     <a:lstStyle/>
                     <a:p>
                       <a:pPr algn="ctr"/>
+                      <a:r>
+                        <a:rPr lang="en-US" sz="2400" i="1" dirty="0">
+                          <a:solidFill>
+                            <a:schemeClr val="tx1"/>
+                          </a:solidFill>
+                        </a:rPr>
+                        <a:t>23-54483-3</a:t>
+                      </a:r>
                       <a:endParaRPr lang="en-US" sz="2400" i="1" dirty="0">
                         <a:solidFill>
                           <a:schemeClr val="tx1"/>
@@ -2916,6 +2924,14 @@
                     <a:lstStyle/>
                     <a:p>
                       <a:pPr algn="ctr"/>
+                      <a:r>
+                        <a:rPr lang="en-US" sz="2400" i="1" dirty="0">
+                          <a:solidFill>
+                            <a:schemeClr val="tx1"/>
+                          </a:solidFill>
+                        </a:rPr>
+                        <a:t>MD. Shakhawat Hossen</a:t>
+                      </a:r>
                       <a:endParaRPr lang="en-US" sz="2400" i="1" dirty="0">
                         <a:solidFill>
                           <a:schemeClr val="tx1"/>
@@ -2931,6 +2947,14 @@
                     <a:lstStyle/>
                     <a:p>
                       <a:pPr algn="ctr"/>
+                      <a:r>
+                        <a:rPr lang="en-US" sz="2400" i="1" dirty="0">
+                          <a:solidFill>
+                            <a:schemeClr val="tx1"/>
+                          </a:solidFill>
+                        </a:rPr>
+                        <a:t>BSc in EEE</a:t>
+                      </a:r>
                       <a:endParaRPr lang="en-US" sz="2400" i="1" dirty="0">
                         <a:solidFill>
                           <a:schemeClr val="tx1"/>
@@ -3001,6 +3025,14 @@
                     <a:lstStyle/>
                     <a:p>
                       <a:pPr algn="ctr"/>
+                      <a:r>
+                        <a:rPr lang="en-US" sz="2400" i="1" dirty="0">
+                          <a:solidFill>
+                            <a:schemeClr val="tx1"/>
+                          </a:solidFill>
+                        </a:rPr>
+                        <a:t>23-54508-3</a:t>
+                      </a:r>
                       <a:endParaRPr lang="en-US" sz="2400" i="1" dirty="0">
                         <a:solidFill>
                           <a:schemeClr val="tx1"/>
@@ -3016,6 +3048,14 @@
                     <a:lstStyle/>
                     <a:p>
                       <a:pPr algn="ctr"/>
+                      <a:r>
+                        <a:rPr lang="en-US" sz="2400" i="1" dirty="0">
+                          <a:solidFill>
+                            <a:schemeClr val="tx1"/>
+                          </a:solidFill>
+                        </a:rPr>
+                        <a:t>Avishek Saha</a:t>
+                      </a:r>
                       <a:endParaRPr lang="en-US" sz="2400" i="1" dirty="0">
                         <a:solidFill>
                           <a:schemeClr val="tx1"/>
@@ -3031,6 +3071,14 @@
                     <a:lstStyle/>
                     <a:p>
                       <a:pPr algn="ctr"/>
+                      <a:r>
+                        <a:rPr lang="en-US" sz="2400" i="1" dirty="0">
+                          <a:solidFill>
+                            <a:schemeClr val="tx1"/>
+                          </a:solidFill>
+                        </a:rPr>
+                        <a:t>BSc in EEE</a:t>
+                      </a:r>
                       <a:endParaRPr lang="en-US" sz="2400" i="1" dirty="0">
                         <a:solidFill>
                           <a:schemeClr val="tx1"/>
@@ -3429,6 +3477,615 @@
       </p:grpSpPr>
       <p:sp>
         <p:nvSpPr>
+          <p:cNvPr id="18434" name="Oval 3" descr="Parchment"/>
+          <p:cNvSpPr>
+            <a:spLocks noChangeArrowheads="1"/>
+          </p:cNvSpPr>
+          <p:nvPr/>
+        </p:nvSpPr>
+        <p:spPr bwMode="auto">
+          <a:xfrm>
+            <a:off x="1762298" y="529590"/>
+            <a:ext cx="11953702" cy="1188720"/>
+          </a:xfrm>
+          <a:prstGeom prst="ellipse">
+            <a:avLst/>
+          </a:prstGeom>
+          <a:blipFill dpi="0" rotWithShape="1">
+            <a:blip r:embed="rId2"/>
+            <a:srcRect/>
+            <a:tile tx="0" ty="0" sx="100000" sy="100000" flip="none" algn="tl"/>
+          </a:blipFill>
+          <a:ln w="9525">
+            <a:solidFill>
+              <a:schemeClr val="tx1"/>
+            </a:solidFill>
+            <a:round/>
+            <a:headEnd/>
+            <a:tailEnd/>
+          </a:ln>
+        </p:spPr>
+        <p:txBody>
+          <a:bodyPr wrap="none" anchor="ctr"/>
+          <a:lstStyle>
+            <a:lvl1pPr eaLnBrk="0" hangingPunct="0">
+              <a:defRPr>
+                <a:solidFill>
+                  <a:schemeClr val="tx1"/>
+                </a:solidFill>
+                <a:latin typeface="Arial" panose="020B0604020202020204" pitchFamily="34" charset="0"/>
+                <a:cs typeface="Arial" panose="020B0604020202020204" pitchFamily="34" charset="0"/>
+              </a:defRPr>
+            </a:lvl1pPr>
+            <a:lvl2pPr marL="742950" indent="-285750" eaLnBrk="0" hangingPunct="0">
+              <a:defRPr>
+                <a:solidFill>
+                  <a:schemeClr val="tx1"/>
+                </a:solidFill>
+                <a:latin typeface="Arial" panose="020B0604020202020204" pitchFamily="34" charset="0"/>
+                <a:cs typeface="Arial" panose="020B0604020202020204" pitchFamily="34" charset="0"/>
+              </a:defRPr>
+            </a:lvl2pPr>
+            <a:lvl3pPr marL="1143000" indent="-228600" eaLnBrk="0" hangingPunct="0">
+              <a:defRPr>
+                <a:solidFill>
+                  <a:schemeClr val="tx1"/>
+                </a:solidFill>
+                <a:latin typeface="Arial" panose="020B0604020202020204" pitchFamily="34" charset="0"/>
+                <a:cs typeface="Arial" panose="020B0604020202020204" pitchFamily="34" charset="0"/>
+              </a:defRPr>
+            </a:lvl3pPr>
+            <a:lvl4pPr marL="1600200" indent="-228600" eaLnBrk="0" hangingPunct="0">
+              <a:defRPr>
+                <a:solidFill>
+                  <a:schemeClr val="tx1"/>
+                </a:solidFill>
+                <a:latin typeface="Arial" panose="020B0604020202020204" pitchFamily="34" charset="0"/>
+                <a:cs typeface="Arial" panose="020B0604020202020204" pitchFamily="34" charset="0"/>
+              </a:defRPr>
+            </a:lvl4pPr>
+            <a:lvl5pPr marL="2057400" indent="-228600" eaLnBrk="0" hangingPunct="0">
+              <a:defRPr>
+                <a:solidFill>
+                  <a:schemeClr val="tx1"/>
+                </a:solidFill>
+                <a:latin typeface="Arial" panose="020B0604020202020204" pitchFamily="34" charset="0"/>
+                <a:cs typeface="Arial" panose="020B0604020202020204" pitchFamily="34" charset="0"/>
+              </a:defRPr>
+            </a:lvl5pPr>
+            <a:lvl6pPr marL="2514600" indent="-228600" eaLnBrk="0" fontAlgn="base" hangingPunct="0">
+              <a:spcBef>
+                <a:spcPct val="0"/>
+              </a:spcBef>
+              <a:spcAft>
+                <a:spcPct val="0"/>
+              </a:spcAft>
+              <a:defRPr>
+                <a:solidFill>
+                  <a:schemeClr val="tx1"/>
+                </a:solidFill>
+                <a:latin typeface="Arial" panose="020B0604020202020204" pitchFamily="34" charset="0"/>
+                <a:cs typeface="Arial" panose="020B0604020202020204" pitchFamily="34" charset="0"/>
+              </a:defRPr>
+            </a:lvl6pPr>
+            <a:lvl7pPr marL="2971800" indent="-228600" eaLnBrk="0" fontAlgn="base" hangingPunct="0">
+              <a:spcBef>
+                <a:spcPct val="0"/>
+              </a:spcBef>
+              <a:spcAft>
+                <a:spcPct val="0"/>
+              </a:spcAft>
+              <a:defRPr>
+                <a:solidFill>
+                  <a:schemeClr val="tx1"/>
+                </a:solidFill>
+                <a:latin typeface="Arial" panose="020B0604020202020204" pitchFamily="34" charset="0"/>
+                <a:cs typeface="Arial" panose="020B0604020202020204" pitchFamily="34" charset="0"/>
+              </a:defRPr>
+            </a:lvl7pPr>
+            <a:lvl8pPr marL="3429000" indent="-228600" eaLnBrk="0" fontAlgn="base" hangingPunct="0">
+              <a:spcBef>
+                <a:spcPct val="0"/>
+              </a:spcBef>
+              <a:spcAft>
+                <a:spcPct val="0"/>
+              </a:spcAft>
+              <a:defRPr>
+                <a:solidFill>
+                  <a:schemeClr val="tx1"/>
+                </a:solidFill>
+                <a:latin typeface="Arial" panose="020B0604020202020204" pitchFamily="34" charset="0"/>
+                <a:cs typeface="Arial" panose="020B0604020202020204" pitchFamily="34" charset="0"/>
+              </a:defRPr>
+            </a:lvl8pPr>
+            <a:lvl9pPr marL="3886200" indent="-228600" eaLnBrk="0" fontAlgn="base" hangingPunct="0">
+              <a:spcBef>
+                <a:spcPct val="0"/>
+              </a:spcBef>
+              <a:spcAft>
+                <a:spcPct val="0"/>
+              </a:spcAft>
+              <a:defRPr>
+                <a:solidFill>
+                  <a:schemeClr val="tx1"/>
+                </a:solidFill>
+                <a:latin typeface="Arial" panose="020B0604020202020204" pitchFamily="34" charset="0"/>
+                <a:cs typeface="Arial" panose="020B0604020202020204" pitchFamily="34" charset="0"/>
+              </a:defRPr>
+            </a:lvl9pPr>
+          </a:lstStyle>
+          <a:p>
+            <a:pPr algn="ctr"/>
+            <a:r>
+              <a:rPr lang="en-US" altLang="en-US" sz="4000" b="1" dirty="0">
+                <a:solidFill>
+                  <a:srgbClr val="0070C0"/>
+                </a:solidFill>
+                <a:latin typeface="Comic Sans MS" panose="030F0702030302020204" pitchFamily="66" charset="0"/>
+              </a:rPr>
+              <a:t>Research/Working Method</a:t>
+            </a:r>
+          </a:p>
+        </p:txBody>
+      </p:sp>
+      <p:sp>
+        <p:nvSpPr>
+          <p:cNvPr id="18435" name="Rectangle 2"/>
+          <p:cNvSpPr>
+            <a:spLocks noChangeArrowheads="1"/>
+          </p:cNvSpPr>
+          <p:nvPr/>
+        </p:nvSpPr>
+        <p:spPr bwMode="auto">
+          <a:xfrm>
+            <a:off x="548640" y="2427316"/>
+            <a:ext cx="15453359" cy="1828800"/>
+          </a:xfrm>
+          <a:prstGeom prst="rect">
+            <a:avLst/>
+          </a:prstGeom>
+          <a:noFill/>
+          <a:ln>
+            <a:noFill/>
+          </a:ln>
+          <a:extLst>
+            <a:ext uri="{909E8E84-426E-40DD-AFC4-6F175D3DCCD1}">
+              <a14:hiddenFill xmlns:a14="http://schemas.microsoft.com/office/drawing/2010/main">
+                <a:solidFill>
+                  <a:srgbClr val="FFFFFF"/>
+                </a:solidFill>
+              </a14:hiddenFill>
+            </a:ext>
+            <a:ext uri="{91240B29-F687-4F45-9708-019B960494DF}">
+              <a14:hiddenLine xmlns:a14="http://schemas.microsoft.com/office/drawing/2010/main" w="9525">
+                <a:solidFill>
+                  <a:srgbClr val="000000"/>
+                </a:solidFill>
+                <a:miter lim="800000"/>
+                <a:headEnd/>
+                <a:tailEnd/>
+              </a14:hiddenLine>
+            </a:ext>
+          </a:extLst>
+        </p:spPr>
+        <p:txBody>
+          <a:bodyPr wrap="square"/>
+          <a:lstStyle>
+            <a:lvl1pPr marL="342900" indent="-342900" eaLnBrk="0" hangingPunct="0">
+              <a:defRPr>
+                <a:solidFill>
+                  <a:schemeClr val="tx1"/>
+                </a:solidFill>
+                <a:latin typeface="Arial" panose="020B0604020202020204" pitchFamily="34" charset="0"/>
+                <a:cs typeface="Arial" panose="020B0604020202020204" pitchFamily="34" charset="0"/>
+              </a:defRPr>
+            </a:lvl1pPr>
+            <a:lvl2pPr marL="742950" indent="-285750" eaLnBrk="0" hangingPunct="0">
+              <a:defRPr>
+                <a:solidFill>
+                  <a:schemeClr val="tx1"/>
+                </a:solidFill>
+                <a:latin typeface="Arial" panose="020B0604020202020204" pitchFamily="34" charset="0"/>
+                <a:cs typeface="Arial" panose="020B0604020202020204" pitchFamily="34" charset="0"/>
+              </a:defRPr>
+            </a:lvl2pPr>
+            <a:lvl3pPr marL="1143000" indent="-228600" eaLnBrk="0" hangingPunct="0">
+              <a:defRPr>
+                <a:solidFill>
+                  <a:schemeClr val="tx1"/>
+                </a:solidFill>
+                <a:latin typeface="Arial" panose="020B0604020202020204" pitchFamily="34" charset="0"/>
+                <a:cs typeface="Arial" panose="020B0604020202020204" pitchFamily="34" charset="0"/>
+              </a:defRPr>
+            </a:lvl3pPr>
+            <a:lvl4pPr marL="1600200" indent="-228600" eaLnBrk="0" hangingPunct="0">
+              <a:defRPr>
+                <a:solidFill>
+                  <a:schemeClr val="tx1"/>
+                </a:solidFill>
+                <a:latin typeface="Arial" panose="020B0604020202020204" pitchFamily="34" charset="0"/>
+                <a:cs typeface="Arial" panose="020B0604020202020204" pitchFamily="34" charset="0"/>
+              </a:defRPr>
+            </a:lvl4pPr>
+            <a:lvl5pPr marL="2057400" indent="-228600" eaLnBrk="0" hangingPunct="0">
+              <a:defRPr>
+                <a:solidFill>
+                  <a:schemeClr val="tx1"/>
+                </a:solidFill>
+                <a:latin typeface="Arial" panose="020B0604020202020204" pitchFamily="34" charset="0"/>
+                <a:cs typeface="Arial" panose="020B0604020202020204" pitchFamily="34" charset="0"/>
+              </a:defRPr>
+            </a:lvl5pPr>
+            <a:lvl6pPr marL="2514600" indent="-228600" eaLnBrk="0" fontAlgn="base" hangingPunct="0">
+              <a:spcBef>
+                <a:spcPct val="0"/>
+              </a:spcBef>
+              <a:spcAft>
+                <a:spcPct val="0"/>
+              </a:spcAft>
+              <a:defRPr>
+                <a:solidFill>
+                  <a:schemeClr val="tx1"/>
+                </a:solidFill>
+                <a:latin typeface="Arial" panose="020B0604020202020204" pitchFamily="34" charset="0"/>
+                <a:cs typeface="Arial" panose="020B0604020202020204" pitchFamily="34" charset="0"/>
+              </a:defRPr>
+            </a:lvl6pPr>
+            <a:lvl7pPr marL="2971800" indent="-228600" eaLnBrk="0" fontAlgn="base" hangingPunct="0">
+              <a:spcBef>
+                <a:spcPct val="0"/>
+              </a:spcBef>
+              <a:spcAft>
+                <a:spcPct val="0"/>
+              </a:spcAft>
+              <a:defRPr>
+                <a:solidFill>
+                  <a:schemeClr val="tx1"/>
+                </a:solidFill>
+                <a:latin typeface="Arial" panose="020B0604020202020204" pitchFamily="34" charset="0"/>
+                <a:cs typeface="Arial" panose="020B0604020202020204" pitchFamily="34" charset="0"/>
+              </a:defRPr>
+            </a:lvl7pPr>
+            <a:lvl8pPr marL="3429000" indent="-228600" eaLnBrk="0" fontAlgn="base" hangingPunct="0">
+              <a:spcBef>
+                <a:spcPct val="0"/>
+              </a:spcBef>
+              <a:spcAft>
+                <a:spcPct val="0"/>
+              </a:spcAft>
+              <a:defRPr>
+                <a:solidFill>
+                  <a:schemeClr val="tx1"/>
+                </a:solidFill>
+                <a:latin typeface="Arial" panose="020B0604020202020204" pitchFamily="34" charset="0"/>
+                <a:cs typeface="Arial" panose="020B0604020202020204" pitchFamily="34" charset="0"/>
+              </a:defRPr>
+            </a:lvl8pPr>
+            <a:lvl9pPr marL="3886200" indent="-228600" eaLnBrk="0" fontAlgn="base" hangingPunct="0">
+              <a:spcBef>
+                <a:spcPct val="0"/>
+              </a:spcBef>
+              <a:spcAft>
+                <a:spcPct val="0"/>
+              </a:spcAft>
+              <a:defRPr>
+                <a:solidFill>
+                  <a:schemeClr val="tx1"/>
+                </a:solidFill>
+                <a:latin typeface="Arial" panose="020B0604020202020204" pitchFamily="34" charset="0"/>
+                <a:cs typeface="Arial" panose="020B0604020202020204" pitchFamily="34" charset="0"/>
+              </a:defRPr>
+            </a:lvl9pPr>
+          </a:lstStyle>
+          <a:p>
+            <a:pPr eaLnBrk="1" hangingPunct="1">
+              <a:spcBef>
+                <a:spcPct val="20000"/>
+              </a:spcBef>
+              <a:buFont typeface="Wingdings" panose="05000000000000000000" pitchFamily="2" charset="2"/>
+              <a:buChar char="§"/>
+            </a:pPr>
+            <a:r>
+              <a:rPr lang="en-US" altLang="en-US" sz="1900" dirty="0">
+                <a:solidFill>
+                  <a:srgbClr val="0000FF"/>
+                </a:solidFill>
+                <a:latin typeface="Times New Roman" panose="02020603050405020304" pitchFamily="18" charset="0"/>
+                <a:cs typeface="Times New Roman" panose="02020603050405020304" pitchFamily="18" charset="0"/>
+              </a:rPr>
+              <a:t>Sense &gt; decide &gt; act loop runs every 2 seconds on the ESP32.</a:t>
+            </a:r>
+          </a:p>
+          <a:p>
+            <a:pPr eaLnBrk="1" hangingPunct="1">
+              <a:spcBef>
+                <a:spcPct val="20000"/>
+              </a:spcBef>
+              <a:buFont typeface="Wingdings" panose="05000000000000000000" pitchFamily="2" charset="2"/>
+              <a:buChar char="§"/>
+            </a:pPr>
+            <a:r>
+              <a:rPr lang="en-US" altLang="en-US" sz="1900" dirty="0">
+                <a:solidFill>
+                  <a:srgbClr val="0000FF"/>
+                </a:solidFill>
+                <a:latin typeface="Times New Roman" panose="02020603050405020304" pitchFamily="18" charset="0"/>
+                <a:cs typeface="Times New Roman" panose="02020603050405020304" pitchFamily="18" charset="0"/>
+              </a:rPr>
+              <a:t>AUTO mode: rules engine with hysteresis bands.  MANUAL mode: direct per-channel control from the UI.</a:t>
+            </a:r>
+          </a:p>
+          <a:p>
+            <a:pPr eaLnBrk="1" hangingPunct="1">
+              <a:spcBef>
+                <a:spcPct val="20000"/>
+              </a:spcBef>
+              <a:buFont typeface="Wingdings" panose="05000000000000000000" pitchFamily="2" charset="2"/>
+              <a:buChar char="§"/>
+            </a:pPr>
+            <a:r>
+              <a:rPr lang="en-US" altLang="en-US" sz="1900" dirty="0">
+                <a:solidFill>
+                  <a:srgbClr val="0000FF"/>
+                </a:solidFill>
+                <a:latin typeface="Times New Roman" panose="02020603050405020304" pitchFamily="18" charset="0"/>
+                <a:cs typeface="Times New Roman" panose="02020603050405020304" pitchFamily="18" charset="0"/>
+              </a:rPr>
+              <a:t>All actuators are isolated from the logic side through opto-coupled MOSFET drivers (active-low).</a:t>
+            </a:r>
+          </a:p>
+        </p:txBody>
+      </p:sp>
+      <p:sp>
+        <p:nvSpPr>
+          <p:cNvPr id="18436" name="Text Box 29"/>
+          <p:cNvSpPr txBox="1">
+            <a:spLocks noChangeArrowheads="1"/>
+          </p:cNvSpPr>
+          <p:nvPr/>
+        </p:nvSpPr>
+        <p:spPr bwMode="auto">
+          <a:xfrm>
+            <a:off x="5029200" y="7699248"/>
+            <a:ext cx="6400800" cy="523220"/>
+          </a:xfrm>
+          <a:prstGeom prst="rect">
+            <a:avLst/>
+          </a:prstGeom>
+          <a:noFill/>
+          <a:ln>
+            <a:noFill/>
+          </a:ln>
+          <a:extLst>
+            <a:ext uri="{909E8E84-426E-40DD-AFC4-6F175D3DCCD1}">
+              <a14:hiddenFill xmlns:a14="http://schemas.microsoft.com/office/drawing/2010/main">
+                <a:solidFill>
+                  <a:srgbClr val="FFFFFF"/>
+                </a:solidFill>
+              </a14:hiddenFill>
+            </a:ext>
+            <a:ext uri="{91240B29-F687-4F45-9708-019B960494DF}">
+              <a14:hiddenLine xmlns:a14="http://schemas.microsoft.com/office/drawing/2010/main" w="9525">
+                <a:solidFill>
+                  <a:srgbClr val="000000"/>
+                </a:solidFill>
+                <a:miter lim="800000"/>
+                <a:headEnd/>
+                <a:tailEnd/>
+              </a14:hiddenLine>
+            </a:ext>
+          </a:extLst>
+        </p:spPr>
+        <p:txBody>
+          <a:bodyPr wrap="square">
+            <a:spAutoFit/>
+          </a:bodyPr>
+          <a:lstStyle>
+            <a:lvl1pPr eaLnBrk="0" hangingPunct="0">
+              <a:defRPr>
+                <a:solidFill>
+                  <a:schemeClr val="tx1"/>
+                </a:solidFill>
+                <a:latin typeface="Arial" panose="020B0604020202020204" pitchFamily="34" charset="0"/>
+                <a:cs typeface="Arial" panose="020B0604020202020204" pitchFamily="34" charset="0"/>
+              </a:defRPr>
+            </a:lvl1pPr>
+            <a:lvl2pPr marL="742950" indent="-285750" eaLnBrk="0" hangingPunct="0">
+              <a:defRPr>
+                <a:solidFill>
+                  <a:schemeClr val="tx1"/>
+                </a:solidFill>
+                <a:latin typeface="Arial" panose="020B0604020202020204" pitchFamily="34" charset="0"/>
+                <a:cs typeface="Arial" panose="020B0604020202020204" pitchFamily="34" charset="0"/>
+              </a:defRPr>
+            </a:lvl2pPr>
+            <a:lvl3pPr marL="1143000" indent="-228600" eaLnBrk="0" hangingPunct="0">
+              <a:defRPr>
+                <a:solidFill>
+                  <a:schemeClr val="tx1"/>
+                </a:solidFill>
+                <a:latin typeface="Arial" panose="020B0604020202020204" pitchFamily="34" charset="0"/>
+                <a:cs typeface="Arial" panose="020B0604020202020204" pitchFamily="34" charset="0"/>
+              </a:defRPr>
+            </a:lvl3pPr>
+            <a:lvl4pPr marL="1600200" indent="-228600" eaLnBrk="0" hangingPunct="0">
+              <a:defRPr>
+                <a:solidFill>
+                  <a:schemeClr val="tx1"/>
+                </a:solidFill>
+                <a:latin typeface="Arial" panose="020B0604020202020204" pitchFamily="34" charset="0"/>
+                <a:cs typeface="Arial" panose="020B0604020202020204" pitchFamily="34" charset="0"/>
+              </a:defRPr>
+            </a:lvl4pPr>
+            <a:lvl5pPr marL="2057400" indent="-228600" eaLnBrk="0" hangingPunct="0">
+              <a:defRPr>
+                <a:solidFill>
+                  <a:schemeClr val="tx1"/>
+                </a:solidFill>
+                <a:latin typeface="Arial" panose="020B0604020202020204" pitchFamily="34" charset="0"/>
+                <a:cs typeface="Arial" panose="020B0604020202020204" pitchFamily="34" charset="0"/>
+              </a:defRPr>
+            </a:lvl5pPr>
+            <a:lvl6pPr marL="2514600" indent="-228600" eaLnBrk="0" fontAlgn="base" hangingPunct="0">
+              <a:spcBef>
+                <a:spcPct val="0"/>
+              </a:spcBef>
+              <a:spcAft>
+                <a:spcPct val="0"/>
+              </a:spcAft>
+              <a:defRPr>
+                <a:solidFill>
+                  <a:schemeClr val="tx1"/>
+                </a:solidFill>
+                <a:latin typeface="Arial" panose="020B0604020202020204" pitchFamily="34" charset="0"/>
+                <a:cs typeface="Arial" panose="020B0604020202020204" pitchFamily="34" charset="0"/>
+              </a:defRPr>
+            </a:lvl6pPr>
+            <a:lvl7pPr marL="2971800" indent="-228600" eaLnBrk="0" fontAlgn="base" hangingPunct="0">
+              <a:spcBef>
+                <a:spcPct val="0"/>
+              </a:spcBef>
+              <a:spcAft>
+                <a:spcPct val="0"/>
+              </a:spcAft>
+              <a:defRPr>
+                <a:solidFill>
+                  <a:schemeClr val="tx1"/>
+                </a:solidFill>
+                <a:latin typeface="Arial" panose="020B0604020202020204" pitchFamily="34" charset="0"/>
+                <a:cs typeface="Arial" panose="020B0604020202020204" pitchFamily="34" charset="0"/>
+              </a:defRPr>
+            </a:lvl7pPr>
+            <a:lvl8pPr marL="3429000" indent="-228600" eaLnBrk="0" fontAlgn="base" hangingPunct="0">
+              <a:spcBef>
+                <a:spcPct val="0"/>
+              </a:spcBef>
+              <a:spcAft>
+                <a:spcPct val="0"/>
+              </a:spcAft>
+              <a:defRPr>
+                <a:solidFill>
+                  <a:schemeClr val="tx1"/>
+                </a:solidFill>
+                <a:latin typeface="Arial" panose="020B0604020202020204" pitchFamily="34" charset="0"/>
+                <a:cs typeface="Arial" panose="020B0604020202020204" pitchFamily="34" charset="0"/>
+              </a:defRPr>
+            </a:lvl8pPr>
+            <a:lvl9pPr marL="3886200" indent="-228600" eaLnBrk="0" fontAlgn="base" hangingPunct="0">
+              <a:spcBef>
+                <a:spcPct val="0"/>
+              </a:spcBef>
+              <a:spcAft>
+                <a:spcPct val="0"/>
+              </a:spcAft>
+              <a:defRPr>
+                <a:solidFill>
+                  <a:schemeClr val="tx1"/>
+                </a:solidFill>
+                <a:latin typeface="Arial" panose="020B0604020202020204" pitchFamily="34" charset="0"/>
+                <a:cs typeface="Arial" panose="020B0604020202020204" pitchFamily="34" charset="0"/>
+              </a:defRPr>
+            </a:lvl9pPr>
+          </a:lstStyle>
+          <a:p>
+            <a:pPr algn="ctr" eaLnBrk="1" hangingPunct="1">
+              <a:spcBef>
+                <a:spcPct val="50000"/>
+              </a:spcBef>
+            </a:pPr>
+            <a:r>
+              <a:rPr lang="en-US" altLang="en-US" sz="1300" b="1" dirty="0" i="1">
+                <a:solidFill>
+                  <a:srgbClr val="FF1919"/>
+                </a:solidFill>
+                <a:latin typeface="Times New Roman" panose="02020603050405020304" pitchFamily="18" charset="0"/>
+                <a:cs typeface="Times New Roman" panose="02020603050405020304" pitchFamily="18" charset="0"/>
+              </a:rPr>
+              <a:t>Fig. 1: Block diagram of the automated terrarium system</a:t>
+            </a:r>
+          </a:p>
+        </p:txBody>
+      </p:sp>
+      <p:sp>
+        <p:nvSpPr>
+          <p:cNvPr id="3" name="Slide Number Placeholder 2"/>
+          <p:cNvSpPr>
+            <a:spLocks noGrp="1"/>
+          </p:cNvSpPr>
+          <p:nvPr>
+            <p:ph type="sldNum" sz="quarter" idx="12"/>
+          </p:nvPr>
+        </p:nvSpPr>
+        <p:spPr/>
+        <p:txBody>
+          <a:bodyPr/>
+          <a:lstStyle/>
+          <a:p>
+            <a:fld id="{48F63A3B-78C7-47BE-AE5E-E10140E04643}" type="slidenum">
+              <a:rPr lang="en-US" smtClean="0"/>
+              <a:pPr/>
+              <a:t>9</a:t>
+            </a:fld>
+            <a:endParaRPr lang="en-US" dirty="0"/>
+          </a:p>
+        </p:txBody>
+      </p:sp>
+      <p:pic>
+        <p:nvPicPr>
+          <p:cNvPr id="18437" name="Picture 18436" descr="block-diagram.png"/>
+          <p:cNvPicPr>
+            <a:picLocks noChangeAspect="1"/>
+          </p:cNvPicPr>
+          <p:nvPr/>
+        </p:nvPicPr>
+        <p:blipFill>
+          <a:blip r:embed="rId4"/>
+          <a:stretch>
+            <a:fillRect/>
+          </a:stretch>
+        </p:blipFill>
+        <p:spPr>
+          <a:xfrm>
+            <a:off x="4517353" y="3611880"/>
+            <a:ext cx="7424494" cy="3977639"/>
+          </a:xfrm>
+          <a:prstGeom prst="rect">
+            <a:avLst/>
+          </a:prstGeom>
+        </p:spPr>
+      </p:pic>
+    </p:spTree>
+    <p:extLst>
+      <p:ext uri="{BB962C8B-B14F-4D97-AF65-F5344CB8AC3E}">
+        <p14:creationId xmlns:p14="http://schemas.microsoft.com/office/powerpoint/2010/main" val="137250088"/>
+      </p:ext>
+    </p:extLst>
+  </p:cSld>
+  <p:clrMapOvr>
+    <a:masterClrMapping/>
+  </p:clrMapOvr>
+</p:sld>
+</file>
+
+<file path=ppt/slides/slide11.xml><?xml version="1.0" encoding="utf-8"?>
+<p:sld xmlns:a="http://schemas.openxmlformats.org/drawingml/2006/main" xmlns:r="http://schemas.openxmlformats.org/officeDocument/2006/relationships" xmlns:p="http://schemas.openxmlformats.org/presentationml/2006/main">
+  <p:cSld>
+    <p:spTree>
+      <p:nvGrpSpPr>
+        <p:cNvPr id="1" name=""/>
+        <p:cNvGrpSpPr/>
+        <p:nvPr/>
+      </p:nvGrpSpPr>
+      <p:grpSpPr>
+        <a:xfrm>
+          <a:off x="0" y="0"/>
+          <a:ext cx="0" cy="0"/>
+          <a:chOff x="0" y="0"/>
+          <a:chExt cx="0" cy="0"/>
+        </a:xfrm>
+      </p:grpSpPr>
+      <p:sp>
+        <p:nvSpPr>
           <p:cNvPr id="19458" name="Rectangle 2"/>
           <p:cNvSpPr>
             <a:spLocks noChangeArrowheads="1"/>
@@ -3921,7 +4578,7 @@
 </p:sld>
 </file>
 
-<file path=ppt/slides/slide11.xml><?xml version="1.0" encoding="utf-8"?>
+<file path=ppt/slides/slide12.xml><?xml version="1.0" encoding="utf-8"?>
 <p:sld xmlns:a="http://schemas.openxmlformats.org/drawingml/2006/main" xmlns:r="http://schemas.openxmlformats.org/officeDocument/2006/relationships" xmlns:p="http://schemas.openxmlformats.org/presentationml/2006/main">
   <p:cSld>
     <p:spTree>
@@ -4413,7 +5070,468 @@
 </p:sld>
 </file>
 
-<file path=ppt/slides/slide12.xml><?xml version="1.0" encoding="utf-8"?>
+<file path=ppt/slides/slide13.xml><?xml version="1.0" encoding="utf-8"?>
+<p:sld xmlns:a="http://schemas.openxmlformats.org/drawingml/2006/main" xmlns:p="http://schemas.openxmlformats.org/presentationml/2006/main" xmlns:r="http://schemas.openxmlformats.org/officeDocument/2006/relationships">
+  <p:cSld>
+    <p:spTree>
+      <p:nvGrpSpPr>
+        <p:cNvPr id="1" name=""/>
+        <p:cNvGrpSpPr/>
+        <p:nvPr/>
+      </p:nvGrpSpPr>
+      <p:grpSpPr/>
+      <p:sp>
+        <p:nvSpPr>
+          <p:cNvPr id="17410" name="Oval 3" descr="Parchment"/>
+          <p:cNvSpPr>
+            <a:spLocks noChangeArrowheads="1"/>
+          </p:cNvSpPr>
+          <p:nvPr/>
+        </p:nvSpPr>
+        <p:spPr bwMode="auto">
+          <a:xfrm>
+            <a:off x="1512916" y="529590"/>
+            <a:ext cx="12818226" cy="1188720"/>
+          </a:xfrm>
+          <a:prstGeom prst="ellipse">
+            <a:avLst/>
+          </a:prstGeom>
+          <a:blipFill dpi="0" rotWithShape="1">
+            <a:blip r:embed="rId2"/>
+            <a:srcRect/>
+            <a:tile tx="0" ty="0" sx="100000" sy="100000" flip="none" algn="tl"/>
+          </a:blipFill>
+          <a:ln w="9525">
+            <a:solidFill>
+              <a:schemeClr val="tx1"/>
+            </a:solidFill>
+            <a:round/>
+            <a:headEnd/>
+            <a:tailEnd/>
+          </a:ln>
+        </p:spPr>
+        <p:txBody>
+          <a:bodyPr wrap="none" anchor="ctr"/>
+          <a:lstStyle>
+            <a:lvl1pPr eaLnBrk="0" hangingPunct="0">
+              <a:defRPr>
+                <a:solidFill>
+                  <a:schemeClr val="tx1"/>
+                </a:solidFill>
+                <a:latin typeface="Arial" panose="020B0604020202020204" pitchFamily="34" charset="0"/>
+                <a:cs typeface="Arial" panose="020B0604020202020204" pitchFamily="34" charset="0"/>
+              </a:defRPr>
+            </a:lvl1pPr>
+            <a:lvl2pPr marL="742950" indent="-285750" eaLnBrk="0" hangingPunct="0">
+              <a:defRPr>
+                <a:solidFill>
+                  <a:schemeClr val="tx1"/>
+                </a:solidFill>
+                <a:latin typeface="Arial" panose="020B0604020202020204" pitchFamily="34" charset="0"/>
+                <a:cs typeface="Arial" panose="020B0604020202020204" pitchFamily="34" charset="0"/>
+              </a:defRPr>
+            </a:lvl2pPr>
+            <a:lvl3pPr marL="1143000" indent="-228600" eaLnBrk="0" hangingPunct="0">
+              <a:defRPr>
+                <a:solidFill>
+                  <a:schemeClr val="tx1"/>
+                </a:solidFill>
+                <a:latin typeface="Arial" panose="020B0604020202020204" pitchFamily="34" charset="0"/>
+                <a:cs typeface="Arial" panose="020B0604020202020204" pitchFamily="34" charset="0"/>
+              </a:defRPr>
+            </a:lvl3pPr>
+            <a:lvl4pPr marL="1600200" indent="-228600" eaLnBrk="0" hangingPunct="0">
+              <a:defRPr>
+                <a:solidFill>
+                  <a:schemeClr val="tx1"/>
+                </a:solidFill>
+                <a:latin typeface="Arial" panose="020B0604020202020204" pitchFamily="34" charset="0"/>
+                <a:cs typeface="Arial" panose="020B0604020202020204" pitchFamily="34" charset="0"/>
+              </a:defRPr>
+            </a:lvl4pPr>
+            <a:lvl5pPr marL="2057400" indent="-228600" eaLnBrk="0" hangingPunct="0">
+              <a:defRPr>
+                <a:solidFill>
+                  <a:schemeClr val="tx1"/>
+                </a:solidFill>
+                <a:latin typeface="Arial" panose="020B0604020202020204" pitchFamily="34" charset="0"/>
+                <a:cs typeface="Arial" panose="020B0604020202020204" pitchFamily="34" charset="0"/>
+              </a:defRPr>
+            </a:lvl5pPr>
+            <a:lvl6pPr marL="2514600" indent="-228600" eaLnBrk="0" fontAlgn="base" hangingPunct="0">
+              <a:spcBef>
+                <a:spcPct val="0"/>
+              </a:spcBef>
+              <a:spcAft>
+                <a:spcPct val="0"/>
+              </a:spcAft>
+              <a:defRPr>
+                <a:solidFill>
+                  <a:schemeClr val="tx1"/>
+                </a:solidFill>
+                <a:latin typeface="Arial" panose="020B0604020202020204" pitchFamily="34" charset="0"/>
+                <a:cs typeface="Arial" panose="020B0604020202020204" pitchFamily="34" charset="0"/>
+              </a:defRPr>
+            </a:lvl6pPr>
+            <a:lvl7pPr marL="2971800" indent="-228600" eaLnBrk="0" fontAlgn="base" hangingPunct="0">
+              <a:spcBef>
+                <a:spcPct val="0"/>
+              </a:spcBef>
+              <a:spcAft>
+                <a:spcPct val="0"/>
+              </a:spcAft>
+              <a:defRPr>
+                <a:solidFill>
+                  <a:schemeClr val="tx1"/>
+                </a:solidFill>
+                <a:latin typeface="Arial" panose="020B0604020202020204" pitchFamily="34" charset="0"/>
+                <a:cs typeface="Arial" panose="020B0604020202020204" pitchFamily="34" charset="0"/>
+              </a:defRPr>
+            </a:lvl7pPr>
+            <a:lvl8pPr marL="3429000" indent="-228600" eaLnBrk="0" fontAlgn="base" hangingPunct="0">
+              <a:spcBef>
+                <a:spcPct val="0"/>
+              </a:spcBef>
+              <a:spcAft>
+                <a:spcPct val="0"/>
+              </a:spcAft>
+              <a:defRPr>
+                <a:solidFill>
+                  <a:schemeClr val="tx1"/>
+                </a:solidFill>
+                <a:latin typeface="Arial" panose="020B0604020202020204" pitchFamily="34" charset="0"/>
+                <a:cs typeface="Arial" panose="020B0604020202020204" pitchFamily="34" charset="0"/>
+              </a:defRPr>
+            </a:lvl8pPr>
+            <a:lvl9pPr marL="3886200" indent="-228600" eaLnBrk="0" fontAlgn="base" hangingPunct="0">
+              <a:spcBef>
+                <a:spcPct val="0"/>
+              </a:spcBef>
+              <a:spcAft>
+                <a:spcPct val="0"/>
+              </a:spcAft>
+              <a:defRPr>
+                <a:solidFill>
+                  <a:schemeClr val="tx1"/>
+                </a:solidFill>
+                <a:latin typeface="Arial" panose="020B0604020202020204" pitchFamily="34" charset="0"/>
+                <a:cs typeface="Arial" panose="020B0604020202020204" pitchFamily="34" charset="0"/>
+              </a:defRPr>
+            </a:lvl9pPr>
+          </a:lstStyle>
+          <a:p>
+            <a:pPr algn="ctr"/>
+            <a:r>
+              <a:rPr lang="en-US" altLang="en-US" sz="3840" b="1" dirty="0">
+                <a:solidFill>
+                  <a:srgbClr val="0070C0"/>
+                </a:solidFill>
+                <a:latin typeface="Comic Sans MS" panose="030F0702030302020204" pitchFamily="66" charset="0"/>
+              </a:rPr>
+              <a:t>Description/Methodology of the Work</a:t>
+            </a:r>
+          </a:p>
+        </p:txBody>
+      </p:sp>
+      <p:sp>
+        <p:nvSpPr>
+          <p:cNvPr id="17411" name="Rectangle 2"/>
+          <p:cNvSpPr>
+            <a:spLocks noChangeArrowheads="1"/>
+          </p:cNvSpPr>
+          <p:nvPr/>
+        </p:nvSpPr>
+        <p:spPr bwMode="auto">
+          <a:xfrm>
+            <a:off x="432261" y="2286000"/>
+            <a:ext cx="15677803" cy="1920240"/>
+          </a:xfrm>
+          <a:prstGeom prst="rect">
+            <a:avLst/>
+          </a:prstGeom>
+          <a:noFill/>
+          <a:ln>
+            <a:noFill/>
+          </a:ln>
+          <a:extLst>
+            <a:ext uri="{909E8E84-426E-40DD-AFC4-6F175D3DCCD1}">
+              <a14:hiddenFill xmlns:a14="http://schemas.microsoft.com/office/drawing/2010/main">
+                <a:solidFill>
+                  <a:srgbClr val="FFFFFF"/>
+                </a:solidFill>
+              </a14:hiddenFill>
+            </a:ext>
+            <a:ext uri="{91240B29-F687-4F45-9708-019B960494DF}">
+              <a14:hiddenLine xmlns:a14="http://schemas.microsoft.com/office/drawing/2010/main" w="9525">
+                <a:solidFill>
+                  <a:srgbClr val="000000"/>
+                </a:solidFill>
+                <a:miter lim="800000"/>
+                <a:headEnd/>
+                <a:tailEnd/>
+              </a14:hiddenLine>
+            </a:ext>
+          </a:extLst>
+        </p:spPr>
+        <p:txBody>
+          <a:bodyPr wrap="square"/>
+          <a:lstStyle>
+            <a:lvl1pPr marL="342900" indent="-342900" eaLnBrk="0" hangingPunct="0">
+              <a:defRPr>
+                <a:solidFill>
+                  <a:schemeClr val="tx1"/>
+                </a:solidFill>
+                <a:latin typeface="Arial" panose="020B0604020202020204" pitchFamily="34" charset="0"/>
+                <a:cs typeface="Arial" panose="020B0604020202020204" pitchFamily="34" charset="0"/>
+              </a:defRPr>
+            </a:lvl1pPr>
+            <a:lvl2pPr marL="742950" indent="-285750" eaLnBrk="0" hangingPunct="0">
+              <a:defRPr>
+                <a:solidFill>
+                  <a:schemeClr val="tx1"/>
+                </a:solidFill>
+                <a:latin typeface="Arial" panose="020B0604020202020204" pitchFamily="34" charset="0"/>
+                <a:cs typeface="Arial" panose="020B0604020202020204" pitchFamily="34" charset="0"/>
+              </a:defRPr>
+            </a:lvl2pPr>
+            <a:lvl3pPr marL="1143000" indent="-228600" eaLnBrk="0" hangingPunct="0">
+              <a:defRPr>
+                <a:solidFill>
+                  <a:schemeClr val="tx1"/>
+                </a:solidFill>
+                <a:latin typeface="Arial" panose="020B0604020202020204" pitchFamily="34" charset="0"/>
+                <a:cs typeface="Arial" panose="020B0604020202020204" pitchFamily="34" charset="0"/>
+              </a:defRPr>
+            </a:lvl3pPr>
+            <a:lvl4pPr marL="1600200" indent="-228600" eaLnBrk="0" hangingPunct="0">
+              <a:defRPr>
+                <a:solidFill>
+                  <a:schemeClr val="tx1"/>
+                </a:solidFill>
+                <a:latin typeface="Arial" panose="020B0604020202020204" pitchFamily="34" charset="0"/>
+                <a:cs typeface="Arial" panose="020B0604020202020204" pitchFamily="34" charset="0"/>
+              </a:defRPr>
+            </a:lvl4pPr>
+            <a:lvl5pPr marL="2057400" indent="-228600" eaLnBrk="0" hangingPunct="0">
+              <a:defRPr>
+                <a:solidFill>
+                  <a:schemeClr val="tx1"/>
+                </a:solidFill>
+                <a:latin typeface="Arial" panose="020B0604020202020204" pitchFamily="34" charset="0"/>
+                <a:cs typeface="Arial" panose="020B0604020202020204" pitchFamily="34" charset="0"/>
+              </a:defRPr>
+            </a:lvl5pPr>
+            <a:lvl6pPr marL="2514600" indent="-228600" eaLnBrk="0" fontAlgn="base" hangingPunct="0">
+              <a:spcBef>
+                <a:spcPct val="0"/>
+              </a:spcBef>
+              <a:spcAft>
+                <a:spcPct val="0"/>
+              </a:spcAft>
+              <a:defRPr>
+                <a:solidFill>
+                  <a:schemeClr val="tx1"/>
+                </a:solidFill>
+                <a:latin typeface="Arial" panose="020B0604020202020204" pitchFamily="34" charset="0"/>
+                <a:cs typeface="Arial" panose="020B0604020202020204" pitchFamily="34" charset="0"/>
+              </a:defRPr>
+            </a:lvl6pPr>
+            <a:lvl7pPr marL="2971800" indent="-228600" eaLnBrk="0" fontAlgn="base" hangingPunct="0">
+              <a:spcBef>
+                <a:spcPct val="0"/>
+              </a:spcBef>
+              <a:spcAft>
+                <a:spcPct val="0"/>
+              </a:spcAft>
+              <a:defRPr>
+                <a:solidFill>
+                  <a:schemeClr val="tx1"/>
+                </a:solidFill>
+                <a:latin typeface="Arial" panose="020B0604020202020204" pitchFamily="34" charset="0"/>
+                <a:cs typeface="Arial" panose="020B0604020202020204" pitchFamily="34" charset="0"/>
+              </a:defRPr>
+            </a:lvl7pPr>
+            <a:lvl8pPr marL="3429000" indent="-228600" eaLnBrk="0" fontAlgn="base" hangingPunct="0">
+              <a:spcBef>
+                <a:spcPct val="0"/>
+              </a:spcBef>
+              <a:spcAft>
+                <a:spcPct val="0"/>
+              </a:spcAft>
+              <a:defRPr>
+                <a:solidFill>
+                  <a:schemeClr val="tx1"/>
+                </a:solidFill>
+                <a:latin typeface="Arial" panose="020B0604020202020204" pitchFamily="34" charset="0"/>
+                <a:cs typeface="Arial" panose="020B0604020202020204" pitchFamily="34" charset="0"/>
+              </a:defRPr>
+            </a:lvl8pPr>
+            <a:lvl9pPr marL="3886200" indent="-228600" eaLnBrk="0" fontAlgn="base" hangingPunct="0">
+              <a:spcBef>
+                <a:spcPct val="0"/>
+              </a:spcBef>
+              <a:spcAft>
+                <a:spcPct val="0"/>
+              </a:spcAft>
+              <a:defRPr>
+                <a:solidFill>
+                  <a:schemeClr val="tx1"/>
+                </a:solidFill>
+                <a:latin typeface="Arial" panose="020B0604020202020204" pitchFamily="34" charset="0"/>
+                <a:cs typeface="Arial" panose="020B0604020202020204" pitchFamily="34" charset="0"/>
+              </a:defRPr>
+            </a:lvl9pPr>
+          </a:lstStyle>
+          <a:p>
+            <a:pPr eaLnBrk="1" hangingPunct="1">
+              <a:lnSpc>
+                <a:spcPct val="80000"/>
+              </a:lnSpc>
+              <a:spcBef>
+                <a:spcPct val="20000"/>
+              </a:spcBef>
+              <a:buFontTx/>
+              <a:buChar char="•"/>
+            </a:pPr>
+            <a:r>
+              <a:rPr lang="en-US" altLang="en-US" sz="1700" b="1" dirty="0">
+                <a:latin typeface="Times New Roman" panose="02020603050405020304" pitchFamily="18" charset="0"/>
+                <a:cs typeface="Times New Roman" panose="02020603050405020304" pitchFamily="18" charset="0"/>
+              </a:rPr>
+              <a:t>As-built wiring is documented one-to-one in a self-developed interactive diagram; 32 of 39 planned connections are live on the bench build.</a:t>
+            </a:r>
+          </a:p>
+          <a:p>
+            <a:pPr eaLnBrk="1" hangingPunct="1">
+              <a:lnSpc>
+                <a:spcPct val="80000"/>
+              </a:lnSpc>
+              <a:spcBef>
+                <a:spcPct val="20000"/>
+              </a:spcBef>
+              <a:buFontTx/>
+              <a:buChar char="•"/>
+            </a:pPr>
+            <a:r>
+              <a:rPr lang="en-US" altLang="en-US" sz="1700" b="1" dirty="0">
+                <a:latin typeface="Times New Roman" panose="02020603050405020304" pitchFamily="18" charset="0"/>
+                <a:cs typeface="Times New Roman" panose="02020603050405020304" pitchFamily="18" charset="0"/>
+              </a:rPr>
+              <a:t>Firmware: Arduino C++ on the ESP32, with a web server, a serial command console and settings persisted in flash (NVS).</a:t>
+            </a:r>
+          </a:p>
+          <a:p>
+            <a:pPr eaLnBrk="1" hangingPunct="1">
+              <a:lnSpc>
+                <a:spcPct val="80000"/>
+              </a:lnSpc>
+              <a:spcBef>
+                <a:spcPct val="20000"/>
+              </a:spcBef>
+              <a:buFontTx/>
+              <a:buChar char="•"/>
+            </a:pPr>
+            <a:r>
+              <a:rPr lang="en-US" altLang="en-US" sz="1700" b="1" dirty="0">
+                <a:latin typeface="Times New Roman" panose="02020603050405020304" pitchFamily="18" charset="0"/>
+                <a:cs typeface="Times New Roman" panose="02020603050405020304" pitchFamily="18" charset="0"/>
+              </a:rPr>
+              <a:t>Windows console app (single .exe): auto-detects the board, installs the driver and toolchain, flashes firmware and provisions Wi-Fi over USB.</a:t>
+            </a:r>
+          </a:p>
+        </p:txBody>
+      </p:sp>
+      <p:sp>
+        <p:nvSpPr>
+          <p:cNvPr id="3" name="Slide Number Placeholder 2"/>
+          <p:cNvSpPr>
+            <a:spLocks noGrp="1"/>
+          </p:cNvSpPr>
+          <p:nvPr>
+            <p:ph type="sldNum" sz="quarter" idx="12"/>
+          </p:nvPr>
+        </p:nvSpPr>
+        <p:spPr/>
+        <p:txBody>
+          <a:bodyPr/>
+          <a:lstStyle/>
+          <a:p>
+            <a:fld id="{48F63A3B-78C7-47BE-AE5E-E10140E04643}" type="slidenum">
+              <a:rPr lang="en-US" smtClean="0"/>
+              <a:pPr/>
+              <a:t>7</a:t>
+            </a:fld>
+            <a:endParaRPr lang="en-US" dirty="0"/>
+          </a:p>
+        </p:txBody>
+      </p:sp>
+      <p:pic>
+        <p:nvPicPr>
+          <p:cNvPr id="17412" name="Picture 17411" descr="wiring-crop.png"/>
+          <p:cNvPicPr>
+            <a:picLocks noChangeAspect="1"/>
+          </p:cNvPicPr>
+          <p:nvPr/>
+        </p:nvPicPr>
+        <p:blipFill>
+          <a:blip r:embed="rId3"/>
+          <a:stretch>
+            <a:fillRect/>
+          </a:stretch>
+        </p:blipFill>
+        <p:spPr>
+          <a:xfrm>
+            <a:off x="5951000" y="3063240"/>
+            <a:ext cx="4740080" cy="4709160"/>
+          </a:xfrm>
+          <a:prstGeom prst="rect">
+            <a:avLst/>
+          </a:prstGeom>
+        </p:spPr>
+      </p:pic>
+      <p:sp>
+        <p:nvSpPr>
+          <p:cNvPr id="17413" name="TextBox 17412"/>
+          <p:cNvSpPr txBox="1"/>
+          <p:nvPr/>
+        </p:nvSpPr>
+        <p:spPr>
+          <a:xfrm>
+            <a:off x="5120640" y="7818120"/>
+            <a:ext cx="6400800" cy="365760"/>
+          </a:xfrm>
+          <a:prstGeom prst="rect">
+            <a:avLst/>
+          </a:prstGeom>
+          <a:noFill/>
+        </p:spPr>
+        <p:txBody>
+          <a:bodyPr wrap="none">
+            <a:spAutoFit/>
+          </a:bodyPr>
+          <a:lstStyle/>
+          <a:p>
+            <a:pPr algn="ctr"/>
+            <a:r>
+              <a:rPr sz="1300" i="1">
+                <a:solidFill>
+                  <a:srgbClr val="444444"/>
+                </a:solidFill>
+              </a:rPr>
+              <a:t>Fig. 4: Interactive as-built wiring diagram (self-developed tool)</a:t>
+            </a:r>
+          </a:p>
+        </p:txBody>
+      </p:sp>
+    </p:spTree>
+  </p:cSld>
+  <p:clrMapOvr>
+    <a:masterClrMapping/>
+  </p:clrMapOvr>
+</p:sld>
+</file>
+
+<file path=ppt/slides/slide14.xml><?xml version="1.0" encoding="utf-8"?>
 <p:sld xmlns:a="http://schemas.openxmlformats.org/drawingml/2006/main" xmlns:r="http://schemas.openxmlformats.org/officeDocument/2006/relationships" xmlns:p="http://schemas.openxmlformats.org/presentationml/2006/main">
   <p:cSld>
     <p:spTree>
@@ -4814,7 +5932,7 @@
 </p:sld>
 </file>
 
-<file path=ppt/slides/slide13.xml><?xml version="1.0" encoding="utf-8"?>
+<file path=ppt/slides/slide15.xml><?xml version="1.0" encoding="utf-8"?>
 <p:sld xmlns:a="http://schemas.openxmlformats.org/drawingml/2006/main" xmlns:r="http://schemas.openxmlformats.org/officeDocument/2006/relationships" xmlns:p="http://schemas.openxmlformats.org/presentationml/2006/main">
   <p:cSld>
     <p:spTree>
@@ -6154,7 +7272,7 @@
 </p:sld>
 </file>
 
-<file path=ppt/slides/slide14.xml><?xml version="1.0" encoding="utf-8"?>
+<file path=ppt/slides/slide16.xml><?xml version="1.0" encoding="utf-8"?>
 <p:sld xmlns:a="http://schemas.openxmlformats.org/drawingml/2006/main" xmlns:r="http://schemas.openxmlformats.org/officeDocument/2006/relationships" xmlns:p="http://schemas.openxmlformats.org/presentationml/2006/main">
   <p:cSld>
     <p:spTree>
@@ -7381,7 +8499,7 @@
 </p:sld>
 </file>
 
-<file path=ppt/slides/slide15.xml><?xml version="1.0" encoding="utf-8"?>
+<file path=ppt/slides/slide17.xml><?xml version="1.0" encoding="utf-8"?>
 <p:sld xmlns:a="http://schemas.openxmlformats.org/drawingml/2006/main" xmlns:r="http://schemas.openxmlformats.org/officeDocument/2006/relationships" xmlns:p="http://schemas.openxmlformats.org/presentationml/2006/main">
   <p:cSld>
     <p:spTree>
@@ -8718,7 +9836,448 @@
 </p:sld>
 </file>
 
-<file path=ppt/slides/slide16.xml><?xml version="1.0" encoding="utf-8"?>
+<file path=ppt/slides/slide18.xml><?xml version="1.0" encoding="utf-8"?>
+<p:sld xmlns:a="http://schemas.openxmlformats.org/drawingml/2006/main" xmlns:p="http://schemas.openxmlformats.org/presentationml/2006/main" xmlns:r="http://schemas.openxmlformats.org/officeDocument/2006/relationships">
+  <p:cSld>
+    <p:spTree>
+      <p:nvGrpSpPr>
+        <p:cNvPr id="1" name=""/>
+        <p:cNvGrpSpPr/>
+        <p:nvPr/>
+      </p:nvGrpSpPr>
+      <p:grpSpPr/>
+      <p:sp>
+        <p:nvSpPr>
+          <p:cNvPr id="17410" name="Oval 3" descr="Parchment"/>
+          <p:cNvSpPr>
+            <a:spLocks noChangeArrowheads="1"/>
+          </p:cNvSpPr>
+          <p:nvPr/>
+        </p:nvSpPr>
+        <p:spPr bwMode="auto">
+          <a:xfrm>
+            <a:off x="1512916" y="529590"/>
+            <a:ext cx="12818226" cy="1188720"/>
+          </a:xfrm>
+          <a:prstGeom prst="ellipse">
+            <a:avLst/>
+          </a:prstGeom>
+          <a:blipFill dpi="0" rotWithShape="1">
+            <a:blip r:embed="rId2"/>
+            <a:srcRect/>
+            <a:tile tx="0" ty="0" sx="100000" sy="100000" flip="none" algn="tl"/>
+          </a:blipFill>
+          <a:ln w="9525">
+            <a:solidFill>
+              <a:schemeClr val="tx1"/>
+            </a:solidFill>
+            <a:round/>
+            <a:headEnd/>
+            <a:tailEnd/>
+          </a:ln>
+        </p:spPr>
+        <p:txBody>
+          <a:bodyPr wrap="none" anchor="ctr"/>
+          <a:lstStyle>
+            <a:lvl1pPr eaLnBrk="0" hangingPunct="0">
+              <a:defRPr>
+                <a:solidFill>
+                  <a:schemeClr val="tx1"/>
+                </a:solidFill>
+                <a:latin typeface="Arial" panose="020B0604020202020204" pitchFamily="34" charset="0"/>
+                <a:cs typeface="Arial" panose="020B0604020202020204" pitchFamily="34" charset="0"/>
+              </a:defRPr>
+            </a:lvl1pPr>
+            <a:lvl2pPr marL="742950" indent="-285750" eaLnBrk="0" hangingPunct="0">
+              <a:defRPr>
+                <a:solidFill>
+                  <a:schemeClr val="tx1"/>
+                </a:solidFill>
+                <a:latin typeface="Arial" panose="020B0604020202020204" pitchFamily="34" charset="0"/>
+                <a:cs typeface="Arial" panose="020B0604020202020204" pitchFamily="34" charset="0"/>
+              </a:defRPr>
+            </a:lvl2pPr>
+            <a:lvl3pPr marL="1143000" indent="-228600" eaLnBrk="0" hangingPunct="0">
+              <a:defRPr>
+                <a:solidFill>
+                  <a:schemeClr val="tx1"/>
+                </a:solidFill>
+                <a:latin typeface="Arial" panose="020B0604020202020204" pitchFamily="34" charset="0"/>
+                <a:cs typeface="Arial" panose="020B0604020202020204" pitchFamily="34" charset="0"/>
+              </a:defRPr>
+            </a:lvl3pPr>
+            <a:lvl4pPr marL="1600200" indent="-228600" eaLnBrk="0" hangingPunct="0">
+              <a:defRPr>
+                <a:solidFill>
+                  <a:schemeClr val="tx1"/>
+                </a:solidFill>
+                <a:latin typeface="Arial" panose="020B0604020202020204" pitchFamily="34" charset="0"/>
+                <a:cs typeface="Arial" panose="020B0604020202020204" pitchFamily="34" charset="0"/>
+              </a:defRPr>
+            </a:lvl4pPr>
+            <a:lvl5pPr marL="2057400" indent="-228600" eaLnBrk="0" hangingPunct="0">
+              <a:defRPr>
+                <a:solidFill>
+                  <a:schemeClr val="tx1"/>
+                </a:solidFill>
+                <a:latin typeface="Arial" panose="020B0604020202020204" pitchFamily="34" charset="0"/>
+                <a:cs typeface="Arial" panose="020B0604020202020204" pitchFamily="34" charset="0"/>
+              </a:defRPr>
+            </a:lvl5pPr>
+            <a:lvl6pPr marL="2514600" indent="-228600" eaLnBrk="0" fontAlgn="base" hangingPunct="0">
+              <a:spcBef>
+                <a:spcPct val="0"/>
+              </a:spcBef>
+              <a:spcAft>
+                <a:spcPct val="0"/>
+              </a:spcAft>
+              <a:defRPr>
+                <a:solidFill>
+                  <a:schemeClr val="tx1"/>
+                </a:solidFill>
+                <a:latin typeface="Arial" panose="020B0604020202020204" pitchFamily="34" charset="0"/>
+                <a:cs typeface="Arial" panose="020B0604020202020204" pitchFamily="34" charset="0"/>
+              </a:defRPr>
+            </a:lvl6pPr>
+            <a:lvl7pPr marL="2971800" indent="-228600" eaLnBrk="0" fontAlgn="base" hangingPunct="0">
+              <a:spcBef>
+                <a:spcPct val="0"/>
+              </a:spcBef>
+              <a:spcAft>
+                <a:spcPct val="0"/>
+              </a:spcAft>
+              <a:defRPr>
+                <a:solidFill>
+                  <a:schemeClr val="tx1"/>
+                </a:solidFill>
+                <a:latin typeface="Arial" panose="020B0604020202020204" pitchFamily="34" charset="0"/>
+                <a:cs typeface="Arial" panose="020B0604020202020204" pitchFamily="34" charset="0"/>
+              </a:defRPr>
+            </a:lvl7pPr>
+            <a:lvl8pPr marL="3429000" indent="-228600" eaLnBrk="0" fontAlgn="base" hangingPunct="0">
+              <a:spcBef>
+                <a:spcPct val="0"/>
+              </a:spcBef>
+              <a:spcAft>
+                <a:spcPct val="0"/>
+              </a:spcAft>
+              <a:defRPr>
+                <a:solidFill>
+                  <a:schemeClr val="tx1"/>
+                </a:solidFill>
+                <a:latin typeface="Arial" panose="020B0604020202020204" pitchFamily="34" charset="0"/>
+                <a:cs typeface="Arial" panose="020B0604020202020204" pitchFamily="34" charset="0"/>
+              </a:defRPr>
+            </a:lvl8pPr>
+            <a:lvl9pPr marL="3886200" indent="-228600" eaLnBrk="0" fontAlgn="base" hangingPunct="0">
+              <a:spcBef>
+                <a:spcPct val="0"/>
+              </a:spcBef>
+              <a:spcAft>
+                <a:spcPct val="0"/>
+              </a:spcAft>
+              <a:defRPr>
+                <a:solidFill>
+                  <a:schemeClr val="tx1"/>
+                </a:solidFill>
+                <a:latin typeface="Arial" panose="020B0604020202020204" pitchFamily="34" charset="0"/>
+                <a:cs typeface="Arial" panose="020B0604020202020204" pitchFamily="34" charset="0"/>
+              </a:defRPr>
+            </a:lvl9pPr>
+          </a:lstStyle>
+          <a:p>
+            <a:pPr algn="ctr"/>
+            <a:r>
+              <a:rPr lang="en-US" altLang="en-US" sz="3840" b="1" dirty="0">
+                <a:solidFill>
+                  <a:srgbClr val="0070C0"/>
+                </a:solidFill>
+                <a:latin typeface="Comic Sans MS" panose="030F0702030302020204" pitchFamily="66" charset="0"/>
+              </a:rPr>
+              <a:t>Outcomes/Results and Discussions</a:t>
+            </a:r>
+          </a:p>
+        </p:txBody>
+      </p:sp>
+      <p:sp>
+        <p:nvSpPr>
+          <p:cNvPr id="17411" name="Rectangle 2"/>
+          <p:cNvSpPr>
+            <a:spLocks noChangeArrowheads="1"/>
+          </p:cNvSpPr>
+          <p:nvPr/>
+        </p:nvSpPr>
+        <p:spPr bwMode="auto">
+          <a:xfrm>
+            <a:off x="432261" y="2286000"/>
+            <a:ext cx="15677803" cy="5212080"/>
+          </a:xfrm>
+          <a:prstGeom prst="rect">
+            <a:avLst/>
+          </a:prstGeom>
+          <a:noFill/>
+          <a:ln>
+            <a:noFill/>
+          </a:ln>
+          <a:extLst>
+            <a:ext uri="{909E8E84-426E-40DD-AFC4-6F175D3DCCD1}">
+              <a14:hiddenFill xmlns:a14="http://schemas.microsoft.com/office/drawing/2010/main">
+                <a:solidFill>
+                  <a:srgbClr val="FFFFFF"/>
+                </a:solidFill>
+              </a14:hiddenFill>
+            </a:ext>
+            <a:ext uri="{91240B29-F687-4F45-9708-019B960494DF}">
+              <a14:hiddenLine xmlns:a14="http://schemas.microsoft.com/office/drawing/2010/main" w="9525">
+                <a:solidFill>
+                  <a:srgbClr val="000000"/>
+                </a:solidFill>
+                <a:miter lim="800000"/>
+                <a:headEnd/>
+                <a:tailEnd/>
+              </a14:hiddenLine>
+            </a:ext>
+          </a:extLst>
+        </p:spPr>
+        <p:txBody>
+          <a:bodyPr wrap="square"/>
+          <a:lstStyle>
+            <a:lvl1pPr marL="342900" indent="-342900" eaLnBrk="0" hangingPunct="0">
+              <a:defRPr>
+                <a:solidFill>
+                  <a:schemeClr val="tx1"/>
+                </a:solidFill>
+                <a:latin typeface="Arial" panose="020B0604020202020204" pitchFamily="34" charset="0"/>
+                <a:cs typeface="Arial" panose="020B0604020202020204" pitchFamily="34" charset="0"/>
+              </a:defRPr>
+            </a:lvl1pPr>
+            <a:lvl2pPr marL="742950" indent="-285750" eaLnBrk="0" hangingPunct="0">
+              <a:defRPr>
+                <a:solidFill>
+                  <a:schemeClr val="tx1"/>
+                </a:solidFill>
+                <a:latin typeface="Arial" panose="020B0604020202020204" pitchFamily="34" charset="0"/>
+                <a:cs typeface="Arial" panose="020B0604020202020204" pitchFamily="34" charset="0"/>
+              </a:defRPr>
+            </a:lvl2pPr>
+            <a:lvl3pPr marL="1143000" indent="-228600" eaLnBrk="0" hangingPunct="0">
+              <a:defRPr>
+                <a:solidFill>
+                  <a:schemeClr val="tx1"/>
+                </a:solidFill>
+                <a:latin typeface="Arial" panose="020B0604020202020204" pitchFamily="34" charset="0"/>
+                <a:cs typeface="Arial" panose="020B0604020202020204" pitchFamily="34" charset="0"/>
+              </a:defRPr>
+            </a:lvl3pPr>
+            <a:lvl4pPr marL="1600200" indent="-228600" eaLnBrk="0" hangingPunct="0">
+              <a:defRPr>
+                <a:solidFill>
+                  <a:schemeClr val="tx1"/>
+                </a:solidFill>
+                <a:latin typeface="Arial" panose="020B0604020202020204" pitchFamily="34" charset="0"/>
+                <a:cs typeface="Arial" panose="020B0604020202020204" pitchFamily="34" charset="0"/>
+              </a:defRPr>
+            </a:lvl4pPr>
+            <a:lvl5pPr marL="2057400" indent="-228600" eaLnBrk="0" hangingPunct="0">
+              <a:defRPr>
+                <a:solidFill>
+                  <a:schemeClr val="tx1"/>
+                </a:solidFill>
+                <a:latin typeface="Arial" panose="020B0604020202020204" pitchFamily="34" charset="0"/>
+                <a:cs typeface="Arial" panose="020B0604020202020204" pitchFamily="34" charset="0"/>
+              </a:defRPr>
+            </a:lvl5pPr>
+            <a:lvl6pPr marL="2514600" indent="-228600" eaLnBrk="0" fontAlgn="base" hangingPunct="0">
+              <a:spcBef>
+                <a:spcPct val="0"/>
+              </a:spcBef>
+              <a:spcAft>
+                <a:spcPct val="0"/>
+              </a:spcAft>
+              <a:defRPr>
+                <a:solidFill>
+                  <a:schemeClr val="tx1"/>
+                </a:solidFill>
+                <a:latin typeface="Arial" panose="020B0604020202020204" pitchFamily="34" charset="0"/>
+                <a:cs typeface="Arial" panose="020B0604020202020204" pitchFamily="34" charset="0"/>
+              </a:defRPr>
+            </a:lvl6pPr>
+            <a:lvl7pPr marL="2971800" indent="-228600" eaLnBrk="0" fontAlgn="base" hangingPunct="0">
+              <a:spcBef>
+                <a:spcPct val="0"/>
+              </a:spcBef>
+              <a:spcAft>
+                <a:spcPct val="0"/>
+              </a:spcAft>
+              <a:defRPr>
+                <a:solidFill>
+                  <a:schemeClr val="tx1"/>
+                </a:solidFill>
+                <a:latin typeface="Arial" panose="020B0604020202020204" pitchFamily="34" charset="0"/>
+                <a:cs typeface="Arial" panose="020B0604020202020204" pitchFamily="34" charset="0"/>
+              </a:defRPr>
+            </a:lvl7pPr>
+            <a:lvl8pPr marL="3429000" indent="-228600" eaLnBrk="0" fontAlgn="base" hangingPunct="0">
+              <a:spcBef>
+                <a:spcPct val="0"/>
+              </a:spcBef>
+              <a:spcAft>
+                <a:spcPct val="0"/>
+              </a:spcAft>
+              <a:defRPr>
+                <a:solidFill>
+                  <a:schemeClr val="tx1"/>
+                </a:solidFill>
+                <a:latin typeface="Arial" panose="020B0604020202020204" pitchFamily="34" charset="0"/>
+                <a:cs typeface="Arial" panose="020B0604020202020204" pitchFamily="34" charset="0"/>
+              </a:defRPr>
+            </a:lvl8pPr>
+            <a:lvl9pPr marL="3886200" indent="-228600" eaLnBrk="0" fontAlgn="base" hangingPunct="0">
+              <a:spcBef>
+                <a:spcPct val="0"/>
+              </a:spcBef>
+              <a:spcAft>
+                <a:spcPct val="0"/>
+              </a:spcAft>
+              <a:defRPr>
+                <a:solidFill>
+                  <a:schemeClr val="tx1"/>
+                </a:solidFill>
+                <a:latin typeface="Arial" panose="020B0604020202020204" pitchFamily="34" charset="0"/>
+                <a:cs typeface="Arial" panose="020B0604020202020204" pitchFamily="34" charset="0"/>
+              </a:defRPr>
+            </a:lvl9pPr>
+          </a:lstStyle>
+          <a:p>
+            <a:pPr eaLnBrk="1" hangingPunct="1">
+              <a:lnSpc>
+                <a:spcPct val="80000"/>
+              </a:lnSpc>
+              <a:spcBef>
+                <a:spcPct val="20000"/>
+              </a:spcBef>
+              <a:buFontTx/>
+              <a:buChar char="•"/>
+            </a:pPr>
+            <a:r>
+              <a:rPr lang="en-US" altLang="en-US" sz="2000" b="1" dirty="0">
+                <a:latin typeface="Times New Roman" panose="02020603050405020304" pitchFamily="18" charset="0"/>
+                <a:cs typeface="Times New Roman" panose="02020603050405020304" pitchFamily="18" charset="0"/>
+              </a:rPr>
+              <a:t>Mist channels switch reliably through the opto-isolated driver after converting to active-low 5 V drive.</a:t>
+            </a:r>
+          </a:p>
+          <a:p>
+            <a:pPr eaLnBrk="1" hangingPunct="1">
+              <a:lnSpc>
+                <a:spcPct val="80000"/>
+              </a:lnSpc>
+              <a:spcBef>
+                <a:spcPct val="20000"/>
+              </a:spcBef>
+              <a:buFontTx/>
+              <a:buChar char="•"/>
+            </a:pPr>
+            <a:r>
+              <a:rPr lang="en-US" altLang="en-US" sz="2000" b="1" dirty="0">
+                <a:latin typeface="Times New Roman" panose="02020603050405020304" pitchFamily="18" charset="0"/>
+                <a:cs typeface="Times New Roman" panose="02020603050405020304" pitchFamily="18" charset="0"/>
+              </a:rPr>
+              <a:t>The watering burst / soak cycle and the daily cap were verified live from the dashboard; buzzer and leak alarm respond in the UI in real time.</a:t>
+            </a:r>
+          </a:p>
+          <a:p>
+            <a:pPr eaLnBrk="1" hangingPunct="1">
+              <a:lnSpc>
+                <a:spcPct val="80000"/>
+              </a:lnSpc>
+              <a:spcBef>
+                <a:spcPct val="20000"/>
+              </a:spcBef>
+              <a:buFontTx/>
+              <a:buChar char="•"/>
+            </a:pPr>
+            <a:r>
+              <a:rPr lang="en-US" altLang="en-US" sz="2000" b="1" dirty="0">
+                <a:latin typeface="Times New Roman" panose="02020603050405020304" pitchFamily="18" charset="0"/>
+                <a:cs typeface="Times New Roman" panose="02020603050405020304" pitchFamily="18" charset="0"/>
+              </a:rPr>
+              <a:t>Wi-Fi provisioning over USB verified end-to-end: credentials sent from the console, the board joined the target network (RSSI −53 dBm) and the dashboard was reachable immediately.</a:t>
+            </a:r>
+          </a:p>
+          <a:p>
+            <a:pPr eaLnBrk="1" hangingPunct="1">
+              <a:lnSpc>
+                <a:spcPct val="80000"/>
+              </a:lnSpc>
+              <a:spcBef>
+                <a:spcPct val="20000"/>
+              </a:spcBef>
+              <a:buFontTx/>
+              <a:buChar char="•"/>
+            </a:pPr>
+            <a:r>
+              <a:rPr lang="en-US" altLang="en-US" sz="2000" b="1" dirty="0">
+                <a:latin typeface="Times New Roman" panose="02020603050405020304" pitchFamily="18" charset="0"/>
+                <a:cs typeface="Times New Roman" panose="02020603050405020304" pitchFamily="18" charset="0"/>
+              </a:rPr>
+              <a:t>Hotspot fallback lets a phone connect with no router present; all settings survive power cycles (NVS flash).</a:t>
+            </a:r>
+          </a:p>
+          <a:p>
+            <a:pPr eaLnBrk="1" hangingPunct="1">
+              <a:lnSpc>
+                <a:spcPct val="80000"/>
+              </a:lnSpc>
+              <a:spcBef>
+                <a:spcPct val="20000"/>
+              </a:spcBef>
+              <a:buFontTx/>
+              <a:buChar char="•"/>
+            </a:pPr>
+            <a:r>
+              <a:rPr lang="en-US" altLang="en-US" sz="2000" b="1" dirty="0">
+                <a:latin typeface="Times New Roman" panose="02020603050405020304" pitchFamily="18" charset="0"/>
+                <a:cs typeface="Times New Roman" panose="02020603050405020304" pitchFamily="18" charset="0"/>
+              </a:rPr>
+              <a:t>48-hour soak-test data and the reference-hygrometer comparison will be appended before the final defence.</a:t>
+            </a:r>
+          </a:p>
+        </p:txBody>
+      </p:sp>
+      <p:sp>
+        <p:nvSpPr>
+          <p:cNvPr id="3" name="Slide Number Placeholder 2"/>
+          <p:cNvSpPr>
+            <a:spLocks noGrp="1"/>
+          </p:cNvSpPr>
+          <p:nvPr>
+            <p:ph type="sldNum" sz="quarter" idx="12"/>
+          </p:nvPr>
+        </p:nvSpPr>
+        <p:spPr/>
+        <p:txBody>
+          <a:bodyPr/>
+          <a:lstStyle/>
+          <a:p>
+            <a:fld id="{48F63A3B-78C7-47BE-AE5E-E10140E04643}" type="slidenum">
+              <a:rPr lang="en-US" smtClean="0"/>
+              <a:pPr/>
+              <a:t>7</a:t>
+            </a:fld>
+            <a:endParaRPr lang="en-US" dirty="0"/>
+          </a:p>
+        </p:txBody>
+      </p:sp>
+    </p:spTree>
+  </p:cSld>
+  <p:clrMapOvr>
+    <a:masterClrMapping/>
+  </p:clrMapOvr>
+</p:sld>
+</file>
+
+<file path=ppt/slides/slide19.xml><?xml version="1.0" encoding="utf-8"?>
 <p:sld xmlns:a="http://schemas.openxmlformats.org/drawingml/2006/main" xmlns:r="http://schemas.openxmlformats.org/officeDocument/2006/relationships" xmlns:p="http://schemas.openxmlformats.org/presentationml/2006/main">
   <p:cSld>
     <p:spTree>
@@ -9179,1317 +10738,6 @@
         <p14:creationId xmlns:p14="http://schemas.microsoft.com/office/powerpoint/2010/main" val="507593424"/>
       </p:ext>
     </p:extLst>
-  </p:cSld>
-  <p:clrMapOvr>
-    <a:masterClrMapping/>
-  </p:clrMapOvr>
-</p:sld>
-</file>
-
-<file path=ppt/slides/slide17.xml><?xml version="1.0" encoding="utf-8"?>
-<p:sld xmlns:a="http://schemas.openxmlformats.org/drawingml/2006/main" xmlns:r="http://schemas.openxmlformats.org/officeDocument/2006/relationships" xmlns:p="http://schemas.openxmlformats.org/presentationml/2006/main">
-  <p:cSld>
-    <p:spTree>
-      <p:nvGrpSpPr>
-        <p:cNvPr id="1" name=""/>
-        <p:cNvGrpSpPr/>
-        <p:nvPr/>
-      </p:nvGrpSpPr>
-      <p:grpSpPr>
-        <a:xfrm>
-          <a:off x="0" y="0"/>
-          <a:ext cx="0" cy="0"/>
-          <a:chOff x="0" y="0"/>
-          <a:chExt cx="0" cy="0"/>
-        </a:xfrm>
-      </p:grpSpPr>
-      <p:sp>
-        <p:nvSpPr>
-          <p:cNvPr id="25602" name="Rectangle 2"/>
-          <p:cNvSpPr>
-            <a:spLocks noChangeArrowheads="1"/>
-          </p:cNvSpPr>
-          <p:nvPr/>
-        </p:nvSpPr>
-        <p:spPr bwMode="auto">
-          <a:xfrm>
-            <a:off x="232755" y="1961803"/>
-            <a:ext cx="15943811" cy="4937760"/>
-          </a:xfrm>
-          <a:prstGeom prst="rect">
-            <a:avLst/>
-          </a:prstGeom>
-          <a:noFill/>
-          <a:ln>
-            <a:noFill/>
-          </a:ln>
-          <a:extLst>
-            <a:ext uri="{909E8E84-426E-40DD-AFC4-6F175D3DCCD1}">
-              <a14:hiddenFill xmlns:a14="http://schemas.microsoft.com/office/drawing/2010/main">
-                <a:solidFill>
-                  <a:srgbClr val="FFFFFF"/>
-                </a:solidFill>
-              </a14:hiddenFill>
-            </a:ext>
-            <a:ext uri="{91240B29-F687-4F45-9708-019B960494DF}">
-              <a14:hiddenLine xmlns:a14="http://schemas.microsoft.com/office/drawing/2010/main" w="9525">
-                <a:solidFill>
-                  <a:srgbClr val="000000"/>
-                </a:solidFill>
-                <a:miter lim="800000"/>
-                <a:headEnd/>
-                <a:tailEnd/>
-              </a14:hiddenLine>
-            </a:ext>
-          </a:extLst>
-        </p:spPr>
-        <p:txBody>
-          <a:bodyPr wrap="square"/>
-          <a:lstStyle>
-            <a:lvl1pPr marL="342900" indent="-342900" eaLnBrk="0" hangingPunct="0">
-              <a:defRPr>
-                <a:solidFill>
-                  <a:schemeClr val="tx1"/>
-                </a:solidFill>
-                <a:latin typeface="Arial" panose="020B0604020202020204" pitchFamily="34" charset="0"/>
-                <a:cs typeface="Arial" panose="020B0604020202020204" pitchFamily="34" charset="0"/>
-              </a:defRPr>
-            </a:lvl1pPr>
-            <a:lvl2pPr marL="742950" indent="-285750" eaLnBrk="0" hangingPunct="0">
-              <a:defRPr>
-                <a:solidFill>
-                  <a:schemeClr val="tx1"/>
-                </a:solidFill>
-                <a:latin typeface="Arial" panose="020B0604020202020204" pitchFamily="34" charset="0"/>
-                <a:cs typeface="Arial" panose="020B0604020202020204" pitchFamily="34" charset="0"/>
-              </a:defRPr>
-            </a:lvl2pPr>
-            <a:lvl3pPr marL="1143000" indent="-228600" eaLnBrk="0" hangingPunct="0">
-              <a:defRPr>
-                <a:solidFill>
-                  <a:schemeClr val="tx1"/>
-                </a:solidFill>
-                <a:latin typeface="Arial" panose="020B0604020202020204" pitchFamily="34" charset="0"/>
-                <a:cs typeface="Arial" panose="020B0604020202020204" pitchFamily="34" charset="0"/>
-              </a:defRPr>
-            </a:lvl3pPr>
-            <a:lvl4pPr marL="1600200" indent="-228600" eaLnBrk="0" hangingPunct="0">
-              <a:defRPr>
-                <a:solidFill>
-                  <a:schemeClr val="tx1"/>
-                </a:solidFill>
-                <a:latin typeface="Arial" panose="020B0604020202020204" pitchFamily="34" charset="0"/>
-                <a:cs typeface="Arial" panose="020B0604020202020204" pitchFamily="34" charset="0"/>
-              </a:defRPr>
-            </a:lvl4pPr>
-            <a:lvl5pPr marL="2057400" indent="-228600" eaLnBrk="0" hangingPunct="0">
-              <a:defRPr>
-                <a:solidFill>
-                  <a:schemeClr val="tx1"/>
-                </a:solidFill>
-                <a:latin typeface="Arial" panose="020B0604020202020204" pitchFamily="34" charset="0"/>
-                <a:cs typeface="Arial" panose="020B0604020202020204" pitchFamily="34" charset="0"/>
-              </a:defRPr>
-            </a:lvl5pPr>
-            <a:lvl6pPr marL="2514600" indent="-228600" eaLnBrk="0" fontAlgn="base" hangingPunct="0">
-              <a:spcBef>
-                <a:spcPct val="0"/>
-              </a:spcBef>
-              <a:spcAft>
-                <a:spcPct val="0"/>
-              </a:spcAft>
-              <a:defRPr>
-                <a:solidFill>
-                  <a:schemeClr val="tx1"/>
-                </a:solidFill>
-                <a:latin typeface="Arial" panose="020B0604020202020204" pitchFamily="34" charset="0"/>
-                <a:cs typeface="Arial" panose="020B0604020202020204" pitchFamily="34" charset="0"/>
-              </a:defRPr>
-            </a:lvl6pPr>
-            <a:lvl7pPr marL="2971800" indent="-228600" eaLnBrk="0" fontAlgn="base" hangingPunct="0">
-              <a:spcBef>
-                <a:spcPct val="0"/>
-              </a:spcBef>
-              <a:spcAft>
-                <a:spcPct val="0"/>
-              </a:spcAft>
-              <a:defRPr>
-                <a:solidFill>
-                  <a:schemeClr val="tx1"/>
-                </a:solidFill>
-                <a:latin typeface="Arial" panose="020B0604020202020204" pitchFamily="34" charset="0"/>
-                <a:cs typeface="Arial" panose="020B0604020202020204" pitchFamily="34" charset="0"/>
-              </a:defRPr>
-            </a:lvl7pPr>
-            <a:lvl8pPr marL="3429000" indent="-228600" eaLnBrk="0" fontAlgn="base" hangingPunct="0">
-              <a:spcBef>
-                <a:spcPct val="0"/>
-              </a:spcBef>
-              <a:spcAft>
-                <a:spcPct val="0"/>
-              </a:spcAft>
-              <a:defRPr>
-                <a:solidFill>
-                  <a:schemeClr val="tx1"/>
-                </a:solidFill>
-                <a:latin typeface="Arial" panose="020B0604020202020204" pitchFamily="34" charset="0"/>
-                <a:cs typeface="Arial" panose="020B0604020202020204" pitchFamily="34" charset="0"/>
-              </a:defRPr>
-            </a:lvl8pPr>
-            <a:lvl9pPr marL="3886200" indent="-228600" eaLnBrk="0" fontAlgn="base" hangingPunct="0">
-              <a:spcBef>
-                <a:spcPct val="0"/>
-              </a:spcBef>
-              <a:spcAft>
-                <a:spcPct val="0"/>
-              </a:spcAft>
-              <a:defRPr>
-                <a:solidFill>
-                  <a:schemeClr val="tx1"/>
-                </a:solidFill>
-                <a:latin typeface="Arial" panose="020B0604020202020204" pitchFamily="34" charset="0"/>
-                <a:cs typeface="Arial" panose="020B0604020202020204" pitchFamily="34" charset="0"/>
-              </a:defRPr>
-            </a:lvl9pPr>
-          </a:lstStyle>
-          <a:p>
-            <a:pPr eaLnBrk="1" hangingPunct="1">
-              <a:lnSpc>
-                <a:spcPct val="90000"/>
-              </a:lnSpc>
-              <a:spcBef>
-                <a:spcPct val="20000"/>
-              </a:spcBef>
-              <a:buFontTx/>
-              <a:buChar char="•"/>
-            </a:pPr>
-            <a:r>
-              <a:rPr lang="en-US" altLang="en-US" sz="2100" dirty="0">
-                <a:solidFill>
-                  <a:srgbClr val="00B050"/>
-                </a:solidFill>
-                <a:latin typeface="Times New Roman" panose="02020603050405020304" pitchFamily="18" charset="0"/>
-                <a:cs typeface="Times New Roman" panose="02020603050405020304" pitchFamily="18" charset="0"/>
-              </a:rPr>
-              <a:t>Integrate the 3D-printed PETG enclosure and the 12 V lighting / airflow stage.</a:t>
-            </a:r>
-            <a:endParaRPr lang="en-US" altLang="en-US" sz="3200" dirty="0">
-              <a:solidFill>
-                <a:srgbClr val="0000D6"/>
-              </a:solidFill>
-              <a:latin typeface="Times New Roman" panose="02020603050405020304" pitchFamily="18" charset="0"/>
-              <a:cs typeface="Times New Roman" panose="02020603050405020304" pitchFamily="18" charset="0"/>
-            </a:endParaRPr>
-          </a:p>
-          <a:p>
-            <a:pPr eaLnBrk="1" hangingPunct="1">
-              <a:lnSpc>
-                <a:spcPct val="90000"/>
-              </a:lnSpc>
-              <a:spcBef>
-                <a:spcPct val="20000"/>
-              </a:spcBef>
-              <a:buFontTx/>
-              <a:buChar char="•"/>
-            </a:pPr>
-            <a:r>
-              <a:rPr lang="en-US" altLang="en-US" sz="2100" dirty="0">
-                <a:solidFill>
-                  <a:srgbClr val="00B050"/>
-                </a:solidFill>
-                <a:latin typeface="Times New Roman" panose="02020603050405020304" pitchFamily="18" charset="0"/>
-                <a:cs typeface="Times New Roman" panose="02020603050405020304" pitchFamily="18" charset="0"/>
-              </a:rPr>
-              <a:t>Long-term data logging with charts, trends and mobile push alerts.</a:t>
-            </a:r>
-            <a:endParaRPr lang="en-US" altLang="en-US" sz="3200" dirty="0">
-              <a:solidFill>
-                <a:srgbClr val="0000D6"/>
-              </a:solidFill>
-              <a:latin typeface="Times New Roman" panose="02020603050405020304" pitchFamily="18" charset="0"/>
-              <a:cs typeface="Times New Roman" panose="02020603050405020304" pitchFamily="18" charset="0"/>
-            </a:endParaRPr>
-          </a:p>
-          <a:p>
-            <a:pPr eaLnBrk="1" hangingPunct="1">
-              <a:lnSpc>
-                <a:spcPct val="90000"/>
-              </a:lnSpc>
-              <a:spcBef>
-                <a:spcPct val="20000"/>
-              </a:spcBef>
-              <a:buFontTx/>
-              <a:buChar char="•"/>
-            </a:pPr>
-            <a:r>
-              <a:rPr lang="en-US" altLang="en-US" sz="2100" dirty="0">
-                <a:solidFill>
-                  <a:srgbClr val="00B050"/>
-                </a:solidFill>
-                <a:latin typeface="Times New Roman" panose="02020603050405020304" pitchFamily="18" charset="0"/>
-                <a:cs typeface="Times New Roman" panose="02020603050405020304" pitchFamily="18" charset="0"/>
-              </a:rPr>
-              <a:t>Camera-based plant-health monitoring (leaf-colour analysis).</a:t>
-            </a:r>
-            <a:endParaRPr lang="en-US" altLang="en-US" sz="3200" dirty="0">
-              <a:solidFill>
-                <a:srgbClr val="0000D6"/>
-              </a:solidFill>
-              <a:latin typeface="Times New Roman" panose="02020603050405020304" pitchFamily="18" charset="0"/>
-              <a:cs typeface="Times New Roman" panose="02020603050405020304" pitchFamily="18" charset="0"/>
-            </a:endParaRPr>
-          </a:p>
-          <a:p>
-            <a:pPr eaLnBrk="1" hangingPunct="1">
-              <a:lnSpc>
-                <a:spcPct val="90000"/>
-              </a:lnSpc>
-              <a:spcBef>
-                <a:spcPct val="20000"/>
-              </a:spcBef>
-              <a:buFontTx/>
-              <a:buChar char="•"/>
-            </a:pPr>
-            <a:r>
-              <a:rPr lang="en-US" altLang="en-US" sz="2100" dirty="0">
-                <a:solidFill>
-                  <a:srgbClr val="00B050"/>
-                </a:solidFill>
-                <a:latin typeface="Times New Roman" panose="02020603050405020304" pitchFamily="18" charset="0"/>
-                <a:cs typeface="Times New Roman" panose="02020603050405020304" pitchFamily="18" charset="0"/>
-              </a:rPr>
-              <a:t>Battery / UPS backup and multi-terrarium networking from one console.</a:t>
-            </a:r>
-            <a:endParaRPr lang="en-US" altLang="en-US" sz="3200" dirty="0">
-              <a:solidFill>
-                <a:srgbClr val="0000D6"/>
-              </a:solidFill>
-              <a:latin typeface="Times New Roman" panose="02020603050405020304" pitchFamily="18" charset="0"/>
-              <a:cs typeface="Times New Roman" panose="02020603050405020304" pitchFamily="18" charset="0"/>
-            </a:endParaRPr>
-          </a:p>
-        </p:txBody>
-      </p:sp>
-      <p:sp>
-        <p:nvSpPr>
-          <p:cNvPr id="25603" name="Oval 3" descr="Parchment"/>
-          <p:cNvSpPr>
-            <a:spLocks noChangeArrowheads="1"/>
-          </p:cNvSpPr>
-          <p:nvPr/>
-        </p:nvSpPr>
-        <p:spPr bwMode="auto">
-          <a:xfrm>
-            <a:off x="1363286" y="457200"/>
-            <a:ext cx="13948757" cy="1188720"/>
-          </a:xfrm>
-          <a:prstGeom prst="ellipse">
-            <a:avLst/>
-          </a:prstGeom>
-          <a:blipFill dpi="0" rotWithShape="1">
-            <a:blip r:embed="rId2"/>
-            <a:srcRect/>
-            <a:tile tx="0" ty="0" sx="100000" sy="100000" flip="none" algn="tl"/>
-          </a:blipFill>
-          <a:ln w="9525">
-            <a:solidFill>
-              <a:schemeClr val="tx1"/>
-            </a:solidFill>
-            <a:round/>
-            <a:headEnd/>
-            <a:tailEnd/>
-          </a:ln>
-        </p:spPr>
-        <p:txBody>
-          <a:bodyPr wrap="none" anchor="ctr"/>
-          <a:lstStyle>
-            <a:lvl1pPr eaLnBrk="0" hangingPunct="0">
-              <a:defRPr>
-                <a:solidFill>
-                  <a:schemeClr val="tx1"/>
-                </a:solidFill>
-                <a:latin typeface="Arial" panose="020B0604020202020204" pitchFamily="34" charset="0"/>
-                <a:cs typeface="Arial" panose="020B0604020202020204" pitchFamily="34" charset="0"/>
-              </a:defRPr>
-            </a:lvl1pPr>
-            <a:lvl2pPr marL="742950" indent="-285750" eaLnBrk="0" hangingPunct="0">
-              <a:defRPr>
-                <a:solidFill>
-                  <a:schemeClr val="tx1"/>
-                </a:solidFill>
-                <a:latin typeface="Arial" panose="020B0604020202020204" pitchFamily="34" charset="0"/>
-                <a:cs typeface="Arial" panose="020B0604020202020204" pitchFamily="34" charset="0"/>
-              </a:defRPr>
-            </a:lvl2pPr>
-            <a:lvl3pPr marL="1143000" indent="-228600" eaLnBrk="0" hangingPunct="0">
-              <a:defRPr>
-                <a:solidFill>
-                  <a:schemeClr val="tx1"/>
-                </a:solidFill>
-                <a:latin typeface="Arial" panose="020B0604020202020204" pitchFamily="34" charset="0"/>
-                <a:cs typeface="Arial" panose="020B0604020202020204" pitchFamily="34" charset="0"/>
-              </a:defRPr>
-            </a:lvl3pPr>
-            <a:lvl4pPr marL="1600200" indent="-228600" eaLnBrk="0" hangingPunct="0">
-              <a:defRPr>
-                <a:solidFill>
-                  <a:schemeClr val="tx1"/>
-                </a:solidFill>
-                <a:latin typeface="Arial" panose="020B0604020202020204" pitchFamily="34" charset="0"/>
-                <a:cs typeface="Arial" panose="020B0604020202020204" pitchFamily="34" charset="0"/>
-              </a:defRPr>
-            </a:lvl4pPr>
-            <a:lvl5pPr marL="2057400" indent="-228600" eaLnBrk="0" hangingPunct="0">
-              <a:defRPr>
-                <a:solidFill>
-                  <a:schemeClr val="tx1"/>
-                </a:solidFill>
-                <a:latin typeface="Arial" panose="020B0604020202020204" pitchFamily="34" charset="0"/>
-                <a:cs typeface="Arial" panose="020B0604020202020204" pitchFamily="34" charset="0"/>
-              </a:defRPr>
-            </a:lvl5pPr>
-            <a:lvl6pPr marL="2514600" indent="-228600" eaLnBrk="0" fontAlgn="base" hangingPunct="0">
-              <a:spcBef>
-                <a:spcPct val="0"/>
-              </a:spcBef>
-              <a:spcAft>
-                <a:spcPct val="0"/>
-              </a:spcAft>
-              <a:defRPr>
-                <a:solidFill>
-                  <a:schemeClr val="tx1"/>
-                </a:solidFill>
-                <a:latin typeface="Arial" panose="020B0604020202020204" pitchFamily="34" charset="0"/>
-                <a:cs typeface="Arial" panose="020B0604020202020204" pitchFamily="34" charset="0"/>
-              </a:defRPr>
-            </a:lvl6pPr>
-            <a:lvl7pPr marL="2971800" indent="-228600" eaLnBrk="0" fontAlgn="base" hangingPunct="0">
-              <a:spcBef>
-                <a:spcPct val="0"/>
-              </a:spcBef>
-              <a:spcAft>
-                <a:spcPct val="0"/>
-              </a:spcAft>
-              <a:defRPr>
-                <a:solidFill>
-                  <a:schemeClr val="tx1"/>
-                </a:solidFill>
-                <a:latin typeface="Arial" panose="020B0604020202020204" pitchFamily="34" charset="0"/>
-                <a:cs typeface="Arial" panose="020B0604020202020204" pitchFamily="34" charset="0"/>
-              </a:defRPr>
-            </a:lvl7pPr>
-            <a:lvl8pPr marL="3429000" indent="-228600" eaLnBrk="0" fontAlgn="base" hangingPunct="0">
-              <a:spcBef>
-                <a:spcPct val="0"/>
-              </a:spcBef>
-              <a:spcAft>
-                <a:spcPct val="0"/>
-              </a:spcAft>
-              <a:defRPr>
-                <a:solidFill>
-                  <a:schemeClr val="tx1"/>
-                </a:solidFill>
-                <a:latin typeface="Arial" panose="020B0604020202020204" pitchFamily="34" charset="0"/>
-                <a:cs typeface="Arial" panose="020B0604020202020204" pitchFamily="34" charset="0"/>
-              </a:defRPr>
-            </a:lvl8pPr>
-            <a:lvl9pPr marL="3886200" indent="-228600" eaLnBrk="0" fontAlgn="base" hangingPunct="0">
-              <a:spcBef>
-                <a:spcPct val="0"/>
-              </a:spcBef>
-              <a:spcAft>
-                <a:spcPct val="0"/>
-              </a:spcAft>
-              <a:defRPr>
-                <a:solidFill>
-                  <a:schemeClr val="tx1"/>
-                </a:solidFill>
-                <a:latin typeface="Arial" panose="020B0604020202020204" pitchFamily="34" charset="0"/>
-                <a:cs typeface="Arial" panose="020B0604020202020204" pitchFamily="34" charset="0"/>
-              </a:defRPr>
-            </a:lvl9pPr>
-          </a:lstStyle>
-          <a:p>
-            <a:pPr algn="ctr"/>
-            <a:r>
-              <a:rPr lang="en-US" altLang="en-US" sz="4000" b="1">
-                <a:solidFill>
-                  <a:srgbClr val="0070C0"/>
-                </a:solidFill>
-                <a:latin typeface="Comic Sans MS" panose="030F0702030302020204" pitchFamily="66" charset="0"/>
-              </a:rPr>
-              <a:t>Future Scopes</a:t>
-            </a:r>
-          </a:p>
-        </p:txBody>
-      </p:sp>
-      <p:sp>
-        <p:nvSpPr>
-          <p:cNvPr id="3" name="Slide Number Placeholder 2"/>
-          <p:cNvSpPr>
-            <a:spLocks noGrp="1"/>
-          </p:cNvSpPr>
-          <p:nvPr>
-            <p:ph type="sldNum" sz="quarter" idx="12"/>
-          </p:nvPr>
-        </p:nvSpPr>
-        <p:spPr/>
-        <p:txBody>
-          <a:bodyPr/>
-          <a:lstStyle/>
-          <a:p>
-            <a:fld id="{48F63A3B-78C7-47BE-AE5E-E10140E04643}" type="slidenum">
-              <a:rPr lang="en-US" smtClean="0"/>
-              <a:pPr/>
-              <a:t>17</a:t>
-            </a:fld>
-            <a:endParaRPr lang="en-US" dirty="0"/>
-          </a:p>
-        </p:txBody>
-      </p:sp>
-    </p:spTree>
-    <p:extLst>
-      <p:ext uri="{BB962C8B-B14F-4D97-AF65-F5344CB8AC3E}">
-        <p14:creationId xmlns:p14="http://schemas.microsoft.com/office/powerpoint/2010/main" val="173450297"/>
-      </p:ext>
-    </p:extLst>
-  </p:cSld>
-  <p:clrMapOvr>
-    <a:masterClrMapping/>
-  </p:clrMapOvr>
-</p:sld>
-</file>
-
-<file path=ppt/slides/slide18.xml><?xml version="1.0" encoding="utf-8"?>
-<p:sld xmlns:a="http://schemas.openxmlformats.org/drawingml/2006/main" xmlns:r="http://schemas.openxmlformats.org/officeDocument/2006/relationships" xmlns:p="http://schemas.openxmlformats.org/presentationml/2006/main">
-  <p:cSld>
-    <p:spTree>
-      <p:nvGrpSpPr>
-        <p:cNvPr id="1" name=""/>
-        <p:cNvGrpSpPr/>
-        <p:nvPr/>
-      </p:nvGrpSpPr>
-      <p:grpSpPr>
-        <a:xfrm>
-          <a:off x="0" y="0"/>
-          <a:ext cx="0" cy="0"/>
-          <a:chOff x="0" y="0"/>
-          <a:chExt cx="0" cy="0"/>
-        </a:xfrm>
-      </p:grpSpPr>
-      <p:sp>
-        <p:nvSpPr>
-          <p:cNvPr id="2" name="Title 1">
-            <a:extLst>
-              <a:ext uri="{FF2B5EF4-FFF2-40B4-BE49-F238E27FC236}">
-                <a16:creationId xmlns:a16="http://schemas.microsoft.com/office/drawing/2014/main" id="{D1699652-6805-4BCB-82F2-65ABD02EC79B}"/>
-              </a:ext>
-            </a:extLst>
-          </p:cNvPr>
-          <p:cNvSpPr>
-            <a:spLocks noGrp="1"/>
-          </p:cNvSpPr>
-          <p:nvPr>
-            <p:ph type="title"/>
-          </p:nvPr>
-        </p:nvSpPr>
-        <p:spPr>
-          <a:xfrm>
-            <a:off x="762001" y="600493"/>
-            <a:ext cx="15122768" cy="1191665"/>
-          </a:xfrm>
-        </p:spPr>
-        <p:txBody>
-          <a:bodyPr>
-            <a:normAutofit/>
-          </a:bodyPr>
-          <a:lstStyle/>
-          <a:p>
-            <a:r>
-              <a:rPr lang="en-US" sz="6000" b="1" dirty="0">
-                <a:solidFill>
-                  <a:srgbClr val="0070C0"/>
-                </a:solidFill>
-                <a:latin typeface="Times New Roman" panose="02020603050405020304" pitchFamily="18" charset="0"/>
-                <a:cs typeface="Times New Roman" panose="02020603050405020304" pitchFamily="18" charset="0"/>
-              </a:rPr>
-              <a:t>Thanks for Listening our Presentation….</a:t>
-            </a:r>
-          </a:p>
-        </p:txBody>
-      </p:sp>
-      <p:grpSp>
-        <p:nvGrpSpPr>
-          <p:cNvPr id="5" name="Group 6"/>
-          <p:cNvGrpSpPr>
-            <a:grpSpLocks/>
-          </p:cNvGrpSpPr>
-          <p:nvPr/>
-        </p:nvGrpSpPr>
-        <p:grpSpPr bwMode="auto">
-          <a:xfrm>
-            <a:off x="7398325" y="2015067"/>
-            <a:ext cx="6724076" cy="5532886"/>
-            <a:chOff x="432" y="1584"/>
-            <a:chExt cx="3072" cy="2426"/>
-          </a:xfrm>
-        </p:grpSpPr>
-        <p:sp>
-          <p:nvSpPr>
-            <p:cNvPr id="6" name="AutoShape 3"/>
-            <p:cNvSpPr>
-              <a:spLocks noChangeArrowheads="1"/>
-            </p:cNvSpPr>
-            <p:nvPr/>
-          </p:nvSpPr>
-          <p:spPr bwMode="auto">
-            <a:xfrm>
-              <a:off x="1296" y="1584"/>
-              <a:ext cx="2208" cy="816"/>
-            </a:xfrm>
-            <a:prstGeom prst="cloudCallout">
-              <a:avLst>
-                <a:gd name="adj1" fmla="val -41574"/>
-                <a:gd name="adj2" fmla="val 140565"/>
-              </a:avLst>
-            </a:prstGeom>
-            <a:solidFill>
-              <a:schemeClr val="accent3"/>
-            </a:solidFill>
-            <a:ln w="9525">
-              <a:solidFill>
-                <a:schemeClr val="accent3"/>
-              </a:solidFill>
-              <a:round/>
-              <a:headEnd/>
-              <a:tailEnd/>
-            </a:ln>
-            <a:effectLst/>
-            <a:extLst>
-              <a:ext uri="{AF507438-7753-43E0-B8FC-AC1667EBCBE1}">
-                <a14:hiddenEffects xmlns:a14="http://schemas.microsoft.com/office/drawing/2010/main">
-                  <a:effectLst>
-                    <a:outerShdw dist="35921" dir="2700000" algn="ctr" rotWithShape="0">
-                      <a:schemeClr val="bg2"/>
-                    </a:outerShdw>
-                  </a:effectLst>
-                </a14:hiddenEffects>
-              </a:ext>
-            </a:extLst>
-          </p:spPr>
-          <p:txBody>
-            <a:bodyPr/>
-            <a:lstStyle>
-              <a:lvl1pPr>
-                <a:defRPr>
-                  <a:solidFill>
-                    <a:schemeClr val="tx1"/>
-                  </a:solidFill>
-                  <a:latin typeface="Arial" pitchFamily="34" charset="0"/>
-                  <a:cs typeface="Arial" pitchFamily="34" charset="0"/>
-                </a:defRPr>
-              </a:lvl1pPr>
-              <a:lvl2pPr marL="742950" indent="-285750">
-                <a:defRPr>
-                  <a:solidFill>
-                    <a:schemeClr val="tx1"/>
-                  </a:solidFill>
-                  <a:latin typeface="Arial" pitchFamily="34" charset="0"/>
-                  <a:cs typeface="Arial" pitchFamily="34" charset="0"/>
-                </a:defRPr>
-              </a:lvl2pPr>
-              <a:lvl3pPr marL="1143000" indent="-228600">
-                <a:defRPr>
-                  <a:solidFill>
-                    <a:schemeClr val="tx1"/>
-                  </a:solidFill>
-                  <a:latin typeface="Arial" pitchFamily="34" charset="0"/>
-                  <a:cs typeface="Arial" pitchFamily="34" charset="0"/>
-                </a:defRPr>
-              </a:lvl3pPr>
-              <a:lvl4pPr marL="1600200" indent="-228600">
-                <a:defRPr>
-                  <a:solidFill>
-                    <a:schemeClr val="tx1"/>
-                  </a:solidFill>
-                  <a:latin typeface="Arial" pitchFamily="34" charset="0"/>
-                  <a:cs typeface="Arial" pitchFamily="34" charset="0"/>
-                </a:defRPr>
-              </a:lvl4pPr>
-              <a:lvl5pPr marL="2057400" indent="-228600">
-                <a:defRPr>
-                  <a:solidFill>
-                    <a:schemeClr val="tx1"/>
-                  </a:solidFill>
-                  <a:latin typeface="Arial" pitchFamily="34" charset="0"/>
-                  <a:cs typeface="Arial" pitchFamily="34" charset="0"/>
-                </a:defRPr>
-              </a:lvl5pPr>
-              <a:lvl6pPr marL="2514600" indent="-228600" eaLnBrk="0" fontAlgn="base" hangingPunct="0">
-                <a:spcBef>
-                  <a:spcPct val="0"/>
-                </a:spcBef>
-                <a:spcAft>
-                  <a:spcPct val="0"/>
-                </a:spcAft>
-                <a:defRPr>
-                  <a:solidFill>
-                    <a:schemeClr val="tx1"/>
-                  </a:solidFill>
-                  <a:latin typeface="Arial" pitchFamily="34" charset="0"/>
-                  <a:cs typeface="Arial" pitchFamily="34" charset="0"/>
-                </a:defRPr>
-              </a:lvl6pPr>
-              <a:lvl7pPr marL="2971800" indent="-228600" eaLnBrk="0" fontAlgn="base" hangingPunct="0">
-                <a:spcBef>
-                  <a:spcPct val="0"/>
-                </a:spcBef>
-                <a:spcAft>
-                  <a:spcPct val="0"/>
-                </a:spcAft>
-                <a:defRPr>
-                  <a:solidFill>
-                    <a:schemeClr val="tx1"/>
-                  </a:solidFill>
-                  <a:latin typeface="Arial" pitchFamily="34" charset="0"/>
-                  <a:cs typeface="Arial" pitchFamily="34" charset="0"/>
-                </a:defRPr>
-              </a:lvl7pPr>
-              <a:lvl8pPr marL="3429000" indent="-228600" eaLnBrk="0" fontAlgn="base" hangingPunct="0">
-                <a:spcBef>
-                  <a:spcPct val="0"/>
-                </a:spcBef>
-                <a:spcAft>
-                  <a:spcPct val="0"/>
-                </a:spcAft>
-                <a:defRPr>
-                  <a:solidFill>
-                    <a:schemeClr val="tx1"/>
-                  </a:solidFill>
-                  <a:latin typeface="Arial" pitchFamily="34" charset="0"/>
-                  <a:cs typeface="Arial" pitchFamily="34" charset="0"/>
-                </a:defRPr>
-              </a:lvl8pPr>
-              <a:lvl9pPr marL="3886200" indent="-228600" eaLnBrk="0" fontAlgn="base" hangingPunct="0">
-                <a:spcBef>
-                  <a:spcPct val="0"/>
-                </a:spcBef>
-                <a:spcAft>
-                  <a:spcPct val="0"/>
-                </a:spcAft>
-                <a:defRPr>
-                  <a:solidFill>
-                    <a:schemeClr val="tx1"/>
-                  </a:solidFill>
-                  <a:latin typeface="Arial" pitchFamily="34" charset="0"/>
-                  <a:cs typeface="Arial" pitchFamily="34" charset="0"/>
-                </a:defRPr>
-              </a:lvl9pPr>
-            </a:lstStyle>
-            <a:p>
-              <a:pPr algn="ctr" eaLnBrk="1" hangingPunct="1"/>
-              <a:endParaRPr lang="en-US" altLang="en-US" sz="2800"/>
-            </a:p>
-          </p:txBody>
-        </p:sp>
-        <p:pic>
-          <p:nvPicPr>
-            <p:cNvPr id="7" name="Picture 4" descr="j0301252"/>
-            <p:cNvPicPr>
-              <a:picLocks noChangeAspect="1" noChangeArrowheads="1"/>
-            </p:cNvPicPr>
-            <p:nvPr/>
-          </p:nvPicPr>
-          <p:blipFill>
-            <a:blip r:embed="rId2" cstate="print">
-              <a:extLst>
-                <a:ext uri="{28A0092B-C50C-407E-A947-70E740481C1C}">
-                  <a14:useLocalDpi xmlns:a14="http://schemas.microsoft.com/office/drawing/2010/main" val="0"/>
-                </a:ext>
-              </a:extLst>
-            </a:blip>
-            <a:srcRect/>
-            <a:stretch>
-              <a:fillRect/>
-            </a:stretch>
-          </p:blipFill>
-          <p:spPr bwMode="auto">
-            <a:xfrm>
-              <a:off x="432" y="3024"/>
-              <a:ext cx="1153" cy="986"/>
-            </a:xfrm>
-            <a:prstGeom prst="rect">
-              <a:avLst/>
-            </a:prstGeom>
-            <a:noFill/>
-            <a:ln>
-              <a:noFill/>
-            </a:ln>
-            <a:extLst>
-              <a:ext uri="{909E8E84-426E-40DD-AFC4-6F175D3DCCD1}">
-                <a14:hiddenFill xmlns:a14="http://schemas.microsoft.com/office/drawing/2010/main">
-                  <a:solidFill>
-                    <a:srgbClr val="FFFFFF"/>
-                  </a:solidFill>
-                </a14:hiddenFill>
-              </a:ext>
-              <a:ext uri="{91240B29-F687-4F45-9708-019B960494DF}">
-                <a14:hiddenLine xmlns:a14="http://schemas.microsoft.com/office/drawing/2010/main" w="9525">
-                  <a:solidFill>
-                    <a:srgbClr val="000000"/>
-                  </a:solidFill>
-                  <a:miter lim="800000"/>
-                  <a:headEnd/>
-                  <a:tailEnd/>
-                </a14:hiddenLine>
-              </a:ext>
-            </a:extLst>
-          </p:spPr>
-        </p:pic>
-        <p:sp>
-          <p:nvSpPr>
-            <p:cNvPr id="8" name="WordArt 5"/>
-            <p:cNvSpPr>
-              <a:spLocks noChangeArrowheads="1" noChangeShapeType="1" noTextEdit="1"/>
-            </p:cNvSpPr>
-            <p:nvPr/>
-          </p:nvSpPr>
-          <p:spPr bwMode="auto">
-            <a:xfrm>
-              <a:off x="2208" y="1728"/>
-              <a:ext cx="421" cy="612"/>
-            </a:xfrm>
-            <a:prstGeom prst="rect">
-              <a:avLst/>
-            </a:prstGeom>
-          </p:spPr>
-          <p:txBody>
-            <a:bodyPr wrap="none" fromWordArt="1">
-              <a:prstTxWarp prst="textPlain">
-                <a:avLst>
-                  <a:gd name="adj" fmla="val 50000"/>
-                </a:avLst>
-              </a:prstTxWarp>
-            </a:bodyPr>
-            <a:lstStyle/>
-            <a:p>
-              <a:pPr algn="ctr"/>
-              <a:r>
-                <a:rPr lang="en-US" sz="5520" kern="10" dirty="0">
-                  <a:ln w="9525">
-                    <a:solidFill>
-                      <a:schemeClr val="accent5">
-                        <a:lumMod val="75000"/>
-                      </a:schemeClr>
-                    </a:solidFill>
-                    <a:round/>
-                    <a:headEnd/>
-                    <a:tailEnd/>
-                  </a:ln>
-                  <a:solidFill>
-                    <a:srgbClr val="00B050"/>
-                  </a:solidFill>
-                  <a:latin typeface="Arial Black"/>
-                </a:rPr>
-                <a:t>?</a:t>
-              </a:r>
-            </a:p>
-          </p:txBody>
-        </p:sp>
-      </p:grpSp>
-      <p:sp>
-        <p:nvSpPr>
-          <p:cNvPr id="3" name="Date Placeholder 2"/>
-          <p:cNvSpPr>
-            <a:spLocks noGrp="1"/>
-          </p:cNvSpPr>
-          <p:nvPr>
-            <p:ph type="dt" sz="half" idx="10"/>
-          </p:nvPr>
-        </p:nvSpPr>
-        <p:spPr/>
-        <p:txBody>
-          <a:bodyPr/>
-          <a:lstStyle/>
-          <a:p>
-            <a:fld id="{D595E484-204C-41CF-AA8E-AE5C26E05CE2}" type="datetime3">
-              <a:rPr lang="en-US" smtClean="0"/>
-              <a:t>24 August 2026</a:t>
-            </a:fld>
-            <a:endParaRPr lang="en-US"/>
-          </a:p>
-        </p:txBody>
-      </p:sp>
-      <p:sp>
-        <p:nvSpPr>
-          <p:cNvPr id="9" name="Slide Number Placeholder 8"/>
-          <p:cNvSpPr>
-            <a:spLocks noGrp="1"/>
-          </p:cNvSpPr>
-          <p:nvPr>
-            <p:ph type="sldNum" sz="quarter" idx="12"/>
-          </p:nvPr>
-        </p:nvSpPr>
-        <p:spPr/>
-        <p:txBody>
-          <a:bodyPr/>
-          <a:lstStyle/>
-          <a:p>
-            <a:fld id="{48F63A3B-78C7-47BE-AE5E-E10140E04643}" type="slidenum">
-              <a:rPr lang="en-US" smtClean="0"/>
-              <a:t>18</a:t>
-            </a:fld>
-            <a:endParaRPr lang="en-US" dirty="0"/>
-          </a:p>
-        </p:txBody>
-      </p:sp>
-    </p:spTree>
-    <p:extLst>
-      <p:ext uri="{BB962C8B-B14F-4D97-AF65-F5344CB8AC3E}">
-        <p14:creationId xmlns:p14="http://schemas.microsoft.com/office/powerpoint/2010/main" val="478753263"/>
-      </p:ext>
-    </p:extLst>
-  </p:cSld>
-  <p:clrMapOvr>
-    <a:masterClrMapping/>
-  </p:clrMapOvr>
-</p:sld>
-</file>
-
-<file path=ppt/slides/slide19.xml><?xml version="1.0" encoding="utf-8"?>
-<p:sld xmlns:a="http://schemas.openxmlformats.org/drawingml/2006/main" xmlns:p="http://schemas.openxmlformats.org/presentationml/2006/main" xmlns:r="http://schemas.openxmlformats.org/officeDocument/2006/relationships">
-  <p:cSld>
-    <p:spTree>
-      <p:nvGrpSpPr>
-        <p:cNvPr id="1" name=""/>
-        <p:cNvGrpSpPr/>
-        <p:nvPr/>
-      </p:nvGrpSpPr>
-      <p:grpSpPr/>
-      <p:sp>
-        <p:nvSpPr>
-          <p:cNvPr id="17410" name="Oval 3" descr="Parchment"/>
-          <p:cNvSpPr>
-            <a:spLocks noChangeArrowheads="1"/>
-          </p:cNvSpPr>
-          <p:nvPr/>
-        </p:nvSpPr>
-        <p:spPr bwMode="auto">
-          <a:xfrm>
-            <a:off x="1512916" y="529590"/>
-            <a:ext cx="12818226" cy="1188720"/>
-          </a:xfrm>
-          <a:prstGeom prst="ellipse">
-            <a:avLst/>
-          </a:prstGeom>
-          <a:blipFill dpi="0" rotWithShape="1">
-            <a:blip r:embed="rId2"/>
-            <a:srcRect/>
-            <a:tile tx="0" ty="0" sx="100000" sy="100000" flip="none" algn="tl"/>
-          </a:blipFill>
-          <a:ln w="9525">
-            <a:solidFill>
-              <a:schemeClr val="tx1"/>
-            </a:solidFill>
-            <a:round/>
-            <a:headEnd/>
-            <a:tailEnd/>
-          </a:ln>
-        </p:spPr>
-        <p:txBody>
-          <a:bodyPr wrap="none" anchor="ctr"/>
-          <a:lstStyle>
-            <a:lvl1pPr eaLnBrk="0" hangingPunct="0">
-              <a:defRPr>
-                <a:solidFill>
-                  <a:schemeClr val="tx1"/>
-                </a:solidFill>
-                <a:latin typeface="Arial" panose="020B0604020202020204" pitchFamily="34" charset="0"/>
-                <a:cs typeface="Arial" panose="020B0604020202020204" pitchFamily="34" charset="0"/>
-              </a:defRPr>
-            </a:lvl1pPr>
-            <a:lvl2pPr marL="742950" indent="-285750" eaLnBrk="0" hangingPunct="0">
-              <a:defRPr>
-                <a:solidFill>
-                  <a:schemeClr val="tx1"/>
-                </a:solidFill>
-                <a:latin typeface="Arial" panose="020B0604020202020204" pitchFamily="34" charset="0"/>
-                <a:cs typeface="Arial" panose="020B0604020202020204" pitchFamily="34" charset="0"/>
-              </a:defRPr>
-            </a:lvl2pPr>
-            <a:lvl3pPr marL="1143000" indent="-228600" eaLnBrk="0" hangingPunct="0">
-              <a:defRPr>
-                <a:solidFill>
-                  <a:schemeClr val="tx1"/>
-                </a:solidFill>
-                <a:latin typeface="Arial" panose="020B0604020202020204" pitchFamily="34" charset="0"/>
-                <a:cs typeface="Arial" panose="020B0604020202020204" pitchFamily="34" charset="0"/>
-              </a:defRPr>
-            </a:lvl3pPr>
-            <a:lvl4pPr marL="1600200" indent="-228600" eaLnBrk="0" hangingPunct="0">
-              <a:defRPr>
-                <a:solidFill>
-                  <a:schemeClr val="tx1"/>
-                </a:solidFill>
-                <a:latin typeface="Arial" panose="020B0604020202020204" pitchFamily="34" charset="0"/>
-                <a:cs typeface="Arial" panose="020B0604020202020204" pitchFamily="34" charset="0"/>
-              </a:defRPr>
-            </a:lvl4pPr>
-            <a:lvl5pPr marL="2057400" indent="-228600" eaLnBrk="0" hangingPunct="0">
-              <a:defRPr>
-                <a:solidFill>
-                  <a:schemeClr val="tx1"/>
-                </a:solidFill>
-                <a:latin typeface="Arial" panose="020B0604020202020204" pitchFamily="34" charset="0"/>
-                <a:cs typeface="Arial" panose="020B0604020202020204" pitchFamily="34" charset="0"/>
-              </a:defRPr>
-            </a:lvl5pPr>
-            <a:lvl6pPr marL="2514600" indent="-228600" eaLnBrk="0" fontAlgn="base" hangingPunct="0">
-              <a:spcBef>
-                <a:spcPct val="0"/>
-              </a:spcBef>
-              <a:spcAft>
-                <a:spcPct val="0"/>
-              </a:spcAft>
-              <a:defRPr>
-                <a:solidFill>
-                  <a:schemeClr val="tx1"/>
-                </a:solidFill>
-                <a:latin typeface="Arial" panose="020B0604020202020204" pitchFamily="34" charset="0"/>
-                <a:cs typeface="Arial" panose="020B0604020202020204" pitchFamily="34" charset="0"/>
-              </a:defRPr>
-            </a:lvl6pPr>
-            <a:lvl7pPr marL="2971800" indent="-228600" eaLnBrk="0" fontAlgn="base" hangingPunct="0">
-              <a:spcBef>
-                <a:spcPct val="0"/>
-              </a:spcBef>
-              <a:spcAft>
-                <a:spcPct val="0"/>
-              </a:spcAft>
-              <a:defRPr>
-                <a:solidFill>
-                  <a:schemeClr val="tx1"/>
-                </a:solidFill>
-                <a:latin typeface="Arial" panose="020B0604020202020204" pitchFamily="34" charset="0"/>
-                <a:cs typeface="Arial" panose="020B0604020202020204" pitchFamily="34" charset="0"/>
-              </a:defRPr>
-            </a:lvl7pPr>
-            <a:lvl8pPr marL="3429000" indent="-228600" eaLnBrk="0" fontAlgn="base" hangingPunct="0">
-              <a:spcBef>
-                <a:spcPct val="0"/>
-              </a:spcBef>
-              <a:spcAft>
-                <a:spcPct val="0"/>
-              </a:spcAft>
-              <a:defRPr>
-                <a:solidFill>
-                  <a:schemeClr val="tx1"/>
-                </a:solidFill>
-                <a:latin typeface="Arial" panose="020B0604020202020204" pitchFamily="34" charset="0"/>
-                <a:cs typeface="Arial" panose="020B0604020202020204" pitchFamily="34" charset="0"/>
-              </a:defRPr>
-            </a:lvl8pPr>
-            <a:lvl9pPr marL="3886200" indent="-228600" eaLnBrk="0" fontAlgn="base" hangingPunct="0">
-              <a:spcBef>
-                <a:spcPct val="0"/>
-              </a:spcBef>
-              <a:spcAft>
-                <a:spcPct val="0"/>
-              </a:spcAft>
-              <a:defRPr>
-                <a:solidFill>
-                  <a:schemeClr val="tx1"/>
-                </a:solidFill>
-                <a:latin typeface="Arial" panose="020B0604020202020204" pitchFamily="34" charset="0"/>
-                <a:cs typeface="Arial" panose="020B0604020202020204" pitchFamily="34" charset="0"/>
-              </a:defRPr>
-            </a:lvl9pPr>
-          </a:lstStyle>
-          <a:p>
-            <a:pPr algn="ctr"/>
-            <a:r>
-              <a:rPr lang="en-US" altLang="en-US" sz="3840" b="1" dirty="0">
-                <a:solidFill>
-                  <a:srgbClr val="0070C0"/>
-                </a:solidFill>
-                <a:latin typeface="Comic Sans MS" panose="030F0702030302020204" pitchFamily="66" charset="0"/>
-              </a:rPr>
-              <a:t>Introduction</a:t>
-            </a:r>
-          </a:p>
-        </p:txBody>
-      </p:sp>
-      <p:sp>
-        <p:nvSpPr>
-          <p:cNvPr id="17411" name="Rectangle 2"/>
-          <p:cNvSpPr>
-            <a:spLocks noChangeArrowheads="1"/>
-          </p:cNvSpPr>
-          <p:nvPr/>
-        </p:nvSpPr>
-        <p:spPr bwMode="auto">
-          <a:xfrm>
-            <a:off x="432261" y="2286000"/>
-            <a:ext cx="15677803" cy="5212080"/>
-          </a:xfrm>
-          <a:prstGeom prst="rect">
-            <a:avLst/>
-          </a:prstGeom>
-          <a:noFill/>
-          <a:ln>
-            <a:noFill/>
-          </a:ln>
-          <a:extLst>
-            <a:ext uri="{909E8E84-426E-40DD-AFC4-6F175D3DCCD1}">
-              <a14:hiddenFill xmlns:a14="http://schemas.microsoft.com/office/drawing/2010/main">
-                <a:solidFill>
-                  <a:srgbClr val="FFFFFF"/>
-                </a:solidFill>
-              </a14:hiddenFill>
-            </a:ext>
-            <a:ext uri="{91240B29-F687-4F45-9708-019B960494DF}">
-              <a14:hiddenLine xmlns:a14="http://schemas.microsoft.com/office/drawing/2010/main" w="9525">
-                <a:solidFill>
-                  <a:srgbClr val="000000"/>
-                </a:solidFill>
-                <a:miter lim="800000"/>
-                <a:headEnd/>
-                <a:tailEnd/>
-              </a14:hiddenLine>
-            </a:ext>
-          </a:extLst>
-        </p:spPr>
-        <p:txBody>
-          <a:bodyPr wrap="square"/>
-          <a:lstStyle>
-            <a:lvl1pPr marL="342900" indent="-342900" eaLnBrk="0" hangingPunct="0">
-              <a:defRPr>
-                <a:solidFill>
-                  <a:schemeClr val="tx1"/>
-                </a:solidFill>
-                <a:latin typeface="Arial" panose="020B0604020202020204" pitchFamily="34" charset="0"/>
-                <a:cs typeface="Arial" panose="020B0604020202020204" pitchFamily="34" charset="0"/>
-              </a:defRPr>
-            </a:lvl1pPr>
-            <a:lvl2pPr marL="742950" indent="-285750" eaLnBrk="0" hangingPunct="0">
-              <a:defRPr>
-                <a:solidFill>
-                  <a:schemeClr val="tx1"/>
-                </a:solidFill>
-                <a:latin typeface="Arial" panose="020B0604020202020204" pitchFamily="34" charset="0"/>
-                <a:cs typeface="Arial" panose="020B0604020202020204" pitchFamily="34" charset="0"/>
-              </a:defRPr>
-            </a:lvl2pPr>
-            <a:lvl3pPr marL="1143000" indent="-228600" eaLnBrk="0" hangingPunct="0">
-              <a:defRPr>
-                <a:solidFill>
-                  <a:schemeClr val="tx1"/>
-                </a:solidFill>
-                <a:latin typeface="Arial" panose="020B0604020202020204" pitchFamily="34" charset="0"/>
-                <a:cs typeface="Arial" panose="020B0604020202020204" pitchFamily="34" charset="0"/>
-              </a:defRPr>
-            </a:lvl3pPr>
-            <a:lvl4pPr marL="1600200" indent="-228600" eaLnBrk="0" hangingPunct="0">
-              <a:defRPr>
-                <a:solidFill>
-                  <a:schemeClr val="tx1"/>
-                </a:solidFill>
-                <a:latin typeface="Arial" panose="020B0604020202020204" pitchFamily="34" charset="0"/>
-                <a:cs typeface="Arial" panose="020B0604020202020204" pitchFamily="34" charset="0"/>
-              </a:defRPr>
-            </a:lvl4pPr>
-            <a:lvl5pPr marL="2057400" indent="-228600" eaLnBrk="0" hangingPunct="0">
-              <a:defRPr>
-                <a:solidFill>
-                  <a:schemeClr val="tx1"/>
-                </a:solidFill>
-                <a:latin typeface="Arial" panose="020B0604020202020204" pitchFamily="34" charset="0"/>
-                <a:cs typeface="Arial" panose="020B0604020202020204" pitchFamily="34" charset="0"/>
-              </a:defRPr>
-            </a:lvl5pPr>
-            <a:lvl6pPr marL="2514600" indent="-228600" eaLnBrk="0" fontAlgn="base" hangingPunct="0">
-              <a:spcBef>
-                <a:spcPct val="0"/>
-              </a:spcBef>
-              <a:spcAft>
-                <a:spcPct val="0"/>
-              </a:spcAft>
-              <a:defRPr>
-                <a:solidFill>
-                  <a:schemeClr val="tx1"/>
-                </a:solidFill>
-                <a:latin typeface="Arial" panose="020B0604020202020204" pitchFamily="34" charset="0"/>
-                <a:cs typeface="Arial" panose="020B0604020202020204" pitchFamily="34" charset="0"/>
-              </a:defRPr>
-            </a:lvl6pPr>
-            <a:lvl7pPr marL="2971800" indent="-228600" eaLnBrk="0" fontAlgn="base" hangingPunct="0">
-              <a:spcBef>
-                <a:spcPct val="0"/>
-              </a:spcBef>
-              <a:spcAft>
-                <a:spcPct val="0"/>
-              </a:spcAft>
-              <a:defRPr>
-                <a:solidFill>
-                  <a:schemeClr val="tx1"/>
-                </a:solidFill>
-                <a:latin typeface="Arial" panose="020B0604020202020204" pitchFamily="34" charset="0"/>
-                <a:cs typeface="Arial" panose="020B0604020202020204" pitchFamily="34" charset="0"/>
-              </a:defRPr>
-            </a:lvl7pPr>
-            <a:lvl8pPr marL="3429000" indent="-228600" eaLnBrk="0" fontAlgn="base" hangingPunct="0">
-              <a:spcBef>
-                <a:spcPct val="0"/>
-              </a:spcBef>
-              <a:spcAft>
-                <a:spcPct val="0"/>
-              </a:spcAft>
-              <a:defRPr>
-                <a:solidFill>
-                  <a:schemeClr val="tx1"/>
-                </a:solidFill>
-                <a:latin typeface="Arial" panose="020B0604020202020204" pitchFamily="34" charset="0"/>
-                <a:cs typeface="Arial" panose="020B0604020202020204" pitchFamily="34" charset="0"/>
-              </a:defRPr>
-            </a:lvl8pPr>
-            <a:lvl9pPr marL="3886200" indent="-228600" eaLnBrk="0" fontAlgn="base" hangingPunct="0">
-              <a:spcBef>
-                <a:spcPct val="0"/>
-              </a:spcBef>
-              <a:spcAft>
-                <a:spcPct val="0"/>
-              </a:spcAft>
-              <a:defRPr>
-                <a:solidFill>
-                  <a:schemeClr val="tx1"/>
-                </a:solidFill>
-                <a:latin typeface="Arial" panose="020B0604020202020204" pitchFamily="34" charset="0"/>
-                <a:cs typeface="Arial" panose="020B0604020202020204" pitchFamily="34" charset="0"/>
-              </a:defRPr>
-            </a:lvl9pPr>
-          </a:lstStyle>
-          <a:p>
-            <a:pPr eaLnBrk="1" hangingPunct="1">
-              <a:lnSpc>
-                <a:spcPct val="80000"/>
-              </a:lnSpc>
-              <a:spcBef>
-                <a:spcPct val="20000"/>
-              </a:spcBef>
-              <a:buFontTx/>
-              <a:buChar char="•"/>
-            </a:pPr>
-            <a:r>
-              <a:rPr lang="en-US" altLang="en-US" sz="2000" b="1" dirty="0">
-                <a:latin typeface="Times New Roman" panose="02020603050405020304" pitchFamily="18" charset="0"/>
-                <a:cs typeface="Times New Roman" panose="02020603050405020304" pitchFamily="18" charset="0"/>
-              </a:rPr>
-              <a:t>The developed system reads seven signals continuously: temperature, humidity, pressure, light level, two soil-moisture probes, tray leak and reservoir level.</a:t>
-            </a:r>
-          </a:p>
-          <a:p>
-            <a:pPr eaLnBrk="1" hangingPunct="1">
-              <a:lnSpc>
-                <a:spcPct val="80000"/>
-              </a:lnSpc>
-              <a:spcBef>
-                <a:spcPct val="20000"/>
-              </a:spcBef>
-              <a:buFontTx/>
-              <a:buChar char="•"/>
-            </a:pPr>
-            <a:r>
-              <a:rPr lang="en-US" altLang="en-US" sz="2000" b="1" dirty="0">
-                <a:latin typeface="Times New Roman" panose="02020603050405020304" pitchFamily="18" charset="0"/>
-                <a:cs typeface="Times New Roman" panose="02020603050405020304" pitchFamily="18" charset="0"/>
-              </a:rPr>
-              <a:t>It drives ultrasonic mist makers, an exhaust fan and a grow light through a 4-channel opto-isolated MOSFET stage.</a:t>
-            </a:r>
-          </a:p>
-          <a:p>
-            <a:pPr eaLnBrk="1" hangingPunct="1">
-              <a:lnSpc>
-                <a:spcPct val="80000"/>
-              </a:lnSpc>
-              <a:spcBef>
-                <a:spcPct val="20000"/>
-              </a:spcBef>
-              <a:buFontTx/>
-              <a:buChar char="•"/>
-            </a:pPr>
-            <a:r>
-              <a:rPr lang="en-US" altLang="en-US" sz="2000" b="1" dirty="0">
-                <a:latin typeface="Times New Roman" panose="02020603050405020304" pitchFamily="18" charset="0"/>
-                <a:cs typeface="Times New Roman" panose="02020603050405020304" pitchFamily="18" charset="0"/>
-              </a:rPr>
-              <a:t>Closed-loop rules with hysteresis hold humidity and soil moisture inside target bands; interlocks block unsafe actions.</a:t>
-            </a:r>
-          </a:p>
-          <a:p>
-            <a:pPr eaLnBrk="1" hangingPunct="1">
-              <a:lnSpc>
-                <a:spcPct val="80000"/>
-              </a:lnSpc>
-              <a:spcBef>
-                <a:spcPct val="20000"/>
-              </a:spcBef>
-              <a:buFontTx/>
-              <a:buChar char="•"/>
-            </a:pPr>
-            <a:r>
-              <a:rPr lang="en-US" altLang="en-US" sz="2000" b="1" dirty="0">
-                <a:latin typeface="Times New Roman" panose="02020603050405020304" pitchFamily="18" charset="0"/>
-                <a:cs typeface="Times New Roman" panose="02020603050405020304" pitchFamily="18" charset="0"/>
-              </a:rPr>
-              <a:t>Control from any phone (over Wi-Fi or the board's own hotspot) or from a one-click Windows console app over USB.</a:t>
-            </a:r>
-          </a:p>
-          <a:p>
-            <a:pPr eaLnBrk="1" hangingPunct="1">
-              <a:lnSpc>
-                <a:spcPct val="80000"/>
-              </a:lnSpc>
-              <a:spcBef>
-                <a:spcPct val="20000"/>
-              </a:spcBef>
-              <a:buFontTx/>
-              <a:buChar char="•"/>
-            </a:pPr>
-            <a:r>
-              <a:rPr lang="en-US" altLang="en-US" sz="2000" b="1" dirty="0">
-                <a:latin typeface="Times New Roman" panose="02020603050405020304" pitchFamily="18" charset="0"/>
-                <a:cs typeface="Times New Roman" panose="02020603050405020304" pitchFamily="18" charset="0"/>
-              </a:rPr>
-              <a:t>All 14 thresholds and timings are editable live from the UI and persist in flash, so nothing needs re-flashing to re-tune.</a:t>
-            </a:r>
-          </a:p>
-        </p:txBody>
-      </p:sp>
-      <p:sp>
-        <p:nvSpPr>
-          <p:cNvPr id="3" name="Slide Number Placeholder 2"/>
-          <p:cNvSpPr>
-            <a:spLocks noGrp="1"/>
-          </p:cNvSpPr>
-          <p:nvPr>
-            <p:ph type="sldNum" sz="quarter" idx="12"/>
-          </p:nvPr>
-        </p:nvSpPr>
-        <p:spPr/>
-        <p:txBody>
-          <a:bodyPr/>
-          <a:lstStyle/>
-          <a:p>
-            <a:fld id="{48F63A3B-78C7-47BE-AE5E-E10140E04643}" type="slidenum">
-              <a:rPr lang="en-US" smtClean="0"/>
-              <a:pPr/>
-              <a:t>7</a:t>
-            </a:fld>
-            <a:endParaRPr lang="en-US" dirty="0"/>
-          </a:p>
-        </p:txBody>
-      </p:sp>
-    </p:spTree>
   </p:cSld>
   <p:clrMapOvr>
     <a:masterClrMapping/>
@@ -11442,7 +11690,7 @@
 </file>
 
 <file path=ppt/slides/slide20.xml><?xml version="1.0" encoding="utf-8"?>
-<p:sld xmlns:a="http://schemas.openxmlformats.org/drawingml/2006/main" xmlns:p="http://schemas.openxmlformats.org/presentationml/2006/main" xmlns:r="http://schemas.openxmlformats.org/officeDocument/2006/relationships">
+<p:sld xmlns:a="http://schemas.openxmlformats.org/drawingml/2006/main" xmlns:r="http://schemas.openxmlformats.org/officeDocument/2006/relationships" xmlns:p="http://schemas.openxmlformats.org/presentationml/2006/main">
   <p:cSld>
     <p:spTree>
       <p:nvGrpSpPr>
@@ -11450,10 +11698,17 @@
         <p:cNvGrpSpPr/>
         <p:nvPr/>
       </p:nvGrpSpPr>
-      <p:grpSpPr/>
+      <p:grpSpPr>
+        <a:xfrm>
+          <a:off x="0" y="0"/>
+          <a:ext cx="0" cy="0"/>
+          <a:chOff x="0" y="0"/>
+          <a:chExt cx="0" cy="0"/>
+        </a:xfrm>
+      </p:grpSpPr>
       <p:sp>
         <p:nvSpPr>
-          <p:cNvPr id="17410" name="Oval 3" descr="Parchment"/>
+          <p:cNvPr id="25602" name="Rectangle 2"/>
           <p:cNvSpPr>
             <a:spLocks noChangeArrowheads="1"/>
           </p:cNvSpPr>
@@ -11461,8 +11716,275 @@
         </p:nvSpPr>
         <p:spPr bwMode="auto">
           <a:xfrm>
-            <a:off x="1512916" y="529590"/>
-            <a:ext cx="12818226" cy="1188720"/>
+            <a:off x="232755" y="1961803"/>
+            <a:ext cx="15943811" cy="4937760"/>
+          </a:xfrm>
+          <a:prstGeom prst="rect">
+            <a:avLst/>
+          </a:prstGeom>
+          <a:noFill/>
+          <a:ln>
+            <a:noFill/>
+          </a:ln>
+          <a:extLst>
+            <a:ext uri="{909E8E84-426E-40DD-AFC4-6F175D3DCCD1}">
+              <a14:hiddenFill xmlns:a14="http://schemas.microsoft.com/office/drawing/2010/main">
+                <a:solidFill>
+                  <a:srgbClr val="FFFFFF"/>
+                </a:solidFill>
+              </a14:hiddenFill>
+            </a:ext>
+            <a:ext uri="{91240B29-F687-4F45-9708-019B960494DF}">
+              <a14:hiddenLine xmlns:a14="http://schemas.microsoft.com/office/drawing/2010/main" w="9525">
+                <a:solidFill>
+                  <a:srgbClr val="000000"/>
+                </a:solidFill>
+                <a:miter lim="800000"/>
+                <a:headEnd/>
+                <a:tailEnd/>
+              </a14:hiddenLine>
+            </a:ext>
+          </a:extLst>
+        </p:spPr>
+        <p:txBody>
+          <a:bodyPr wrap="square"/>
+          <a:lstStyle>
+            <a:lvl1pPr marL="342900" indent="-342900" eaLnBrk="0" hangingPunct="0">
+              <a:defRPr>
+                <a:solidFill>
+                  <a:schemeClr val="tx1"/>
+                </a:solidFill>
+                <a:latin typeface="Arial" panose="020B0604020202020204" pitchFamily="34" charset="0"/>
+                <a:cs typeface="Arial" panose="020B0604020202020204" pitchFamily="34" charset="0"/>
+              </a:defRPr>
+            </a:lvl1pPr>
+            <a:lvl2pPr marL="742950" indent="-285750" eaLnBrk="0" hangingPunct="0">
+              <a:defRPr>
+                <a:solidFill>
+                  <a:schemeClr val="tx1"/>
+                </a:solidFill>
+                <a:latin typeface="Arial" panose="020B0604020202020204" pitchFamily="34" charset="0"/>
+                <a:cs typeface="Arial" panose="020B0604020202020204" pitchFamily="34" charset="0"/>
+              </a:defRPr>
+            </a:lvl2pPr>
+            <a:lvl3pPr marL="1143000" indent="-228600" eaLnBrk="0" hangingPunct="0">
+              <a:defRPr>
+                <a:solidFill>
+                  <a:schemeClr val="tx1"/>
+                </a:solidFill>
+                <a:latin typeface="Arial" panose="020B0604020202020204" pitchFamily="34" charset="0"/>
+                <a:cs typeface="Arial" panose="020B0604020202020204" pitchFamily="34" charset="0"/>
+              </a:defRPr>
+            </a:lvl3pPr>
+            <a:lvl4pPr marL="1600200" indent="-228600" eaLnBrk="0" hangingPunct="0">
+              <a:defRPr>
+                <a:solidFill>
+                  <a:schemeClr val="tx1"/>
+                </a:solidFill>
+                <a:latin typeface="Arial" panose="020B0604020202020204" pitchFamily="34" charset="0"/>
+                <a:cs typeface="Arial" panose="020B0604020202020204" pitchFamily="34" charset="0"/>
+              </a:defRPr>
+            </a:lvl4pPr>
+            <a:lvl5pPr marL="2057400" indent="-228600" eaLnBrk="0" hangingPunct="0">
+              <a:defRPr>
+                <a:solidFill>
+                  <a:schemeClr val="tx1"/>
+                </a:solidFill>
+                <a:latin typeface="Arial" panose="020B0604020202020204" pitchFamily="34" charset="0"/>
+                <a:cs typeface="Arial" panose="020B0604020202020204" pitchFamily="34" charset="0"/>
+              </a:defRPr>
+            </a:lvl5pPr>
+            <a:lvl6pPr marL="2514600" indent="-228600" eaLnBrk="0" fontAlgn="base" hangingPunct="0">
+              <a:spcBef>
+                <a:spcPct val="0"/>
+              </a:spcBef>
+              <a:spcAft>
+                <a:spcPct val="0"/>
+              </a:spcAft>
+              <a:defRPr>
+                <a:solidFill>
+                  <a:schemeClr val="tx1"/>
+                </a:solidFill>
+                <a:latin typeface="Arial" panose="020B0604020202020204" pitchFamily="34" charset="0"/>
+                <a:cs typeface="Arial" panose="020B0604020202020204" pitchFamily="34" charset="0"/>
+              </a:defRPr>
+            </a:lvl6pPr>
+            <a:lvl7pPr marL="2971800" indent="-228600" eaLnBrk="0" fontAlgn="base" hangingPunct="0">
+              <a:spcBef>
+                <a:spcPct val="0"/>
+              </a:spcBef>
+              <a:spcAft>
+                <a:spcPct val="0"/>
+              </a:spcAft>
+              <a:defRPr>
+                <a:solidFill>
+                  <a:schemeClr val="tx1"/>
+                </a:solidFill>
+                <a:latin typeface="Arial" panose="020B0604020202020204" pitchFamily="34" charset="0"/>
+                <a:cs typeface="Arial" panose="020B0604020202020204" pitchFamily="34" charset="0"/>
+              </a:defRPr>
+            </a:lvl7pPr>
+            <a:lvl8pPr marL="3429000" indent="-228600" eaLnBrk="0" fontAlgn="base" hangingPunct="0">
+              <a:spcBef>
+                <a:spcPct val="0"/>
+              </a:spcBef>
+              <a:spcAft>
+                <a:spcPct val="0"/>
+              </a:spcAft>
+              <a:defRPr>
+                <a:solidFill>
+                  <a:schemeClr val="tx1"/>
+                </a:solidFill>
+                <a:latin typeface="Arial" panose="020B0604020202020204" pitchFamily="34" charset="0"/>
+                <a:cs typeface="Arial" panose="020B0604020202020204" pitchFamily="34" charset="0"/>
+              </a:defRPr>
+            </a:lvl8pPr>
+            <a:lvl9pPr marL="3886200" indent="-228600" eaLnBrk="0" fontAlgn="base" hangingPunct="0">
+              <a:spcBef>
+                <a:spcPct val="0"/>
+              </a:spcBef>
+              <a:spcAft>
+                <a:spcPct val="0"/>
+              </a:spcAft>
+              <a:defRPr>
+                <a:solidFill>
+                  <a:schemeClr val="tx1"/>
+                </a:solidFill>
+                <a:latin typeface="Arial" panose="020B0604020202020204" pitchFamily="34" charset="0"/>
+                <a:cs typeface="Arial" panose="020B0604020202020204" pitchFamily="34" charset="0"/>
+              </a:defRPr>
+            </a:lvl9pPr>
+          </a:lstStyle>
+          <a:p>
+            <a:pPr eaLnBrk="1" hangingPunct="1">
+              <a:lnSpc>
+                <a:spcPct val="90000"/>
+              </a:lnSpc>
+              <a:spcBef>
+                <a:spcPct val="20000"/>
+              </a:spcBef>
+              <a:buFontTx/>
+              <a:buChar char="•"/>
+            </a:pPr>
+            <a:r>
+              <a:rPr lang="en-US" altLang="en-US" sz="2100" dirty="0">
+                <a:solidFill>
+                  <a:srgbClr val="00B050"/>
+                </a:solidFill>
+                <a:latin typeface="Times New Roman" panose="02020603050405020304" pitchFamily="18" charset="0"/>
+                <a:cs typeface="Times New Roman" panose="02020603050405020304" pitchFamily="18" charset="0"/>
+              </a:rPr>
+              <a:t>Integrate the 3D-printed PETG enclosure and the 12 V lighting / airflow stage.</a:t>
+            </a:r>
+            <a:endParaRPr lang="en-US" altLang="en-US" sz="3200" dirty="0">
+              <a:solidFill>
+                <a:srgbClr val="0000D6"/>
+              </a:solidFill>
+              <a:latin typeface="Times New Roman" panose="02020603050405020304" pitchFamily="18" charset="0"/>
+              <a:cs typeface="Times New Roman" panose="02020603050405020304" pitchFamily="18" charset="0"/>
+            </a:endParaRPr>
+          </a:p>
+          <a:p>
+            <a:pPr eaLnBrk="1" hangingPunct="1">
+              <a:lnSpc>
+                <a:spcPct val="90000"/>
+              </a:lnSpc>
+              <a:spcBef>
+                <a:spcPct val="20000"/>
+              </a:spcBef>
+              <a:buFontTx/>
+              <a:buChar char="•"/>
+            </a:pPr>
+            <a:r>
+              <a:rPr lang="en-US" altLang="en-US" sz="2100" dirty="0">
+                <a:solidFill>
+                  <a:srgbClr val="00B050"/>
+                </a:solidFill>
+                <a:latin typeface="Times New Roman" panose="02020603050405020304" pitchFamily="18" charset="0"/>
+                <a:cs typeface="Times New Roman" panose="02020603050405020304" pitchFamily="18" charset="0"/>
+              </a:rPr>
+              <a:t>Long-term data logging with charts, trends and mobile push alerts.</a:t>
+            </a:r>
+            <a:endParaRPr lang="en-US" altLang="en-US" sz="3200" dirty="0">
+              <a:solidFill>
+                <a:srgbClr val="0000D6"/>
+              </a:solidFill>
+              <a:latin typeface="Times New Roman" panose="02020603050405020304" pitchFamily="18" charset="0"/>
+              <a:cs typeface="Times New Roman" panose="02020603050405020304" pitchFamily="18" charset="0"/>
+            </a:endParaRPr>
+          </a:p>
+          <a:p>
+            <a:pPr eaLnBrk="1" hangingPunct="1">
+              <a:lnSpc>
+                <a:spcPct val="90000"/>
+              </a:lnSpc>
+              <a:spcBef>
+                <a:spcPct val="20000"/>
+              </a:spcBef>
+              <a:buFontTx/>
+              <a:buChar char="•"/>
+            </a:pPr>
+            <a:r>
+              <a:rPr lang="en-US" altLang="en-US" sz="2100" dirty="0">
+                <a:solidFill>
+                  <a:srgbClr val="00B050"/>
+                </a:solidFill>
+                <a:latin typeface="Times New Roman" panose="02020603050405020304" pitchFamily="18" charset="0"/>
+                <a:cs typeface="Times New Roman" panose="02020603050405020304" pitchFamily="18" charset="0"/>
+              </a:rPr>
+              <a:t>Camera-based plant-health monitoring (leaf-colour analysis).</a:t>
+            </a:r>
+            <a:endParaRPr lang="en-US" altLang="en-US" sz="3200" dirty="0">
+              <a:solidFill>
+                <a:srgbClr val="0000D6"/>
+              </a:solidFill>
+              <a:latin typeface="Times New Roman" panose="02020603050405020304" pitchFamily="18" charset="0"/>
+              <a:cs typeface="Times New Roman" panose="02020603050405020304" pitchFamily="18" charset="0"/>
+            </a:endParaRPr>
+          </a:p>
+          <a:p>
+            <a:pPr eaLnBrk="1" hangingPunct="1">
+              <a:lnSpc>
+                <a:spcPct val="90000"/>
+              </a:lnSpc>
+              <a:spcBef>
+                <a:spcPct val="20000"/>
+              </a:spcBef>
+              <a:buFontTx/>
+              <a:buChar char="•"/>
+            </a:pPr>
+            <a:r>
+              <a:rPr lang="en-US" altLang="en-US" sz="2100" dirty="0">
+                <a:solidFill>
+                  <a:srgbClr val="00B050"/>
+                </a:solidFill>
+                <a:latin typeface="Times New Roman" panose="02020603050405020304" pitchFamily="18" charset="0"/>
+                <a:cs typeface="Times New Roman" panose="02020603050405020304" pitchFamily="18" charset="0"/>
+              </a:rPr>
+              <a:t>Battery / UPS backup and multi-terrarium networking from one console.</a:t>
+            </a:r>
+            <a:endParaRPr lang="en-US" altLang="en-US" sz="3200" dirty="0">
+              <a:solidFill>
+                <a:srgbClr val="0000D6"/>
+              </a:solidFill>
+              <a:latin typeface="Times New Roman" panose="02020603050405020304" pitchFamily="18" charset="0"/>
+              <a:cs typeface="Times New Roman" panose="02020603050405020304" pitchFamily="18" charset="0"/>
+            </a:endParaRPr>
+          </a:p>
+        </p:txBody>
+      </p:sp>
+      <p:sp>
+        <p:nvSpPr>
+          <p:cNvPr id="25603" name="Oval 3" descr="Parchment"/>
+          <p:cNvSpPr>
+            <a:spLocks noChangeArrowheads="1"/>
+          </p:cNvSpPr>
+          <p:nvPr/>
+        </p:nvSpPr>
+        <p:spPr bwMode="auto">
+          <a:xfrm>
+            <a:off x="1363286" y="457200"/>
+            <a:ext cx="13948757" cy="1188720"/>
           </a:xfrm>
           <a:prstGeom prst="ellipse">
             <a:avLst/>
@@ -11593,221 +12115,13 @@
           <a:p>
             <a:pPr algn="ctr"/>
             <a:r>
-              <a:rPr lang="en-US" altLang="en-US" sz="3840" b="1" dirty="0">
+              <a:rPr lang="en-US" altLang="en-US" sz="4000" b="1">
                 <a:solidFill>
                   <a:srgbClr val="0070C0"/>
                 </a:solidFill>
                 <a:latin typeface="Comic Sans MS" panose="030F0702030302020204" pitchFamily="66" charset="0"/>
               </a:rPr>
-              <a:t>Description/Methodology of the Work</a:t>
-            </a:r>
-          </a:p>
-        </p:txBody>
-      </p:sp>
-      <p:sp>
-        <p:nvSpPr>
-          <p:cNvPr id="17411" name="Rectangle 2"/>
-          <p:cNvSpPr>
-            <a:spLocks noChangeArrowheads="1"/>
-          </p:cNvSpPr>
-          <p:nvPr/>
-        </p:nvSpPr>
-        <p:spPr bwMode="auto">
-          <a:xfrm>
-            <a:off x="432261" y="2286000"/>
-            <a:ext cx="15677803" cy="1920240"/>
-          </a:xfrm>
-          <a:prstGeom prst="rect">
-            <a:avLst/>
-          </a:prstGeom>
-          <a:noFill/>
-          <a:ln>
-            <a:noFill/>
-          </a:ln>
-          <a:extLst>
-            <a:ext uri="{909E8E84-426E-40DD-AFC4-6F175D3DCCD1}">
-              <a14:hiddenFill xmlns:a14="http://schemas.microsoft.com/office/drawing/2010/main">
-                <a:solidFill>
-                  <a:srgbClr val="FFFFFF"/>
-                </a:solidFill>
-              </a14:hiddenFill>
-            </a:ext>
-            <a:ext uri="{91240B29-F687-4F45-9708-019B960494DF}">
-              <a14:hiddenLine xmlns:a14="http://schemas.microsoft.com/office/drawing/2010/main" w="9525">
-                <a:solidFill>
-                  <a:srgbClr val="000000"/>
-                </a:solidFill>
-                <a:miter lim="800000"/>
-                <a:headEnd/>
-                <a:tailEnd/>
-              </a14:hiddenLine>
-            </a:ext>
-          </a:extLst>
-        </p:spPr>
-        <p:txBody>
-          <a:bodyPr wrap="square"/>
-          <a:lstStyle>
-            <a:lvl1pPr marL="342900" indent="-342900" eaLnBrk="0" hangingPunct="0">
-              <a:defRPr>
-                <a:solidFill>
-                  <a:schemeClr val="tx1"/>
-                </a:solidFill>
-                <a:latin typeface="Arial" panose="020B0604020202020204" pitchFamily="34" charset="0"/>
-                <a:cs typeface="Arial" panose="020B0604020202020204" pitchFamily="34" charset="0"/>
-              </a:defRPr>
-            </a:lvl1pPr>
-            <a:lvl2pPr marL="742950" indent="-285750" eaLnBrk="0" hangingPunct="0">
-              <a:defRPr>
-                <a:solidFill>
-                  <a:schemeClr val="tx1"/>
-                </a:solidFill>
-                <a:latin typeface="Arial" panose="020B0604020202020204" pitchFamily="34" charset="0"/>
-                <a:cs typeface="Arial" panose="020B0604020202020204" pitchFamily="34" charset="0"/>
-              </a:defRPr>
-            </a:lvl2pPr>
-            <a:lvl3pPr marL="1143000" indent="-228600" eaLnBrk="0" hangingPunct="0">
-              <a:defRPr>
-                <a:solidFill>
-                  <a:schemeClr val="tx1"/>
-                </a:solidFill>
-                <a:latin typeface="Arial" panose="020B0604020202020204" pitchFamily="34" charset="0"/>
-                <a:cs typeface="Arial" panose="020B0604020202020204" pitchFamily="34" charset="0"/>
-              </a:defRPr>
-            </a:lvl3pPr>
-            <a:lvl4pPr marL="1600200" indent="-228600" eaLnBrk="0" hangingPunct="0">
-              <a:defRPr>
-                <a:solidFill>
-                  <a:schemeClr val="tx1"/>
-                </a:solidFill>
-                <a:latin typeface="Arial" panose="020B0604020202020204" pitchFamily="34" charset="0"/>
-                <a:cs typeface="Arial" panose="020B0604020202020204" pitchFamily="34" charset="0"/>
-              </a:defRPr>
-            </a:lvl4pPr>
-            <a:lvl5pPr marL="2057400" indent="-228600" eaLnBrk="0" hangingPunct="0">
-              <a:defRPr>
-                <a:solidFill>
-                  <a:schemeClr val="tx1"/>
-                </a:solidFill>
-                <a:latin typeface="Arial" panose="020B0604020202020204" pitchFamily="34" charset="0"/>
-                <a:cs typeface="Arial" panose="020B0604020202020204" pitchFamily="34" charset="0"/>
-              </a:defRPr>
-            </a:lvl5pPr>
-            <a:lvl6pPr marL="2514600" indent="-228600" eaLnBrk="0" fontAlgn="base" hangingPunct="0">
-              <a:spcBef>
-                <a:spcPct val="0"/>
-              </a:spcBef>
-              <a:spcAft>
-                <a:spcPct val="0"/>
-              </a:spcAft>
-              <a:defRPr>
-                <a:solidFill>
-                  <a:schemeClr val="tx1"/>
-                </a:solidFill>
-                <a:latin typeface="Arial" panose="020B0604020202020204" pitchFamily="34" charset="0"/>
-                <a:cs typeface="Arial" panose="020B0604020202020204" pitchFamily="34" charset="0"/>
-              </a:defRPr>
-            </a:lvl6pPr>
-            <a:lvl7pPr marL="2971800" indent="-228600" eaLnBrk="0" fontAlgn="base" hangingPunct="0">
-              <a:spcBef>
-                <a:spcPct val="0"/>
-              </a:spcBef>
-              <a:spcAft>
-                <a:spcPct val="0"/>
-              </a:spcAft>
-              <a:defRPr>
-                <a:solidFill>
-                  <a:schemeClr val="tx1"/>
-                </a:solidFill>
-                <a:latin typeface="Arial" panose="020B0604020202020204" pitchFamily="34" charset="0"/>
-                <a:cs typeface="Arial" panose="020B0604020202020204" pitchFamily="34" charset="0"/>
-              </a:defRPr>
-            </a:lvl7pPr>
-            <a:lvl8pPr marL="3429000" indent="-228600" eaLnBrk="0" fontAlgn="base" hangingPunct="0">
-              <a:spcBef>
-                <a:spcPct val="0"/>
-              </a:spcBef>
-              <a:spcAft>
-                <a:spcPct val="0"/>
-              </a:spcAft>
-              <a:defRPr>
-                <a:solidFill>
-                  <a:schemeClr val="tx1"/>
-                </a:solidFill>
-                <a:latin typeface="Arial" panose="020B0604020202020204" pitchFamily="34" charset="0"/>
-                <a:cs typeface="Arial" panose="020B0604020202020204" pitchFamily="34" charset="0"/>
-              </a:defRPr>
-            </a:lvl8pPr>
-            <a:lvl9pPr marL="3886200" indent="-228600" eaLnBrk="0" fontAlgn="base" hangingPunct="0">
-              <a:spcBef>
-                <a:spcPct val="0"/>
-              </a:spcBef>
-              <a:spcAft>
-                <a:spcPct val="0"/>
-              </a:spcAft>
-              <a:defRPr>
-                <a:solidFill>
-                  <a:schemeClr val="tx1"/>
-                </a:solidFill>
-                <a:latin typeface="Arial" panose="020B0604020202020204" pitchFamily="34" charset="0"/>
-                <a:cs typeface="Arial" panose="020B0604020202020204" pitchFamily="34" charset="0"/>
-              </a:defRPr>
-            </a:lvl9pPr>
-          </a:lstStyle>
-          <a:p>
-            <a:pPr eaLnBrk="1" hangingPunct="1">
-              <a:lnSpc>
-                <a:spcPct val="80000"/>
-              </a:lnSpc>
-              <a:spcBef>
-                <a:spcPct val="20000"/>
-              </a:spcBef>
-              <a:buFontTx/>
-              <a:buChar char="•"/>
-            </a:pPr>
-            <a:r>
-              <a:rPr lang="en-US" altLang="en-US" sz="1700" b="1" dirty="0">
-                <a:latin typeface="Times New Roman" panose="02020603050405020304" pitchFamily="18" charset="0"/>
-                <a:cs typeface="Times New Roman" panose="02020603050405020304" pitchFamily="18" charset="0"/>
-              </a:rPr>
-              <a:t>As-built wiring is documented one-to-one in a self-developed interactive diagram; 32 of 39 planned connections are live on the bench build.</a:t>
-            </a:r>
-          </a:p>
-          <a:p>
-            <a:pPr eaLnBrk="1" hangingPunct="1">
-              <a:lnSpc>
-                <a:spcPct val="80000"/>
-              </a:lnSpc>
-              <a:spcBef>
-                <a:spcPct val="20000"/>
-              </a:spcBef>
-              <a:buFontTx/>
-              <a:buChar char="•"/>
-            </a:pPr>
-            <a:r>
-              <a:rPr lang="en-US" altLang="en-US" sz="1700" b="1" dirty="0">
-                <a:latin typeface="Times New Roman" panose="02020603050405020304" pitchFamily="18" charset="0"/>
-                <a:cs typeface="Times New Roman" panose="02020603050405020304" pitchFamily="18" charset="0"/>
-              </a:rPr>
-              <a:t>Firmware: Arduino C++ on the ESP32, with a web server, a serial command console and settings persisted in flash (NVS).</a:t>
-            </a:r>
-          </a:p>
-          <a:p>
-            <a:pPr eaLnBrk="1" hangingPunct="1">
-              <a:lnSpc>
-                <a:spcPct val="80000"/>
-              </a:lnSpc>
-              <a:spcBef>
-                <a:spcPct val="20000"/>
-              </a:spcBef>
-              <a:buFontTx/>
-              <a:buChar char="•"/>
-            </a:pPr>
-            <a:r>
-              <a:rPr lang="en-US" altLang="en-US" sz="1700" b="1" dirty="0">
-                <a:latin typeface="Times New Roman" panose="02020603050405020304" pitchFamily="18" charset="0"/>
-                <a:cs typeface="Times New Roman" panose="02020603050405020304" pitchFamily="18" charset="0"/>
-              </a:rPr>
-              <a:t>Windows console app (single .exe): auto-detects the board, installs the driver and toolchain, flashes firmware and provisions Wi-Fi over USB.</a:t>
+              <a:t>Future Scopes</a:t>
             </a:r>
           </a:p>
         </p:txBody>
@@ -11830,71 +12144,18 @@
             <a:fld id="{48F63A3B-78C7-47BE-AE5E-E10140E04643}" type="slidenum">
               <a:rPr lang="en-US" smtClean="0"/>
               <a:pPr/>
-              <a:t>7</a:t>
+              <a:t>17</a:t>
             </a:fld>
             <a:endParaRPr lang="en-US" dirty="0"/>
-          </a:p>
-        </p:txBody>
-      </p:sp>
-      <p:pic>
-        <p:nvPicPr>
-          <p:cNvPr id="17412" name="Picture 17411" descr="wiring-crop.png"/>
-          <p:cNvPicPr>
-            <a:picLocks noChangeAspect="1"/>
-          </p:cNvPicPr>
-          <p:nvPr/>
-        </p:nvPicPr>
-        <p:blipFill>
-          <a:blip r:embed="rId3"/>
-          <a:stretch>
-            <a:fillRect/>
-          </a:stretch>
-        </p:blipFill>
-        <p:spPr>
-          <a:xfrm>
-            <a:off x="5951000" y="3063240"/>
-            <a:ext cx="4740080" cy="4709160"/>
-          </a:xfrm>
-          <a:prstGeom prst="rect">
-            <a:avLst/>
-          </a:prstGeom>
-        </p:spPr>
-      </p:pic>
-      <p:sp>
-        <p:nvSpPr>
-          <p:cNvPr id="17413" name="TextBox 17412"/>
-          <p:cNvSpPr txBox="1"/>
-          <p:nvPr/>
-        </p:nvSpPr>
-        <p:spPr>
-          <a:xfrm>
-            <a:off x="5120640" y="7818120"/>
-            <a:ext cx="6400800" cy="365760"/>
-          </a:xfrm>
-          <a:prstGeom prst="rect">
-            <a:avLst/>
-          </a:prstGeom>
-          <a:noFill/>
-        </p:spPr>
-        <p:txBody>
-          <a:bodyPr wrap="none">
-            <a:spAutoFit/>
-          </a:bodyPr>
-          <a:lstStyle/>
-          <a:p>
-            <a:pPr algn="ctr"/>
-            <a:r>
-              <a:rPr sz="1300" i="1">
-                <a:solidFill>
-                  <a:srgbClr val="444444"/>
-                </a:solidFill>
-              </a:rPr>
-              <a:t>Fig. 4: Interactive as-built wiring diagram (self-developed tool)</a:t>
-            </a:r>
           </a:p>
         </p:txBody>
       </p:sp>
     </p:spTree>
+    <p:extLst>
+      <p:ext uri="{BB962C8B-B14F-4D97-AF65-F5344CB8AC3E}">
+        <p14:creationId xmlns:p14="http://schemas.microsoft.com/office/powerpoint/2010/main" val="173450297"/>
+      </p:ext>
+    </p:extLst>
   </p:cSld>
   <p:clrMapOvr>
     <a:masterClrMapping/>
@@ -11903,7 +12164,7 @@
 </file>
 
 <file path=ppt/slides/slide21.xml><?xml version="1.0" encoding="utf-8"?>
-<p:sld xmlns:a="http://schemas.openxmlformats.org/drawingml/2006/main" xmlns:p="http://schemas.openxmlformats.org/presentationml/2006/main" xmlns:r="http://schemas.openxmlformats.org/officeDocument/2006/relationships">
+<p:sld xmlns:a="http://schemas.openxmlformats.org/drawingml/2006/main" xmlns:r="http://schemas.openxmlformats.org/officeDocument/2006/relationships" xmlns:p="http://schemas.openxmlformats.org/presentationml/2006/main">
   <p:cSld>
     <p:spTree>
       <p:nvGrpSpPr>
@@ -11911,409 +12172,360 @@
         <p:cNvGrpSpPr/>
         <p:nvPr/>
       </p:nvGrpSpPr>
-      <p:grpSpPr/>
+      <p:grpSpPr>
+        <a:xfrm>
+          <a:off x="0" y="0"/>
+          <a:ext cx="0" cy="0"/>
+          <a:chOff x="0" y="0"/>
+          <a:chExt cx="0" cy="0"/>
+        </a:xfrm>
+      </p:grpSpPr>
       <p:sp>
         <p:nvSpPr>
-          <p:cNvPr id="17410" name="Oval 3" descr="Parchment"/>
+          <p:cNvPr id="2" name="Title 1">
+            <a:extLst>
+              <a:ext uri="{FF2B5EF4-FFF2-40B4-BE49-F238E27FC236}">
+                <a16:creationId xmlns:a16="http://schemas.microsoft.com/office/drawing/2014/main" id="{D1699652-6805-4BCB-82F2-65ABD02EC79B}"/>
+              </a:ext>
+            </a:extLst>
+          </p:cNvPr>
           <p:cNvSpPr>
-            <a:spLocks noChangeArrowheads="1"/>
+            <a:spLocks noGrp="1"/>
           </p:cNvSpPr>
-          <p:nvPr/>
+          <p:nvPr>
+            <p:ph type="title"/>
+          </p:nvPr>
         </p:nvSpPr>
-        <p:spPr bwMode="auto">
+        <p:spPr>
           <a:xfrm>
-            <a:off x="1512916" y="529590"/>
-            <a:ext cx="12818226" cy="1188720"/>
+            <a:off x="762001" y="600493"/>
+            <a:ext cx="15122768" cy="1191665"/>
           </a:xfrm>
-          <a:prstGeom prst="ellipse">
-            <a:avLst/>
-          </a:prstGeom>
-          <a:blipFill dpi="0" rotWithShape="1">
-            <a:blip r:embed="rId2"/>
-            <a:srcRect/>
-            <a:tile tx="0" ty="0" sx="100000" sy="100000" flip="none" algn="tl"/>
-          </a:blipFill>
-          <a:ln w="9525">
-            <a:solidFill>
-              <a:schemeClr val="tx1"/>
-            </a:solidFill>
-            <a:round/>
-            <a:headEnd/>
-            <a:tailEnd/>
-          </a:ln>
         </p:spPr>
         <p:txBody>
-          <a:bodyPr wrap="none" anchor="ctr"/>
-          <a:lstStyle>
-            <a:lvl1pPr eaLnBrk="0" hangingPunct="0">
-              <a:defRPr>
-                <a:solidFill>
-                  <a:schemeClr val="tx1"/>
-                </a:solidFill>
-                <a:latin typeface="Arial" panose="020B0604020202020204" pitchFamily="34" charset="0"/>
-                <a:cs typeface="Arial" panose="020B0604020202020204" pitchFamily="34" charset="0"/>
-              </a:defRPr>
-            </a:lvl1pPr>
-            <a:lvl2pPr marL="742950" indent="-285750" eaLnBrk="0" hangingPunct="0">
-              <a:defRPr>
-                <a:solidFill>
-                  <a:schemeClr val="tx1"/>
-                </a:solidFill>
-                <a:latin typeface="Arial" panose="020B0604020202020204" pitchFamily="34" charset="0"/>
-                <a:cs typeface="Arial" panose="020B0604020202020204" pitchFamily="34" charset="0"/>
-              </a:defRPr>
-            </a:lvl2pPr>
-            <a:lvl3pPr marL="1143000" indent="-228600" eaLnBrk="0" hangingPunct="0">
-              <a:defRPr>
-                <a:solidFill>
-                  <a:schemeClr val="tx1"/>
-                </a:solidFill>
-                <a:latin typeface="Arial" panose="020B0604020202020204" pitchFamily="34" charset="0"/>
-                <a:cs typeface="Arial" panose="020B0604020202020204" pitchFamily="34" charset="0"/>
-              </a:defRPr>
-            </a:lvl3pPr>
-            <a:lvl4pPr marL="1600200" indent="-228600" eaLnBrk="0" hangingPunct="0">
-              <a:defRPr>
-                <a:solidFill>
-                  <a:schemeClr val="tx1"/>
-                </a:solidFill>
-                <a:latin typeface="Arial" panose="020B0604020202020204" pitchFamily="34" charset="0"/>
-                <a:cs typeface="Arial" panose="020B0604020202020204" pitchFamily="34" charset="0"/>
-              </a:defRPr>
-            </a:lvl4pPr>
-            <a:lvl5pPr marL="2057400" indent="-228600" eaLnBrk="0" hangingPunct="0">
-              <a:defRPr>
-                <a:solidFill>
-                  <a:schemeClr val="tx1"/>
-                </a:solidFill>
-                <a:latin typeface="Arial" panose="020B0604020202020204" pitchFamily="34" charset="0"/>
-                <a:cs typeface="Arial" panose="020B0604020202020204" pitchFamily="34" charset="0"/>
-              </a:defRPr>
-            </a:lvl5pPr>
-            <a:lvl6pPr marL="2514600" indent="-228600" eaLnBrk="0" fontAlgn="base" hangingPunct="0">
-              <a:spcBef>
-                <a:spcPct val="0"/>
-              </a:spcBef>
-              <a:spcAft>
-                <a:spcPct val="0"/>
-              </a:spcAft>
-              <a:defRPr>
-                <a:solidFill>
-                  <a:schemeClr val="tx1"/>
-                </a:solidFill>
-                <a:latin typeface="Arial" panose="020B0604020202020204" pitchFamily="34" charset="0"/>
-                <a:cs typeface="Arial" panose="020B0604020202020204" pitchFamily="34" charset="0"/>
-              </a:defRPr>
-            </a:lvl6pPr>
-            <a:lvl7pPr marL="2971800" indent="-228600" eaLnBrk="0" fontAlgn="base" hangingPunct="0">
-              <a:spcBef>
-                <a:spcPct val="0"/>
-              </a:spcBef>
-              <a:spcAft>
-                <a:spcPct val="0"/>
-              </a:spcAft>
-              <a:defRPr>
-                <a:solidFill>
-                  <a:schemeClr val="tx1"/>
-                </a:solidFill>
-                <a:latin typeface="Arial" panose="020B0604020202020204" pitchFamily="34" charset="0"/>
-                <a:cs typeface="Arial" panose="020B0604020202020204" pitchFamily="34" charset="0"/>
-              </a:defRPr>
-            </a:lvl7pPr>
-            <a:lvl8pPr marL="3429000" indent="-228600" eaLnBrk="0" fontAlgn="base" hangingPunct="0">
-              <a:spcBef>
-                <a:spcPct val="0"/>
-              </a:spcBef>
-              <a:spcAft>
-                <a:spcPct val="0"/>
-              </a:spcAft>
-              <a:defRPr>
-                <a:solidFill>
-                  <a:schemeClr val="tx1"/>
-                </a:solidFill>
-                <a:latin typeface="Arial" panose="020B0604020202020204" pitchFamily="34" charset="0"/>
-                <a:cs typeface="Arial" panose="020B0604020202020204" pitchFamily="34" charset="0"/>
-              </a:defRPr>
-            </a:lvl8pPr>
-            <a:lvl9pPr marL="3886200" indent="-228600" eaLnBrk="0" fontAlgn="base" hangingPunct="0">
-              <a:spcBef>
-                <a:spcPct val="0"/>
-              </a:spcBef>
-              <a:spcAft>
-                <a:spcPct val="0"/>
-              </a:spcAft>
-              <a:defRPr>
-                <a:solidFill>
-                  <a:schemeClr val="tx1"/>
-                </a:solidFill>
-                <a:latin typeface="Arial" panose="020B0604020202020204" pitchFamily="34" charset="0"/>
-                <a:cs typeface="Arial" panose="020B0604020202020204" pitchFamily="34" charset="0"/>
-              </a:defRPr>
-            </a:lvl9pPr>
-          </a:lstStyle>
-          <a:p>
-            <a:pPr algn="ctr"/>
+          <a:bodyPr>
+            <a:normAutofit/>
+          </a:bodyPr>
+          <a:lstStyle/>
+          <a:p>
             <a:r>
-              <a:rPr lang="en-US" altLang="en-US" sz="3840" b="1" dirty="0">
+              <a:rPr lang="en-US" sz="6000" b="1" dirty="0">
                 <a:solidFill>
                   <a:srgbClr val="0070C0"/>
                 </a:solidFill>
-                <a:latin typeface="Comic Sans MS" panose="030F0702030302020204" pitchFamily="66" charset="0"/>
+                <a:latin typeface="Times New Roman" panose="02020603050405020304" pitchFamily="18" charset="0"/>
+                <a:cs typeface="Times New Roman" panose="02020603050405020304" pitchFamily="18" charset="0"/>
               </a:rPr>
-              <a:t>Outcomes/Results and Discussions</a:t>
+              <a:t>Thanks for Listening our Presentation….</a:t>
             </a:r>
+          </a:p>
+        </p:txBody>
+      </p:sp>
+      <p:grpSp>
+        <p:nvGrpSpPr>
+          <p:cNvPr id="5" name="Group 6"/>
+          <p:cNvGrpSpPr>
+            <a:grpSpLocks/>
+          </p:cNvGrpSpPr>
+          <p:nvPr/>
+        </p:nvGrpSpPr>
+        <p:grpSpPr bwMode="auto">
+          <a:xfrm>
+            <a:off x="7398325" y="2015067"/>
+            <a:ext cx="6724076" cy="5532886"/>
+            <a:chOff x="432" y="1584"/>
+            <a:chExt cx="3072" cy="2426"/>
+          </a:xfrm>
+        </p:grpSpPr>
+        <p:sp>
+          <p:nvSpPr>
+            <p:cNvPr id="6" name="AutoShape 3"/>
+            <p:cNvSpPr>
+              <a:spLocks noChangeArrowheads="1"/>
+            </p:cNvSpPr>
+            <p:nvPr/>
+          </p:nvSpPr>
+          <p:spPr bwMode="auto">
+            <a:xfrm>
+              <a:off x="1296" y="1584"/>
+              <a:ext cx="2208" cy="816"/>
+            </a:xfrm>
+            <a:prstGeom prst="cloudCallout">
+              <a:avLst>
+                <a:gd name="adj1" fmla="val -41574"/>
+                <a:gd name="adj2" fmla="val 140565"/>
+              </a:avLst>
+            </a:prstGeom>
+            <a:solidFill>
+              <a:schemeClr val="accent3"/>
+            </a:solidFill>
+            <a:ln w="9525">
+              <a:solidFill>
+                <a:schemeClr val="accent3"/>
+              </a:solidFill>
+              <a:round/>
+              <a:headEnd/>
+              <a:tailEnd/>
+            </a:ln>
+            <a:effectLst/>
+            <a:extLst>
+              <a:ext uri="{AF507438-7753-43E0-B8FC-AC1667EBCBE1}">
+                <a14:hiddenEffects xmlns:a14="http://schemas.microsoft.com/office/drawing/2010/main">
+                  <a:effectLst>
+                    <a:outerShdw dist="35921" dir="2700000" algn="ctr" rotWithShape="0">
+                      <a:schemeClr val="bg2"/>
+                    </a:outerShdw>
+                  </a:effectLst>
+                </a14:hiddenEffects>
+              </a:ext>
+            </a:extLst>
+          </p:spPr>
+          <p:txBody>
+            <a:bodyPr/>
+            <a:lstStyle>
+              <a:lvl1pPr>
+                <a:defRPr>
+                  <a:solidFill>
+                    <a:schemeClr val="tx1"/>
+                  </a:solidFill>
+                  <a:latin typeface="Arial" pitchFamily="34" charset="0"/>
+                  <a:cs typeface="Arial" pitchFamily="34" charset="0"/>
+                </a:defRPr>
+              </a:lvl1pPr>
+              <a:lvl2pPr marL="742950" indent="-285750">
+                <a:defRPr>
+                  <a:solidFill>
+                    <a:schemeClr val="tx1"/>
+                  </a:solidFill>
+                  <a:latin typeface="Arial" pitchFamily="34" charset="0"/>
+                  <a:cs typeface="Arial" pitchFamily="34" charset="0"/>
+                </a:defRPr>
+              </a:lvl2pPr>
+              <a:lvl3pPr marL="1143000" indent="-228600">
+                <a:defRPr>
+                  <a:solidFill>
+                    <a:schemeClr val="tx1"/>
+                  </a:solidFill>
+                  <a:latin typeface="Arial" pitchFamily="34" charset="0"/>
+                  <a:cs typeface="Arial" pitchFamily="34" charset="0"/>
+                </a:defRPr>
+              </a:lvl3pPr>
+              <a:lvl4pPr marL="1600200" indent="-228600">
+                <a:defRPr>
+                  <a:solidFill>
+                    <a:schemeClr val="tx1"/>
+                  </a:solidFill>
+                  <a:latin typeface="Arial" pitchFamily="34" charset="0"/>
+                  <a:cs typeface="Arial" pitchFamily="34" charset="0"/>
+                </a:defRPr>
+              </a:lvl4pPr>
+              <a:lvl5pPr marL="2057400" indent="-228600">
+                <a:defRPr>
+                  <a:solidFill>
+                    <a:schemeClr val="tx1"/>
+                  </a:solidFill>
+                  <a:latin typeface="Arial" pitchFamily="34" charset="0"/>
+                  <a:cs typeface="Arial" pitchFamily="34" charset="0"/>
+                </a:defRPr>
+              </a:lvl5pPr>
+              <a:lvl6pPr marL="2514600" indent="-228600" eaLnBrk="0" fontAlgn="base" hangingPunct="0">
+                <a:spcBef>
+                  <a:spcPct val="0"/>
+                </a:spcBef>
+                <a:spcAft>
+                  <a:spcPct val="0"/>
+                </a:spcAft>
+                <a:defRPr>
+                  <a:solidFill>
+                    <a:schemeClr val="tx1"/>
+                  </a:solidFill>
+                  <a:latin typeface="Arial" pitchFamily="34" charset="0"/>
+                  <a:cs typeface="Arial" pitchFamily="34" charset="0"/>
+                </a:defRPr>
+              </a:lvl6pPr>
+              <a:lvl7pPr marL="2971800" indent="-228600" eaLnBrk="0" fontAlgn="base" hangingPunct="0">
+                <a:spcBef>
+                  <a:spcPct val="0"/>
+                </a:spcBef>
+                <a:spcAft>
+                  <a:spcPct val="0"/>
+                </a:spcAft>
+                <a:defRPr>
+                  <a:solidFill>
+                    <a:schemeClr val="tx1"/>
+                  </a:solidFill>
+                  <a:latin typeface="Arial" pitchFamily="34" charset="0"/>
+                  <a:cs typeface="Arial" pitchFamily="34" charset="0"/>
+                </a:defRPr>
+              </a:lvl7pPr>
+              <a:lvl8pPr marL="3429000" indent="-228600" eaLnBrk="0" fontAlgn="base" hangingPunct="0">
+                <a:spcBef>
+                  <a:spcPct val="0"/>
+                </a:spcBef>
+                <a:spcAft>
+                  <a:spcPct val="0"/>
+                </a:spcAft>
+                <a:defRPr>
+                  <a:solidFill>
+                    <a:schemeClr val="tx1"/>
+                  </a:solidFill>
+                  <a:latin typeface="Arial" pitchFamily="34" charset="0"/>
+                  <a:cs typeface="Arial" pitchFamily="34" charset="0"/>
+                </a:defRPr>
+              </a:lvl8pPr>
+              <a:lvl9pPr marL="3886200" indent="-228600" eaLnBrk="0" fontAlgn="base" hangingPunct="0">
+                <a:spcBef>
+                  <a:spcPct val="0"/>
+                </a:spcBef>
+                <a:spcAft>
+                  <a:spcPct val="0"/>
+                </a:spcAft>
+                <a:defRPr>
+                  <a:solidFill>
+                    <a:schemeClr val="tx1"/>
+                  </a:solidFill>
+                  <a:latin typeface="Arial" pitchFamily="34" charset="0"/>
+                  <a:cs typeface="Arial" pitchFamily="34" charset="0"/>
+                </a:defRPr>
+              </a:lvl9pPr>
+            </a:lstStyle>
+            <a:p>
+              <a:pPr algn="ctr" eaLnBrk="1" hangingPunct="1"/>
+              <a:endParaRPr lang="en-US" altLang="en-US" sz="2800"/>
+            </a:p>
+          </p:txBody>
+        </p:sp>
+        <p:pic>
+          <p:nvPicPr>
+            <p:cNvPr id="7" name="Picture 4" descr="j0301252"/>
+            <p:cNvPicPr>
+              <a:picLocks noChangeAspect="1" noChangeArrowheads="1"/>
+            </p:cNvPicPr>
+            <p:nvPr/>
+          </p:nvPicPr>
+          <p:blipFill>
+            <a:blip r:embed="rId2" cstate="print">
+              <a:extLst>
+                <a:ext uri="{28A0092B-C50C-407E-A947-70E740481C1C}">
+                  <a14:useLocalDpi xmlns:a14="http://schemas.microsoft.com/office/drawing/2010/main" val="0"/>
+                </a:ext>
+              </a:extLst>
+            </a:blip>
+            <a:srcRect/>
+            <a:stretch>
+              <a:fillRect/>
+            </a:stretch>
+          </p:blipFill>
+          <p:spPr bwMode="auto">
+            <a:xfrm>
+              <a:off x="432" y="3024"/>
+              <a:ext cx="1153" cy="986"/>
+            </a:xfrm>
+            <a:prstGeom prst="rect">
+              <a:avLst/>
+            </a:prstGeom>
+            <a:noFill/>
+            <a:ln>
+              <a:noFill/>
+            </a:ln>
+            <a:extLst>
+              <a:ext uri="{909E8E84-426E-40DD-AFC4-6F175D3DCCD1}">
+                <a14:hiddenFill xmlns:a14="http://schemas.microsoft.com/office/drawing/2010/main">
+                  <a:solidFill>
+                    <a:srgbClr val="FFFFFF"/>
+                  </a:solidFill>
+                </a14:hiddenFill>
+              </a:ext>
+              <a:ext uri="{91240B29-F687-4F45-9708-019B960494DF}">
+                <a14:hiddenLine xmlns:a14="http://schemas.microsoft.com/office/drawing/2010/main" w="9525">
+                  <a:solidFill>
+                    <a:srgbClr val="000000"/>
+                  </a:solidFill>
+                  <a:miter lim="800000"/>
+                  <a:headEnd/>
+                  <a:tailEnd/>
+                </a14:hiddenLine>
+              </a:ext>
+            </a:extLst>
+          </p:spPr>
+        </p:pic>
+        <p:sp>
+          <p:nvSpPr>
+            <p:cNvPr id="8" name="WordArt 5"/>
+            <p:cNvSpPr>
+              <a:spLocks noChangeArrowheads="1" noChangeShapeType="1" noTextEdit="1"/>
+            </p:cNvSpPr>
+            <p:nvPr/>
+          </p:nvSpPr>
+          <p:spPr bwMode="auto">
+            <a:xfrm>
+              <a:off x="2208" y="1728"/>
+              <a:ext cx="421" cy="612"/>
+            </a:xfrm>
+            <a:prstGeom prst="rect">
+              <a:avLst/>
+            </a:prstGeom>
+          </p:spPr>
+          <p:txBody>
+            <a:bodyPr wrap="none" fromWordArt="1">
+              <a:prstTxWarp prst="textPlain">
+                <a:avLst>
+                  <a:gd name="adj" fmla="val 50000"/>
+                </a:avLst>
+              </a:prstTxWarp>
+            </a:bodyPr>
+            <a:lstStyle/>
+            <a:p>
+              <a:pPr algn="ctr"/>
+              <a:r>
+                <a:rPr lang="en-US" sz="5520" kern="10" dirty="0">
+                  <a:ln w="9525">
+                    <a:solidFill>
+                      <a:schemeClr val="accent5">
+                        <a:lumMod val="75000"/>
+                      </a:schemeClr>
+                    </a:solidFill>
+                    <a:round/>
+                    <a:headEnd/>
+                    <a:tailEnd/>
+                  </a:ln>
+                  <a:solidFill>
+                    <a:srgbClr val="00B050"/>
+                  </a:solidFill>
+                  <a:latin typeface="Arial Black"/>
+                </a:rPr>
+                <a:t>?</a:t>
+              </a:r>
+            </a:p>
+          </p:txBody>
+        </p:sp>
+      </p:grpSp>
+      <p:sp>
+        <p:nvSpPr>
+          <p:cNvPr id="3" name="Date Placeholder 2"/>
+          <p:cNvSpPr>
+            <a:spLocks noGrp="1"/>
+          </p:cNvSpPr>
+          <p:nvPr>
+            <p:ph type="dt" sz="half" idx="10"/>
+          </p:nvPr>
+        </p:nvSpPr>
+        <p:spPr/>
+        <p:txBody>
+          <a:bodyPr/>
+          <a:lstStyle/>
+          <a:p>
+            <a:fld id="{D595E484-204C-41CF-AA8E-AE5C26E05CE2}" type="datetime3">
+              <a:rPr lang="en-US" smtClean="0"/>
+              <a:t>24 August 2026</a:t>
+            </a:fld>
+            <a:endParaRPr lang="en-US"/>
           </a:p>
         </p:txBody>
       </p:sp>
       <p:sp>
         <p:nvSpPr>
-          <p:cNvPr id="17411" name="Rectangle 2"/>
-          <p:cNvSpPr>
-            <a:spLocks noChangeArrowheads="1"/>
-          </p:cNvSpPr>
-          <p:nvPr/>
-        </p:nvSpPr>
-        <p:spPr bwMode="auto">
-          <a:xfrm>
-            <a:off x="432261" y="2286000"/>
-            <a:ext cx="15677803" cy="5212080"/>
-          </a:xfrm>
-          <a:prstGeom prst="rect">
-            <a:avLst/>
-          </a:prstGeom>
-          <a:noFill/>
-          <a:ln>
-            <a:noFill/>
-          </a:ln>
-          <a:extLst>
-            <a:ext uri="{909E8E84-426E-40DD-AFC4-6F175D3DCCD1}">
-              <a14:hiddenFill xmlns:a14="http://schemas.microsoft.com/office/drawing/2010/main">
-                <a:solidFill>
-                  <a:srgbClr val="FFFFFF"/>
-                </a:solidFill>
-              </a14:hiddenFill>
-            </a:ext>
-            <a:ext uri="{91240B29-F687-4F45-9708-019B960494DF}">
-              <a14:hiddenLine xmlns:a14="http://schemas.microsoft.com/office/drawing/2010/main" w="9525">
-                <a:solidFill>
-                  <a:srgbClr val="000000"/>
-                </a:solidFill>
-                <a:miter lim="800000"/>
-                <a:headEnd/>
-                <a:tailEnd/>
-              </a14:hiddenLine>
-            </a:ext>
-          </a:extLst>
-        </p:spPr>
-        <p:txBody>
-          <a:bodyPr wrap="square"/>
-          <a:lstStyle>
-            <a:lvl1pPr marL="342900" indent="-342900" eaLnBrk="0" hangingPunct="0">
-              <a:defRPr>
-                <a:solidFill>
-                  <a:schemeClr val="tx1"/>
-                </a:solidFill>
-                <a:latin typeface="Arial" panose="020B0604020202020204" pitchFamily="34" charset="0"/>
-                <a:cs typeface="Arial" panose="020B0604020202020204" pitchFamily="34" charset="0"/>
-              </a:defRPr>
-            </a:lvl1pPr>
-            <a:lvl2pPr marL="742950" indent="-285750" eaLnBrk="0" hangingPunct="0">
-              <a:defRPr>
-                <a:solidFill>
-                  <a:schemeClr val="tx1"/>
-                </a:solidFill>
-                <a:latin typeface="Arial" panose="020B0604020202020204" pitchFamily="34" charset="0"/>
-                <a:cs typeface="Arial" panose="020B0604020202020204" pitchFamily="34" charset="0"/>
-              </a:defRPr>
-            </a:lvl2pPr>
-            <a:lvl3pPr marL="1143000" indent="-228600" eaLnBrk="0" hangingPunct="0">
-              <a:defRPr>
-                <a:solidFill>
-                  <a:schemeClr val="tx1"/>
-                </a:solidFill>
-                <a:latin typeface="Arial" panose="020B0604020202020204" pitchFamily="34" charset="0"/>
-                <a:cs typeface="Arial" panose="020B0604020202020204" pitchFamily="34" charset="0"/>
-              </a:defRPr>
-            </a:lvl3pPr>
-            <a:lvl4pPr marL="1600200" indent="-228600" eaLnBrk="0" hangingPunct="0">
-              <a:defRPr>
-                <a:solidFill>
-                  <a:schemeClr val="tx1"/>
-                </a:solidFill>
-                <a:latin typeface="Arial" panose="020B0604020202020204" pitchFamily="34" charset="0"/>
-                <a:cs typeface="Arial" panose="020B0604020202020204" pitchFamily="34" charset="0"/>
-              </a:defRPr>
-            </a:lvl4pPr>
-            <a:lvl5pPr marL="2057400" indent="-228600" eaLnBrk="0" hangingPunct="0">
-              <a:defRPr>
-                <a:solidFill>
-                  <a:schemeClr val="tx1"/>
-                </a:solidFill>
-                <a:latin typeface="Arial" panose="020B0604020202020204" pitchFamily="34" charset="0"/>
-                <a:cs typeface="Arial" panose="020B0604020202020204" pitchFamily="34" charset="0"/>
-              </a:defRPr>
-            </a:lvl5pPr>
-            <a:lvl6pPr marL="2514600" indent="-228600" eaLnBrk="0" fontAlgn="base" hangingPunct="0">
-              <a:spcBef>
-                <a:spcPct val="0"/>
-              </a:spcBef>
-              <a:spcAft>
-                <a:spcPct val="0"/>
-              </a:spcAft>
-              <a:defRPr>
-                <a:solidFill>
-                  <a:schemeClr val="tx1"/>
-                </a:solidFill>
-                <a:latin typeface="Arial" panose="020B0604020202020204" pitchFamily="34" charset="0"/>
-                <a:cs typeface="Arial" panose="020B0604020202020204" pitchFamily="34" charset="0"/>
-              </a:defRPr>
-            </a:lvl6pPr>
-            <a:lvl7pPr marL="2971800" indent="-228600" eaLnBrk="0" fontAlgn="base" hangingPunct="0">
-              <a:spcBef>
-                <a:spcPct val="0"/>
-              </a:spcBef>
-              <a:spcAft>
-                <a:spcPct val="0"/>
-              </a:spcAft>
-              <a:defRPr>
-                <a:solidFill>
-                  <a:schemeClr val="tx1"/>
-                </a:solidFill>
-                <a:latin typeface="Arial" panose="020B0604020202020204" pitchFamily="34" charset="0"/>
-                <a:cs typeface="Arial" panose="020B0604020202020204" pitchFamily="34" charset="0"/>
-              </a:defRPr>
-            </a:lvl7pPr>
-            <a:lvl8pPr marL="3429000" indent="-228600" eaLnBrk="0" fontAlgn="base" hangingPunct="0">
-              <a:spcBef>
-                <a:spcPct val="0"/>
-              </a:spcBef>
-              <a:spcAft>
-                <a:spcPct val="0"/>
-              </a:spcAft>
-              <a:defRPr>
-                <a:solidFill>
-                  <a:schemeClr val="tx1"/>
-                </a:solidFill>
-                <a:latin typeface="Arial" panose="020B0604020202020204" pitchFamily="34" charset="0"/>
-                <a:cs typeface="Arial" panose="020B0604020202020204" pitchFamily="34" charset="0"/>
-              </a:defRPr>
-            </a:lvl8pPr>
-            <a:lvl9pPr marL="3886200" indent="-228600" eaLnBrk="0" fontAlgn="base" hangingPunct="0">
-              <a:spcBef>
-                <a:spcPct val="0"/>
-              </a:spcBef>
-              <a:spcAft>
-                <a:spcPct val="0"/>
-              </a:spcAft>
-              <a:defRPr>
-                <a:solidFill>
-                  <a:schemeClr val="tx1"/>
-                </a:solidFill>
-                <a:latin typeface="Arial" panose="020B0604020202020204" pitchFamily="34" charset="0"/>
-                <a:cs typeface="Arial" panose="020B0604020202020204" pitchFamily="34" charset="0"/>
-              </a:defRPr>
-            </a:lvl9pPr>
-          </a:lstStyle>
-          <a:p>
-            <a:pPr eaLnBrk="1" hangingPunct="1">
-              <a:lnSpc>
-                <a:spcPct val="80000"/>
-              </a:lnSpc>
-              <a:spcBef>
-                <a:spcPct val="20000"/>
-              </a:spcBef>
-              <a:buFontTx/>
-              <a:buChar char="•"/>
-            </a:pPr>
-            <a:r>
-              <a:rPr lang="en-US" altLang="en-US" sz="2000" b="1" dirty="0">
-                <a:latin typeface="Times New Roman" panose="02020603050405020304" pitchFamily="18" charset="0"/>
-                <a:cs typeface="Times New Roman" panose="02020603050405020304" pitchFamily="18" charset="0"/>
-              </a:rPr>
-              <a:t>Mist channels switch reliably through the opto-isolated driver after converting to active-low 5 V drive.</a:t>
-            </a:r>
-          </a:p>
-          <a:p>
-            <a:pPr eaLnBrk="1" hangingPunct="1">
-              <a:lnSpc>
-                <a:spcPct val="80000"/>
-              </a:lnSpc>
-              <a:spcBef>
-                <a:spcPct val="20000"/>
-              </a:spcBef>
-              <a:buFontTx/>
-              <a:buChar char="•"/>
-            </a:pPr>
-            <a:r>
-              <a:rPr lang="en-US" altLang="en-US" sz="2000" b="1" dirty="0">
-                <a:latin typeface="Times New Roman" panose="02020603050405020304" pitchFamily="18" charset="0"/>
-                <a:cs typeface="Times New Roman" panose="02020603050405020304" pitchFamily="18" charset="0"/>
-              </a:rPr>
-              <a:t>The watering burst / soak cycle and the daily cap were verified live from the dashboard; buzzer and leak alarm respond in the UI in real time.</a:t>
-            </a:r>
-          </a:p>
-          <a:p>
-            <a:pPr eaLnBrk="1" hangingPunct="1">
-              <a:lnSpc>
-                <a:spcPct val="80000"/>
-              </a:lnSpc>
-              <a:spcBef>
-                <a:spcPct val="20000"/>
-              </a:spcBef>
-              <a:buFontTx/>
-              <a:buChar char="•"/>
-            </a:pPr>
-            <a:r>
-              <a:rPr lang="en-US" altLang="en-US" sz="2000" b="1" dirty="0">
-                <a:latin typeface="Times New Roman" panose="02020603050405020304" pitchFamily="18" charset="0"/>
-                <a:cs typeface="Times New Roman" panose="02020603050405020304" pitchFamily="18" charset="0"/>
-              </a:rPr>
-              <a:t>Wi-Fi provisioning over USB verified end-to-end: credentials sent from the console, the board joined the target network (RSSI −53 dBm) and the dashboard was reachable immediately.</a:t>
-            </a:r>
-          </a:p>
-          <a:p>
-            <a:pPr eaLnBrk="1" hangingPunct="1">
-              <a:lnSpc>
-                <a:spcPct val="80000"/>
-              </a:lnSpc>
-              <a:spcBef>
-                <a:spcPct val="20000"/>
-              </a:spcBef>
-              <a:buFontTx/>
-              <a:buChar char="•"/>
-            </a:pPr>
-            <a:r>
-              <a:rPr lang="en-US" altLang="en-US" sz="2000" b="1" dirty="0">
-                <a:latin typeface="Times New Roman" panose="02020603050405020304" pitchFamily="18" charset="0"/>
-                <a:cs typeface="Times New Roman" panose="02020603050405020304" pitchFamily="18" charset="0"/>
-              </a:rPr>
-              <a:t>Hotspot fallback lets a phone connect with no router present; all settings survive power cycles (NVS flash).</a:t>
-            </a:r>
-          </a:p>
-          <a:p>
-            <a:pPr eaLnBrk="1" hangingPunct="1">
-              <a:lnSpc>
-                <a:spcPct val="80000"/>
-              </a:lnSpc>
-              <a:spcBef>
-                <a:spcPct val="20000"/>
-              </a:spcBef>
-              <a:buFontTx/>
-              <a:buChar char="•"/>
-            </a:pPr>
-            <a:r>
-              <a:rPr lang="en-US" altLang="en-US" sz="2000" b="1" dirty="0">
-                <a:latin typeface="Times New Roman" panose="02020603050405020304" pitchFamily="18" charset="0"/>
-                <a:cs typeface="Times New Roman" panose="02020603050405020304" pitchFamily="18" charset="0"/>
-              </a:rPr>
-              <a:t>48-hour soak-test data and the reference-hygrometer comparison will be appended before the final defence.</a:t>
-            </a:r>
-          </a:p>
-        </p:txBody>
-      </p:sp>
-      <p:sp>
-        <p:nvSpPr>
-          <p:cNvPr id="3" name="Slide Number Placeholder 2"/>
+          <p:cNvPr id="9" name="Slide Number Placeholder 8"/>
           <p:cNvSpPr>
             <a:spLocks noGrp="1"/>
           </p:cNvSpPr>
@@ -12328,14 +12540,18 @@
           <a:p>
             <a:fld id="{48F63A3B-78C7-47BE-AE5E-E10140E04643}" type="slidenum">
               <a:rPr lang="en-US" smtClean="0"/>
-              <a:pPr/>
-              <a:t>7</a:t>
+              <a:t>18</a:t>
             </a:fld>
             <a:endParaRPr lang="en-US" dirty="0"/>
           </a:p>
         </p:txBody>
       </p:sp>
     </p:spTree>
+    <p:extLst>
+      <p:ext uri="{BB962C8B-B14F-4D97-AF65-F5344CB8AC3E}">
+        <p14:creationId xmlns:p14="http://schemas.microsoft.com/office/powerpoint/2010/main" val="478753263"/>
+      </p:ext>
+    </p:extLst>
   </p:cSld>
   <p:clrMapOvr>
     <a:masterClrMapping/>
@@ -16040,6 +16256,447 @@
 </file>
 
 <file path=ppt/slides/slide8.xml><?xml version="1.0" encoding="utf-8"?>
+<p:sld xmlns:a="http://schemas.openxmlformats.org/drawingml/2006/main" xmlns:p="http://schemas.openxmlformats.org/presentationml/2006/main" xmlns:r="http://schemas.openxmlformats.org/officeDocument/2006/relationships">
+  <p:cSld>
+    <p:spTree>
+      <p:nvGrpSpPr>
+        <p:cNvPr id="1" name=""/>
+        <p:cNvGrpSpPr/>
+        <p:nvPr/>
+      </p:nvGrpSpPr>
+      <p:grpSpPr/>
+      <p:sp>
+        <p:nvSpPr>
+          <p:cNvPr id="17410" name="Oval 3" descr="Parchment"/>
+          <p:cNvSpPr>
+            <a:spLocks noChangeArrowheads="1"/>
+          </p:cNvSpPr>
+          <p:nvPr/>
+        </p:nvSpPr>
+        <p:spPr bwMode="auto">
+          <a:xfrm>
+            <a:off x="1512916" y="529590"/>
+            <a:ext cx="12818226" cy="1188720"/>
+          </a:xfrm>
+          <a:prstGeom prst="ellipse">
+            <a:avLst/>
+          </a:prstGeom>
+          <a:blipFill dpi="0" rotWithShape="1">
+            <a:blip r:embed="rId2"/>
+            <a:srcRect/>
+            <a:tile tx="0" ty="0" sx="100000" sy="100000" flip="none" algn="tl"/>
+          </a:blipFill>
+          <a:ln w="9525">
+            <a:solidFill>
+              <a:schemeClr val="tx1"/>
+            </a:solidFill>
+            <a:round/>
+            <a:headEnd/>
+            <a:tailEnd/>
+          </a:ln>
+        </p:spPr>
+        <p:txBody>
+          <a:bodyPr wrap="none" anchor="ctr"/>
+          <a:lstStyle>
+            <a:lvl1pPr eaLnBrk="0" hangingPunct="0">
+              <a:defRPr>
+                <a:solidFill>
+                  <a:schemeClr val="tx1"/>
+                </a:solidFill>
+                <a:latin typeface="Arial" panose="020B0604020202020204" pitchFamily="34" charset="0"/>
+                <a:cs typeface="Arial" panose="020B0604020202020204" pitchFamily="34" charset="0"/>
+              </a:defRPr>
+            </a:lvl1pPr>
+            <a:lvl2pPr marL="742950" indent="-285750" eaLnBrk="0" hangingPunct="0">
+              <a:defRPr>
+                <a:solidFill>
+                  <a:schemeClr val="tx1"/>
+                </a:solidFill>
+                <a:latin typeface="Arial" panose="020B0604020202020204" pitchFamily="34" charset="0"/>
+                <a:cs typeface="Arial" panose="020B0604020202020204" pitchFamily="34" charset="0"/>
+              </a:defRPr>
+            </a:lvl2pPr>
+            <a:lvl3pPr marL="1143000" indent="-228600" eaLnBrk="0" hangingPunct="0">
+              <a:defRPr>
+                <a:solidFill>
+                  <a:schemeClr val="tx1"/>
+                </a:solidFill>
+                <a:latin typeface="Arial" panose="020B0604020202020204" pitchFamily="34" charset="0"/>
+                <a:cs typeface="Arial" panose="020B0604020202020204" pitchFamily="34" charset="0"/>
+              </a:defRPr>
+            </a:lvl3pPr>
+            <a:lvl4pPr marL="1600200" indent="-228600" eaLnBrk="0" hangingPunct="0">
+              <a:defRPr>
+                <a:solidFill>
+                  <a:schemeClr val="tx1"/>
+                </a:solidFill>
+                <a:latin typeface="Arial" panose="020B0604020202020204" pitchFamily="34" charset="0"/>
+                <a:cs typeface="Arial" panose="020B0604020202020204" pitchFamily="34" charset="0"/>
+              </a:defRPr>
+            </a:lvl4pPr>
+            <a:lvl5pPr marL="2057400" indent="-228600" eaLnBrk="0" hangingPunct="0">
+              <a:defRPr>
+                <a:solidFill>
+                  <a:schemeClr val="tx1"/>
+                </a:solidFill>
+                <a:latin typeface="Arial" panose="020B0604020202020204" pitchFamily="34" charset="0"/>
+                <a:cs typeface="Arial" panose="020B0604020202020204" pitchFamily="34" charset="0"/>
+              </a:defRPr>
+            </a:lvl5pPr>
+            <a:lvl6pPr marL="2514600" indent="-228600" eaLnBrk="0" fontAlgn="base" hangingPunct="0">
+              <a:spcBef>
+                <a:spcPct val="0"/>
+              </a:spcBef>
+              <a:spcAft>
+                <a:spcPct val="0"/>
+              </a:spcAft>
+              <a:defRPr>
+                <a:solidFill>
+                  <a:schemeClr val="tx1"/>
+                </a:solidFill>
+                <a:latin typeface="Arial" panose="020B0604020202020204" pitchFamily="34" charset="0"/>
+                <a:cs typeface="Arial" panose="020B0604020202020204" pitchFamily="34" charset="0"/>
+              </a:defRPr>
+            </a:lvl6pPr>
+            <a:lvl7pPr marL="2971800" indent="-228600" eaLnBrk="0" fontAlgn="base" hangingPunct="0">
+              <a:spcBef>
+                <a:spcPct val="0"/>
+              </a:spcBef>
+              <a:spcAft>
+                <a:spcPct val="0"/>
+              </a:spcAft>
+              <a:defRPr>
+                <a:solidFill>
+                  <a:schemeClr val="tx1"/>
+                </a:solidFill>
+                <a:latin typeface="Arial" panose="020B0604020202020204" pitchFamily="34" charset="0"/>
+                <a:cs typeface="Arial" panose="020B0604020202020204" pitchFamily="34" charset="0"/>
+              </a:defRPr>
+            </a:lvl7pPr>
+            <a:lvl8pPr marL="3429000" indent="-228600" eaLnBrk="0" fontAlgn="base" hangingPunct="0">
+              <a:spcBef>
+                <a:spcPct val="0"/>
+              </a:spcBef>
+              <a:spcAft>
+                <a:spcPct val="0"/>
+              </a:spcAft>
+              <a:defRPr>
+                <a:solidFill>
+                  <a:schemeClr val="tx1"/>
+                </a:solidFill>
+                <a:latin typeface="Arial" panose="020B0604020202020204" pitchFamily="34" charset="0"/>
+                <a:cs typeface="Arial" panose="020B0604020202020204" pitchFamily="34" charset="0"/>
+              </a:defRPr>
+            </a:lvl8pPr>
+            <a:lvl9pPr marL="3886200" indent="-228600" eaLnBrk="0" fontAlgn="base" hangingPunct="0">
+              <a:spcBef>
+                <a:spcPct val="0"/>
+              </a:spcBef>
+              <a:spcAft>
+                <a:spcPct val="0"/>
+              </a:spcAft>
+              <a:defRPr>
+                <a:solidFill>
+                  <a:schemeClr val="tx1"/>
+                </a:solidFill>
+                <a:latin typeface="Arial" panose="020B0604020202020204" pitchFamily="34" charset="0"/>
+                <a:cs typeface="Arial" panose="020B0604020202020204" pitchFamily="34" charset="0"/>
+              </a:defRPr>
+            </a:lvl9pPr>
+          </a:lstStyle>
+          <a:p>
+            <a:pPr algn="ctr"/>
+            <a:r>
+              <a:rPr lang="en-US" altLang="en-US" sz="3840" b="1" dirty="0">
+                <a:solidFill>
+                  <a:srgbClr val="0070C0"/>
+                </a:solidFill>
+                <a:latin typeface="Comic Sans MS" panose="030F0702030302020204" pitchFamily="66" charset="0"/>
+              </a:rPr>
+              <a:t>Introduction</a:t>
+            </a:r>
+          </a:p>
+        </p:txBody>
+      </p:sp>
+      <p:sp>
+        <p:nvSpPr>
+          <p:cNvPr id="17411" name="Rectangle 2"/>
+          <p:cNvSpPr>
+            <a:spLocks noChangeArrowheads="1"/>
+          </p:cNvSpPr>
+          <p:nvPr/>
+        </p:nvSpPr>
+        <p:spPr bwMode="auto">
+          <a:xfrm>
+            <a:off x="432261" y="2286000"/>
+            <a:ext cx="15677803" cy="5212080"/>
+          </a:xfrm>
+          <a:prstGeom prst="rect">
+            <a:avLst/>
+          </a:prstGeom>
+          <a:noFill/>
+          <a:ln>
+            <a:noFill/>
+          </a:ln>
+          <a:extLst>
+            <a:ext uri="{909E8E84-426E-40DD-AFC4-6F175D3DCCD1}">
+              <a14:hiddenFill xmlns:a14="http://schemas.microsoft.com/office/drawing/2010/main">
+                <a:solidFill>
+                  <a:srgbClr val="FFFFFF"/>
+                </a:solidFill>
+              </a14:hiddenFill>
+            </a:ext>
+            <a:ext uri="{91240B29-F687-4F45-9708-019B960494DF}">
+              <a14:hiddenLine xmlns:a14="http://schemas.microsoft.com/office/drawing/2010/main" w="9525">
+                <a:solidFill>
+                  <a:srgbClr val="000000"/>
+                </a:solidFill>
+                <a:miter lim="800000"/>
+                <a:headEnd/>
+                <a:tailEnd/>
+              </a14:hiddenLine>
+            </a:ext>
+          </a:extLst>
+        </p:spPr>
+        <p:txBody>
+          <a:bodyPr wrap="square"/>
+          <a:lstStyle>
+            <a:lvl1pPr marL="342900" indent="-342900" eaLnBrk="0" hangingPunct="0">
+              <a:defRPr>
+                <a:solidFill>
+                  <a:schemeClr val="tx1"/>
+                </a:solidFill>
+                <a:latin typeface="Arial" panose="020B0604020202020204" pitchFamily="34" charset="0"/>
+                <a:cs typeface="Arial" panose="020B0604020202020204" pitchFamily="34" charset="0"/>
+              </a:defRPr>
+            </a:lvl1pPr>
+            <a:lvl2pPr marL="742950" indent="-285750" eaLnBrk="0" hangingPunct="0">
+              <a:defRPr>
+                <a:solidFill>
+                  <a:schemeClr val="tx1"/>
+                </a:solidFill>
+                <a:latin typeface="Arial" panose="020B0604020202020204" pitchFamily="34" charset="0"/>
+                <a:cs typeface="Arial" panose="020B0604020202020204" pitchFamily="34" charset="0"/>
+              </a:defRPr>
+            </a:lvl2pPr>
+            <a:lvl3pPr marL="1143000" indent="-228600" eaLnBrk="0" hangingPunct="0">
+              <a:defRPr>
+                <a:solidFill>
+                  <a:schemeClr val="tx1"/>
+                </a:solidFill>
+                <a:latin typeface="Arial" panose="020B0604020202020204" pitchFamily="34" charset="0"/>
+                <a:cs typeface="Arial" panose="020B0604020202020204" pitchFamily="34" charset="0"/>
+              </a:defRPr>
+            </a:lvl3pPr>
+            <a:lvl4pPr marL="1600200" indent="-228600" eaLnBrk="0" hangingPunct="0">
+              <a:defRPr>
+                <a:solidFill>
+                  <a:schemeClr val="tx1"/>
+                </a:solidFill>
+                <a:latin typeface="Arial" panose="020B0604020202020204" pitchFamily="34" charset="0"/>
+                <a:cs typeface="Arial" panose="020B0604020202020204" pitchFamily="34" charset="0"/>
+              </a:defRPr>
+            </a:lvl4pPr>
+            <a:lvl5pPr marL="2057400" indent="-228600" eaLnBrk="0" hangingPunct="0">
+              <a:defRPr>
+                <a:solidFill>
+                  <a:schemeClr val="tx1"/>
+                </a:solidFill>
+                <a:latin typeface="Arial" panose="020B0604020202020204" pitchFamily="34" charset="0"/>
+                <a:cs typeface="Arial" panose="020B0604020202020204" pitchFamily="34" charset="0"/>
+              </a:defRPr>
+            </a:lvl5pPr>
+            <a:lvl6pPr marL="2514600" indent="-228600" eaLnBrk="0" fontAlgn="base" hangingPunct="0">
+              <a:spcBef>
+                <a:spcPct val="0"/>
+              </a:spcBef>
+              <a:spcAft>
+                <a:spcPct val="0"/>
+              </a:spcAft>
+              <a:defRPr>
+                <a:solidFill>
+                  <a:schemeClr val="tx1"/>
+                </a:solidFill>
+                <a:latin typeface="Arial" panose="020B0604020202020204" pitchFamily="34" charset="0"/>
+                <a:cs typeface="Arial" panose="020B0604020202020204" pitchFamily="34" charset="0"/>
+              </a:defRPr>
+            </a:lvl6pPr>
+            <a:lvl7pPr marL="2971800" indent="-228600" eaLnBrk="0" fontAlgn="base" hangingPunct="0">
+              <a:spcBef>
+                <a:spcPct val="0"/>
+              </a:spcBef>
+              <a:spcAft>
+                <a:spcPct val="0"/>
+              </a:spcAft>
+              <a:defRPr>
+                <a:solidFill>
+                  <a:schemeClr val="tx1"/>
+                </a:solidFill>
+                <a:latin typeface="Arial" panose="020B0604020202020204" pitchFamily="34" charset="0"/>
+                <a:cs typeface="Arial" panose="020B0604020202020204" pitchFamily="34" charset="0"/>
+              </a:defRPr>
+            </a:lvl7pPr>
+            <a:lvl8pPr marL="3429000" indent="-228600" eaLnBrk="0" fontAlgn="base" hangingPunct="0">
+              <a:spcBef>
+                <a:spcPct val="0"/>
+              </a:spcBef>
+              <a:spcAft>
+                <a:spcPct val="0"/>
+              </a:spcAft>
+              <a:defRPr>
+                <a:solidFill>
+                  <a:schemeClr val="tx1"/>
+                </a:solidFill>
+                <a:latin typeface="Arial" panose="020B0604020202020204" pitchFamily="34" charset="0"/>
+                <a:cs typeface="Arial" panose="020B0604020202020204" pitchFamily="34" charset="0"/>
+              </a:defRPr>
+            </a:lvl8pPr>
+            <a:lvl9pPr marL="3886200" indent="-228600" eaLnBrk="0" fontAlgn="base" hangingPunct="0">
+              <a:spcBef>
+                <a:spcPct val="0"/>
+              </a:spcBef>
+              <a:spcAft>
+                <a:spcPct val="0"/>
+              </a:spcAft>
+              <a:defRPr>
+                <a:solidFill>
+                  <a:schemeClr val="tx1"/>
+                </a:solidFill>
+                <a:latin typeface="Arial" panose="020B0604020202020204" pitchFamily="34" charset="0"/>
+                <a:cs typeface="Arial" panose="020B0604020202020204" pitchFamily="34" charset="0"/>
+              </a:defRPr>
+            </a:lvl9pPr>
+          </a:lstStyle>
+          <a:p>
+            <a:pPr eaLnBrk="1" hangingPunct="1">
+              <a:lnSpc>
+                <a:spcPct val="80000"/>
+              </a:lnSpc>
+              <a:spcBef>
+                <a:spcPct val="20000"/>
+              </a:spcBef>
+              <a:buFontTx/>
+              <a:buChar char="•"/>
+            </a:pPr>
+            <a:r>
+              <a:rPr lang="en-US" altLang="en-US" sz="2000" b="1" dirty="0">
+                <a:latin typeface="Times New Roman" panose="02020603050405020304" pitchFamily="18" charset="0"/>
+                <a:cs typeface="Times New Roman" panose="02020603050405020304" pitchFamily="18" charset="0"/>
+              </a:rPr>
+              <a:t>The developed system reads seven signals continuously: temperature, humidity, pressure, light level, two soil-moisture probes, tray leak and reservoir level.</a:t>
+            </a:r>
+          </a:p>
+          <a:p>
+            <a:pPr eaLnBrk="1" hangingPunct="1">
+              <a:lnSpc>
+                <a:spcPct val="80000"/>
+              </a:lnSpc>
+              <a:spcBef>
+                <a:spcPct val="20000"/>
+              </a:spcBef>
+              <a:buFontTx/>
+              <a:buChar char="•"/>
+            </a:pPr>
+            <a:r>
+              <a:rPr lang="en-US" altLang="en-US" sz="2000" b="1" dirty="0">
+                <a:latin typeface="Times New Roman" panose="02020603050405020304" pitchFamily="18" charset="0"/>
+                <a:cs typeface="Times New Roman" panose="02020603050405020304" pitchFamily="18" charset="0"/>
+              </a:rPr>
+              <a:t>It drives ultrasonic mist makers, an exhaust fan and a grow light through a 4-channel opto-isolated MOSFET stage.</a:t>
+            </a:r>
+          </a:p>
+          <a:p>
+            <a:pPr eaLnBrk="1" hangingPunct="1">
+              <a:lnSpc>
+                <a:spcPct val="80000"/>
+              </a:lnSpc>
+              <a:spcBef>
+                <a:spcPct val="20000"/>
+              </a:spcBef>
+              <a:buFontTx/>
+              <a:buChar char="•"/>
+            </a:pPr>
+            <a:r>
+              <a:rPr lang="en-US" altLang="en-US" sz="2000" b="1" dirty="0">
+                <a:latin typeface="Times New Roman" panose="02020603050405020304" pitchFamily="18" charset="0"/>
+                <a:cs typeface="Times New Roman" panose="02020603050405020304" pitchFamily="18" charset="0"/>
+              </a:rPr>
+              <a:t>Closed-loop rules with hysteresis hold humidity and soil moisture inside target bands; interlocks block unsafe actions.</a:t>
+            </a:r>
+          </a:p>
+          <a:p>
+            <a:pPr eaLnBrk="1" hangingPunct="1">
+              <a:lnSpc>
+                <a:spcPct val="80000"/>
+              </a:lnSpc>
+              <a:spcBef>
+                <a:spcPct val="20000"/>
+              </a:spcBef>
+              <a:buFontTx/>
+              <a:buChar char="•"/>
+            </a:pPr>
+            <a:r>
+              <a:rPr lang="en-US" altLang="en-US" sz="2000" b="1" dirty="0">
+                <a:latin typeface="Times New Roman" panose="02020603050405020304" pitchFamily="18" charset="0"/>
+                <a:cs typeface="Times New Roman" panose="02020603050405020304" pitchFamily="18" charset="0"/>
+              </a:rPr>
+              <a:t>Control from any phone (over Wi-Fi or the board's own hotspot) or from a one-click Windows console app over USB.</a:t>
+            </a:r>
+          </a:p>
+          <a:p>
+            <a:pPr eaLnBrk="1" hangingPunct="1">
+              <a:lnSpc>
+                <a:spcPct val="80000"/>
+              </a:lnSpc>
+              <a:spcBef>
+                <a:spcPct val="20000"/>
+              </a:spcBef>
+              <a:buFontTx/>
+              <a:buChar char="•"/>
+            </a:pPr>
+            <a:r>
+              <a:rPr lang="en-US" altLang="en-US" sz="2000" b="1" dirty="0">
+                <a:latin typeface="Times New Roman" panose="02020603050405020304" pitchFamily="18" charset="0"/>
+                <a:cs typeface="Times New Roman" panose="02020603050405020304" pitchFamily="18" charset="0"/>
+              </a:rPr>
+              <a:t>All 14 thresholds and timings are editable live from the UI and persist in flash, so nothing needs re-flashing to re-tune.</a:t>
+            </a:r>
+          </a:p>
+        </p:txBody>
+      </p:sp>
+      <p:sp>
+        <p:nvSpPr>
+          <p:cNvPr id="3" name="Slide Number Placeholder 2"/>
+          <p:cNvSpPr>
+            <a:spLocks noGrp="1"/>
+          </p:cNvSpPr>
+          <p:nvPr>
+            <p:ph type="sldNum" sz="quarter" idx="12"/>
+          </p:nvPr>
+        </p:nvSpPr>
+        <p:spPr/>
+        <p:txBody>
+          <a:bodyPr/>
+          <a:lstStyle/>
+          <a:p>
+            <a:fld id="{48F63A3B-78C7-47BE-AE5E-E10140E04643}" type="slidenum">
+              <a:rPr lang="en-US" smtClean="0"/>
+              <a:pPr/>
+              <a:t>7</a:t>
+            </a:fld>
+            <a:endParaRPr lang="en-US" dirty="0"/>
+          </a:p>
+        </p:txBody>
+      </p:sp>
+    </p:spTree>
+  </p:cSld>
+  <p:clrMapOvr>
+    <a:masterClrMapping/>
+  </p:clrMapOvr>
+</p:sld>
+</file>
+
+<file path=ppt/slides/slide9.xml><?xml version="1.0" encoding="utf-8"?>
 <p:sld xmlns:a="http://schemas.openxmlformats.org/drawingml/2006/main" xmlns:r="http://schemas.openxmlformats.org/officeDocument/2006/relationships" xmlns:p="http://schemas.openxmlformats.org/presentationml/2006/main">
   <p:cSld>
     <p:spTree>
@@ -16483,615 +17140,6 @@
     <p:extLst>
       <p:ext uri="{BB962C8B-B14F-4D97-AF65-F5344CB8AC3E}">
         <p14:creationId xmlns:p14="http://schemas.microsoft.com/office/powerpoint/2010/main" val="600762552"/>
-      </p:ext>
-    </p:extLst>
-  </p:cSld>
-  <p:clrMapOvr>
-    <a:masterClrMapping/>
-  </p:clrMapOvr>
-</p:sld>
-</file>
-
-<file path=ppt/slides/slide9.xml><?xml version="1.0" encoding="utf-8"?>
-<p:sld xmlns:a="http://schemas.openxmlformats.org/drawingml/2006/main" xmlns:r="http://schemas.openxmlformats.org/officeDocument/2006/relationships" xmlns:p="http://schemas.openxmlformats.org/presentationml/2006/main">
-  <p:cSld>
-    <p:spTree>
-      <p:nvGrpSpPr>
-        <p:cNvPr id="1" name=""/>
-        <p:cNvGrpSpPr/>
-        <p:nvPr/>
-      </p:nvGrpSpPr>
-      <p:grpSpPr>
-        <a:xfrm>
-          <a:off x="0" y="0"/>
-          <a:ext cx="0" cy="0"/>
-          <a:chOff x="0" y="0"/>
-          <a:chExt cx="0" cy="0"/>
-        </a:xfrm>
-      </p:grpSpPr>
-      <p:sp>
-        <p:nvSpPr>
-          <p:cNvPr id="18434" name="Oval 3" descr="Parchment"/>
-          <p:cNvSpPr>
-            <a:spLocks noChangeArrowheads="1"/>
-          </p:cNvSpPr>
-          <p:nvPr/>
-        </p:nvSpPr>
-        <p:spPr bwMode="auto">
-          <a:xfrm>
-            <a:off x="1762298" y="529590"/>
-            <a:ext cx="11953702" cy="1188720"/>
-          </a:xfrm>
-          <a:prstGeom prst="ellipse">
-            <a:avLst/>
-          </a:prstGeom>
-          <a:blipFill dpi="0" rotWithShape="1">
-            <a:blip r:embed="rId2"/>
-            <a:srcRect/>
-            <a:tile tx="0" ty="0" sx="100000" sy="100000" flip="none" algn="tl"/>
-          </a:blipFill>
-          <a:ln w="9525">
-            <a:solidFill>
-              <a:schemeClr val="tx1"/>
-            </a:solidFill>
-            <a:round/>
-            <a:headEnd/>
-            <a:tailEnd/>
-          </a:ln>
-        </p:spPr>
-        <p:txBody>
-          <a:bodyPr wrap="none" anchor="ctr"/>
-          <a:lstStyle>
-            <a:lvl1pPr eaLnBrk="0" hangingPunct="0">
-              <a:defRPr>
-                <a:solidFill>
-                  <a:schemeClr val="tx1"/>
-                </a:solidFill>
-                <a:latin typeface="Arial" panose="020B0604020202020204" pitchFamily="34" charset="0"/>
-                <a:cs typeface="Arial" panose="020B0604020202020204" pitchFamily="34" charset="0"/>
-              </a:defRPr>
-            </a:lvl1pPr>
-            <a:lvl2pPr marL="742950" indent="-285750" eaLnBrk="0" hangingPunct="0">
-              <a:defRPr>
-                <a:solidFill>
-                  <a:schemeClr val="tx1"/>
-                </a:solidFill>
-                <a:latin typeface="Arial" panose="020B0604020202020204" pitchFamily="34" charset="0"/>
-                <a:cs typeface="Arial" panose="020B0604020202020204" pitchFamily="34" charset="0"/>
-              </a:defRPr>
-            </a:lvl2pPr>
-            <a:lvl3pPr marL="1143000" indent="-228600" eaLnBrk="0" hangingPunct="0">
-              <a:defRPr>
-                <a:solidFill>
-                  <a:schemeClr val="tx1"/>
-                </a:solidFill>
-                <a:latin typeface="Arial" panose="020B0604020202020204" pitchFamily="34" charset="0"/>
-                <a:cs typeface="Arial" panose="020B0604020202020204" pitchFamily="34" charset="0"/>
-              </a:defRPr>
-            </a:lvl3pPr>
-            <a:lvl4pPr marL="1600200" indent="-228600" eaLnBrk="0" hangingPunct="0">
-              <a:defRPr>
-                <a:solidFill>
-                  <a:schemeClr val="tx1"/>
-                </a:solidFill>
-                <a:latin typeface="Arial" panose="020B0604020202020204" pitchFamily="34" charset="0"/>
-                <a:cs typeface="Arial" panose="020B0604020202020204" pitchFamily="34" charset="0"/>
-              </a:defRPr>
-            </a:lvl4pPr>
-            <a:lvl5pPr marL="2057400" indent="-228600" eaLnBrk="0" hangingPunct="0">
-              <a:defRPr>
-                <a:solidFill>
-                  <a:schemeClr val="tx1"/>
-                </a:solidFill>
-                <a:latin typeface="Arial" panose="020B0604020202020204" pitchFamily="34" charset="0"/>
-                <a:cs typeface="Arial" panose="020B0604020202020204" pitchFamily="34" charset="0"/>
-              </a:defRPr>
-            </a:lvl5pPr>
-            <a:lvl6pPr marL="2514600" indent="-228600" eaLnBrk="0" fontAlgn="base" hangingPunct="0">
-              <a:spcBef>
-                <a:spcPct val="0"/>
-              </a:spcBef>
-              <a:spcAft>
-                <a:spcPct val="0"/>
-              </a:spcAft>
-              <a:defRPr>
-                <a:solidFill>
-                  <a:schemeClr val="tx1"/>
-                </a:solidFill>
-                <a:latin typeface="Arial" panose="020B0604020202020204" pitchFamily="34" charset="0"/>
-                <a:cs typeface="Arial" panose="020B0604020202020204" pitchFamily="34" charset="0"/>
-              </a:defRPr>
-            </a:lvl6pPr>
-            <a:lvl7pPr marL="2971800" indent="-228600" eaLnBrk="0" fontAlgn="base" hangingPunct="0">
-              <a:spcBef>
-                <a:spcPct val="0"/>
-              </a:spcBef>
-              <a:spcAft>
-                <a:spcPct val="0"/>
-              </a:spcAft>
-              <a:defRPr>
-                <a:solidFill>
-                  <a:schemeClr val="tx1"/>
-                </a:solidFill>
-                <a:latin typeface="Arial" panose="020B0604020202020204" pitchFamily="34" charset="0"/>
-                <a:cs typeface="Arial" panose="020B0604020202020204" pitchFamily="34" charset="0"/>
-              </a:defRPr>
-            </a:lvl7pPr>
-            <a:lvl8pPr marL="3429000" indent="-228600" eaLnBrk="0" fontAlgn="base" hangingPunct="0">
-              <a:spcBef>
-                <a:spcPct val="0"/>
-              </a:spcBef>
-              <a:spcAft>
-                <a:spcPct val="0"/>
-              </a:spcAft>
-              <a:defRPr>
-                <a:solidFill>
-                  <a:schemeClr val="tx1"/>
-                </a:solidFill>
-                <a:latin typeface="Arial" panose="020B0604020202020204" pitchFamily="34" charset="0"/>
-                <a:cs typeface="Arial" panose="020B0604020202020204" pitchFamily="34" charset="0"/>
-              </a:defRPr>
-            </a:lvl8pPr>
-            <a:lvl9pPr marL="3886200" indent="-228600" eaLnBrk="0" fontAlgn="base" hangingPunct="0">
-              <a:spcBef>
-                <a:spcPct val="0"/>
-              </a:spcBef>
-              <a:spcAft>
-                <a:spcPct val="0"/>
-              </a:spcAft>
-              <a:defRPr>
-                <a:solidFill>
-                  <a:schemeClr val="tx1"/>
-                </a:solidFill>
-                <a:latin typeface="Arial" panose="020B0604020202020204" pitchFamily="34" charset="0"/>
-                <a:cs typeface="Arial" panose="020B0604020202020204" pitchFamily="34" charset="0"/>
-              </a:defRPr>
-            </a:lvl9pPr>
-          </a:lstStyle>
-          <a:p>
-            <a:pPr algn="ctr"/>
-            <a:r>
-              <a:rPr lang="en-US" altLang="en-US" sz="4000" b="1" dirty="0">
-                <a:solidFill>
-                  <a:srgbClr val="0070C0"/>
-                </a:solidFill>
-                <a:latin typeface="Comic Sans MS" panose="030F0702030302020204" pitchFamily="66" charset="0"/>
-              </a:rPr>
-              <a:t>Research/Working Method</a:t>
-            </a:r>
-          </a:p>
-        </p:txBody>
-      </p:sp>
-      <p:sp>
-        <p:nvSpPr>
-          <p:cNvPr id="18435" name="Rectangle 2"/>
-          <p:cNvSpPr>
-            <a:spLocks noChangeArrowheads="1"/>
-          </p:cNvSpPr>
-          <p:nvPr/>
-        </p:nvSpPr>
-        <p:spPr bwMode="auto">
-          <a:xfrm>
-            <a:off x="548640" y="2427316"/>
-            <a:ext cx="15453359" cy="1828800"/>
-          </a:xfrm>
-          <a:prstGeom prst="rect">
-            <a:avLst/>
-          </a:prstGeom>
-          <a:noFill/>
-          <a:ln>
-            <a:noFill/>
-          </a:ln>
-          <a:extLst>
-            <a:ext uri="{909E8E84-426E-40DD-AFC4-6F175D3DCCD1}">
-              <a14:hiddenFill xmlns:a14="http://schemas.microsoft.com/office/drawing/2010/main">
-                <a:solidFill>
-                  <a:srgbClr val="FFFFFF"/>
-                </a:solidFill>
-              </a14:hiddenFill>
-            </a:ext>
-            <a:ext uri="{91240B29-F687-4F45-9708-019B960494DF}">
-              <a14:hiddenLine xmlns:a14="http://schemas.microsoft.com/office/drawing/2010/main" w="9525">
-                <a:solidFill>
-                  <a:srgbClr val="000000"/>
-                </a:solidFill>
-                <a:miter lim="800000"/>
-                <a:headEnd/>
-                <a:tailEnd/>
-              </a14:hiddenLine>
-            </a:ext>
-          </a:extLst>
-        </p:spPr>
-        <p:txBody>
-          <a:bodyPr wrap="square"/>
-          <a:lstStyle>
-            <a:lvl1pPr marL="342900" indent="-342900" eaLnBrk="0" hangingPunct="0">
-              <a:defRPr>
-                <a:solidFill>
-                  <a:schemeClr val="tx1"/>
-                </a:solidFill>
-                <a:latin typeface="Arial" panose="020B0604020202020204" pitchFamily="34" charset="0"/>
-                <a:cs typeface="Arial" panose="020B0604020202020204" pitchFamily="34" charset="0"/>
-              </a:defRPr>
-            </a:lvl1pPr>
-            <a:lvl2pPr marL="742950" indent="-285750" eaLnBrk="0" hangingPunct="0">
-              <a:defRPr>
-                <a:solidFill>
-                  <a:schemeClr val="tx1"/>
-                </a:solidFill>
-                <a:latin typeface="Arial" panose="020B0604020202020204" pitchFamily="34" charset="0"/>
-                <a:cs typeface="Arial" panose="020B0604020202020204" pitchFamily="34" charset="0"/>
-              </a:defRPr>
-            </a:lvl2pPr>
-            <a:lvl3pPr marL="1143000" indent="-228600" eaLnBrk="0" hangingPunct="0">
-              <a:defRPr>
-                <a:solidFill>
-                  <a:schemeClr val="tx1"/>
-                </a:solidFill>
-                <a:latin typeface="Arial" panose="020B0604020202020204" pitchFamily="34" charset="0"/>
-                <a:cs typeface="Arial" panose="020B0604020202020204" pitchFamily="34" charset="0"/>
-              </a:defRPr>
-            </a:lvl3pPr>
-            <a:lvl4pPr marL="1600200" indent="-228600" eaLnBrk="0" hangingPunct="0">
-              <a:defRPr>
-                <a:solidFill>
-                  <a:schemeClr val="tx1"/>
-                </a:solidFill>
-                <a:latin typeface="Arial" panose="020B0604020202020204" pitchFamily="34" charset="0"/>
-                <a:cs typeface="Arial" panose="020B0604020202020204" pitchFamily="34" charset="0"/>
-              </a:defRPr>
-            </a:lvl4pPr>
-            <a:lvl5pPr marL="2057400" indent="-228600" eaLnBrk="0" hangingPunct="0">
-              <a:defRPr>
-                <a:solidFill>
-                  <a:schemeClr val="tx1"/>
-                </a:solidFill>
-                <a:latin typeface="Arial" panose="020B0604020202020204" pitchFamily="34" charset="0"/>
-                <a:cs typeface="Arial" panose="020B0604020202020204" pitchFamily="34" charset="0"/>
-              </a:defRPr>
-            </a:lvl5pPr>
-            <a:lvl6pPr marL="2514600" indent="-228600" eaLnBrk="0" fontAlgn="base" hangingPunct="0">
-              <a:spcBef>
-                <a:spcPct val="0"/>
-              </a:spcBef>
-              <a:spcAft>
-                <a:spcPct val="0"/>
-              </a:spcAft>
-              <a:defRPr>
-                <a:solidFill>
-                  <a:schemeClr val="tx1"/>
-                </a:solidFill>
-                <a:latin typeface="Arial" panose="020B0604020202020204" pitchFamily="34" charset="0"/>
-                <a:cs typeface="Arial" panose="020B0604020202020204" pitchFamily="34" charset="0"/>
-              </a:defRPr>
-            </a:lvl6pPr>
-            <a:lvl7pPr marL="2971800" indent="-228600" eaLnBrk="0" fontAlgn="base" hangingPunct="0">
-              <a:spcBef>
-                <a:spcPct val="0"/>
-              </a:spcBef>
-              <a:spcAft>
-                <a:spcPct val="0"/>
-              </a:spcAft>
-              <a:defRPr>
-                <a:solidFill>
-                  <a:schemeClr val="tx1"/>
-                </a:solidFill>
-                <a:latin typeface="Arial" panose="020B0604020202020204" pitchFamily="34" charset="0"/>
-                <a:cs typeface="Arial" panose="020B0604020202020204" pitchFamily="34" charset="0"/>
-              </a:defRPr>
-            </a:lvl7pPr>
-            <a:lvl8pPr marL="3429000" indent="-228600" eaLnBrk="0" fontAlgn="base" hangingPunct="0">
-              <a:spcBef>
-                <a:spcPct val="0"/>
-              </a:spcBef>
-              <a:spcAft>
-                <a:spcPct val="0"/>
-              </a:spcAft>
-              <a:defRPr>
-                <a:solidFill>
-                  <a:schemeClr val="tx1"/>
-                </a:solidFill>
-                <a:latin typeface="Arial" panose="020B0604020202020204" pitchFamily="34" charset="0"/>
-                <a:cs typeface="Arial" panose="020B0604020202020204" pitchFamily="34" charset="0"/>
-              </a:defRPr>
-            </a:lvl8pPr>
-            <a:lvl9pPr marL="3886200" indent="-228600" eaLnBrk="0" fontAlgn="base" hangingPunct="0">
-              <a:spcBef>
-                <a:spcPct val="0"/>
-              </a:spcBef>
-              <a:spcAft>
-                <a:spcPct val="0"/>
-              </a:spcAft>
-              <a:defRPr>
-                <a:solidFill>
-                  <a:schemeClr val="tx1"/>
-                </a:solidFill>
-                <a:latin typeface="Arial" panose="020B0604020202020204" pitchFamily="34" charset="0"/>
-                <a:cs typeface="Arial" panose="020B0604020202020204" pitchFamily="34" charset="0"/>
-              </a:defRPr>
-            </a:lvl9pPr>
-          </a:lstStyle>
-          <a:p>
-            <a:pPr eaLnBrk="1" hangingPunct="1">
-              <a:spcBef>
-                <a:spcPct val="20000"/>
-              </a:spcBef>
-              <a:buFont typeface="Wingdings" panose="05000000000000000000" pitchFamily="2" charset="2"/>
-              <a:buChar char="§"/>
-            </a:pPr>
-            <a:r>
-              <a:rPr lang="en-US" altLang="en-US" sz="1900" dirty="0">
-                <a:solidFill>
-                  <a:srgbClr val="0000FF"/>
-                </a:solidFill>
-                <a:latin typeface="Times New Roman" panose="02020603050405020304" pitchFamily="18" charset="0"/>
-                <a:cs typeface="Times New Roman" panose="02020603050405020304" pitchFamily="18" charset="0"/>
-              </a:rPr>
-              <a:t>Sense &gt; decide &gt; act loop runs every 2 seconds on the ESP32.</a:t>
-            </a:r>
-          </a:p>
-          <a:p>
-            <a:pPr eaLnBrk="1" hangingPunct="1">
-              <a:spcBef>
-                <a:spcPct val="20000"/>
-              </a:spcBef>
-              <a:buFont typeface="Wingdings" panose="05000000000000000000" pitchFamily="2" charset="2"/>
-              <a:buChar char="§"/>
-            </a:pPr>
-            <a:r>
-              <a:rPr lang="en-US" altLang="en-US" sz="1900" dirty="0">
-                <a:solidFill>
-                  <a:srgbClr val="0000FF"/>
-                </a:solidFill>
-                <a:latin typeface="Times New Roman" panose="02020603050405020304" pitchFamily="18" charset="0"/>
-                <a:cs typeface="Times New Roman" panose="02020603050405020304" pitchFamily="18" charset="0"/>
-              </a:rPr>
-              <a:t>AUTO mode: rules engine with hysteresis bands.  MANUAL mode: direct per-channel control from the UI.</a:t>
-            </a:r>
-          </a:p>
-          <a:p>
-            <a:pPr eaLnBrk="1" hangingPunct="1">
-              <a:spcBef>
-                <a:spcPct val="20000"/>
-              </a:spcBef>
-              <a:buFont typeface="Wingdings" panose="05000000000000000000" pitchFamily="2" charset="2"/>
-              <a:buChar char="§"/>
-            </a:pPr>
-            <a:r>
-              <a:rPr lang="en-US" altLang="en-US" sz="1900" dirty="0">
-                <a:solidFill>
-                  <a:srgbClr val="0000FF"/>
-                </a:solidFill>
-                <a:latin typeface="Times New Roman" panose="02020603050405020304" pitchFamily="18" charset="0"/>
-                <a:cs typeface="Times New Roman" panose="02020603050405020304" pitchFamily="18" charset="0"/>
-              </a:rPr>
-              <a:t>All actuators are isolated from the logic side through opto-coupled MOSFET drivers (active-low).</a:t>
-            </a:r>
-          </a:p>
-        </p:txBody>
-      </p:sp>
-      <p:sp>
-        <p:nvSpPr>
-          <p:cNvPr id="18436" name="Text Box 29"/>
-          <p:cNvSpPr txBox="1">
-            <a:spLocks noChangeArrowheads="1"/>
-          </p:cNvSpPr>
-          <p:nvPr/>
-        </p:nvSpPr>
-        <p:spPr bwMode="auto">
-          <a:xfrm>
-            <a:off x="5029200" y="7699248"/>
-            <a:ext cx="6400800" cy="523220"/>
-          </a:xfrm>
-          <a:prstGeom prst="rect">
-            <a:avLst/>
-          </a:prstGeom>
-          <a:noFill/>
-          <a:ln>
-            <a:noFill/>
-          </a:ln>
-          <a:extLst>
-            <a:ext uri="{909E8E84-426E-40DD-AFC4-6F175D3DCCD1}">
-              <a14:hiddenFill xmlns:a14="http://schemas.microsoft.com/office/drawing/2010/main">
-                <a:solidFill>
-                  <a:srgbClr val="FFFFFF"/>
-                </a:solidFill>
-              </a14:hiddenFill>
-            </a:ext>
-            <a:ext uri="{91240B29-F687-4F45-9708-019B960494DF}">
-              <a14:hiddenLine xmlns:a14="http://schemas.microsoft.com/office/drawing/2010/main" w="9525">
-                <a:solidFill>
-                  <a:srgbClr val="000000"/>
-                </a:solidFill>
-                <a:miter lim="800000"/>
-                <a:headEnd/>
-                <a:tailEnd/>
-              </a14:hiddenLine>
-            </a:ext>
-          </a:extLst>
-        </p:spPr>
-        <p:txBody>
-          <a:bodyPr wrap="square">
-            <a:spAutoFit/>
-          </a:bodyPr>
-          <a:lstStyle>
-            <a:lvl1pPr eaLnBrk="0" hangingPunct="0">
-              <a:defRPr>
-                <a:solidFill>
-                  <a:schemeClr val="tx1"/>
-                </a:solidFill>
-                <a:latin typeface="Arial" panose="020B0604020202020204" pitchFamily="34" charset="0"/>
-                <a:cs typeface="Arial" panose="020B0604020202020204" pitchFamily="34" charset="0"/>
-              </a:defRPr>
-            </a:lvl1pPr>
-            <a:lvl2pPr marL="742950" indent="-285750" eaLnBrk="0" hangingPunct="0">
-              <a:defRPr>
-                <a:solidFill>
-                  <a:schemeClr val="tx1"/>
-                </a:solidFill>
-                <a:latin typeface="Arial" panose="020B0604020202020204" pitchFamily="34" charset="0"/>
-                <a:cs typeface="Arial" panose="020B0604020202020204" pitchFamily="34" charset="0"/>
-              </a:defRPr>
-            </a:lvl2pPr>
-            <a:lvl3pPr marL="1143000" indent="-228600" eaLnBrk="0" hangingPunct="0">
-              <a:defRPr>
-                <a:solidFill>
-                  <a:schemeClr val="tx1"/>
-                </a:solidFill>
-                <a:latin typeface="Arial" panose="020B0604020202020204" pitchFamily="34" charset="0"/>
-                <a:cs typeface="Arial" panose="020B0604020202020204" pitchFamily="34" charset="0"/>
-              </a:defRPr>
-            </a:lvl3pPr>
-            <a:lvl4pPr marL="1600200" indent="-228600" eaLnBrk="0" hangingPunct="0">
-              <a:defRPr>
-                <a:solidFill>
-                  <a:schemeClr val="tx1"/>
-                </a:solidFill>
-                <a:latin typeface="Arial" panose="020B0604020202020204" pitchFamily="34" charset="0"/>
-                <a:cs typeface="Arial" panose="020B0604020202020204" pitchFamily="34" charset="0"/>
-              </a:defRPr>
-            </a:lvl4pPr>
-            <a:lvl5pPr marL="2057400" indent="-228600" eaLnBrk="0" hangingPunct="0">
-              <a:defRPr>
-                <a:solidFill>
-                  <a:schemeClr val="tx1"/>
-                </a:solidFill>
-                <a:latin typeface="Arial" panose="020B0604020202020204" pitchFamily="34" charset="0"/>
-                <a:cs typeface="Arial" panose="020B0604020202020204" pitchFamily="34" charset="0"/>
-              </a:defRPr>
-            </a:lvl5pPr>
-            <a:lvl6pPr marL="2514600" indent="-228600" eaLnBrk="0" fontAlgn="base" hangingPunct="0">
-              <a:spcBef>
-                <a:spcPct val="0"/>
-              </a:spcBef>
-              <a:spcAft>
-                <a:spcPct val="0"/>
-              </a:spcAft>
-              <a:defRPr>
-                <a:solidFill>
-                  <a:schemeClr val="tx1"/>
-                </a:solidFill>
-                <a:latin typeface="Arial" panose="020B0604020202020204" pitchFamily="34" charset="0"/>
-                <a:cs typeface="Arial" panose="020B0604020202020204" pitchFamily="34" charset="0"/>
-              </a:defRPr>
-            </a:lvl6pPr>
-            <a:lvl7pPr marL="2971800" indent="-228600" eaLnBrk="0" fontAlgn="base" hangingPunct="0">
-              <a:spcBef>
-                <a:spcPct val="0"/>
-              </a:spcBef>
-              <a:spcAft>
-                <a:spcPct val="0"/>
-              </a:spcAft>
-              <a:defRPr>
-                <a:solidFill>
-                  <a:schemeClr val="tx1"/>
-                </a:solidFill>
-                <a:latin typeface="Arial" panose="020B0604020202020204" pitchFamily="34" charset="0"/>
-                <a:cs typeface="Arial" panose="020B0604020202020204" pitchFamily="34" charset="0"/>
-              </a:defRPr>
-            </a:lvl7pPr>
-            <a:lvl8pPr marL="3429000" indent="-228600" eaLnBrk="0" fontAlgn="base" hangingPunct="0">
-              <a:spcBef>
-                <a:spcPct val="0"/>
-              </a:spcBef>
-              <a:spcAft>
-                <a:spcPct val="0"/>
-              </a:spcAft>
-              <a:defRPr>
-                <a:solidFill>
-                  <a:schemeClr val="tx1"/>
-                </a:solidFill>
-                <a:latin typeface="Arial" panose="020B0604020202020204" pitchFamily="34" charset="0"/>
-                <a:cs typeface="Arial" panose="020B0604020202020204" pitchFamily="34" charset="0"/>
-              </a:defRPr>
-            </a:lvl8pPr>
-            <a:lvl9pPr marL="3886200" indent="-228600" eaLnBrk="0" fontAlgn="base" hangingPunct="0">
-              <a:spcBef>
-                <a:spcPct val="0"/>
-              </a:spcBef>
-              <a:spcAft>
-                <a:spcPct val="0"/>
-              </a:spcAft>
-              <a:defRPr>
-                <a:solidFill>
-                  <a:schemeClr val="tx1"/>
-                </a:solidFill>
-                <a:latin typeface="Arial" panose="020B0604020202020204" pitchFamily="34" charset="0"/>
-                <a:cs typeface="Arial" panose="020B0604020202020204" pitchFamily="34" charset="0"/>
-              </a:defRPr>
-            </a:lvl9pPr>
-          </a:lstStyle>
-          <a:p>
-            <a:pPr algn="ctr" eaLnBrk="1" hangingPunct="1">
-              <a:spcBef>
-                <a:spcPct val="50000"/>
-              </a:spcBef>
-            </a:pPr>
-            <a:r>
-              <a:rPr lang="en-US" altLang="en-US" sz="1300" b="1" dirty="0" i="1">
-                <a:solidFill>
-                  <a:srgbClr val="FF1919"/>
-                </a:solidFill>
-                <a:latin typeface="Times New Roman" panose="02020603050405020304" pitchFamily="18" charset="0"/>
-                <a:cs typeface="Times New Roman" panose="02020603050405020304" pitchFamily="18" charset="0"/>
-              </a:rPr>
-              <a:t>Fig. 1: Block diagram of the automated terrarium system</a:t>
-            </a:r>
-          </a:p>
-        </p:txBody>
-      </p:sp>
-      <p:sp>
-        <p:nvSpPr>
-          <p:cNvPr id="3" name="Slide Number Placeholder 2"/>
-          <p:cNvSpPr>
-            <a:spLocks noGrp="1"/>
-          </p:cNvSpPr>
-          <p:nvPr>
-            <p:ph type="sldNum" sz="quarter" idx="12"/>
-          </p:nvPr>
-        </p:nvSpPr>
-        <p:spPr/>
-        <p:txBody>
-          <a:bodyPr/>
-          <a:lstStyle/>
-          <a:p>
-            <a:fld id="{48F63A3B-78C7-47BE-AE5E-E10140E04643}" type="slidenum">
-              <a:rPr lang="en-US" smtClean="0"/>
-              <a:pPr/>
-              <a:t>9</a:t>
-            </a:fld>
-            <a:endParaRPr lang="en-US" dirty="0"/>
-          </a:p>
-        </p:txBody>
-      </p:sp>
-      <p:pic>
-        <p:nvPicPr>
-          <p:cNvPr id="18437" name="Picture 18436" descr="block-diagram.png"/>
-          <p:cNvPicPr>
-            <a:picLocks noChangeAspect="1"/>
-          </p:cNvPicPr>
-          <p:nvPr/>
-        </p:nvPicPr>
-        <p:blipFill>
-          <a:blip r:embed="rId4"/>
-          <a:stretch>
-            <a:fillRect/>
-          </a:stretch>
-        </p:blipFill>
-        <p:spPr>
-          <a:xfrm>
-            <a:off x="4517353" y="3611880"/>
-            <a:ext cx="7424494" cy="3977639"/>
-          </a:xfrm>
-          <a:prstGeom prst="rect">
-            <a:avLst/>
-          </a:prstGeom>
-        </p:spPr>
-      </p:pic>
-    </p:spTree>
-    <p:extLst>
-      <p:ext uri="{BB962C8B-B14F-4D97-AF65-F5344CB8AC3E}">
-        <p14:creationId xmlns:p14="http://schemas.microsoft.com/office/powerpoint/2010/main" val="137250088"/>
       </p:ext>
     </p:extLst>
   </p:cSld>

--- a/TERRARIUM-Presentation.pptx
+++ b/TERRARIUM-Presentation.pptx
@@ -2719,7 +2719,7 @@
                             <a:schemeClr val="tx1"/>
                           </a:solidFill>
                         </a:rPr>
-                        <a:t>BSc in EEE</a:t>
+                        <a:t>BSc in CSE</a:t>
                       </a:r>
                     </a:p>
                   </a:txBody>
@@ -2831,7 +2831,7 @@
                             <a:schemeClr val="tx1"/>
                           </a:solidFill>
                         </a:rPr>
-                        <a:t>BSc in EEE</a:t>
+                        <a:t>BSc in CSE</a:t>
                       </a:r>
                     </a:p>
                   </a:txBody>
@@ -2953,7 +2953,7 @@
                             <a:schemeClr val="tx1"/>
                           </a:solidFill>
                         </a:rPr>
-                        <a:t>BSc in EEE</a:t>
+                        <a:t>BSc in CSE</a:t>
                       </a:r>
                       <a:endParaRPr lang="en-US" sz="2400" i="1" dirty="0">
                         <a:solidFill>
@@ -3077,7 +3077,7 @@
                             <a:schemeClr val="tx1"/>
                           </a:solidFill>
                         </a:rPr>
-                        <a:t>BSc in EEE</a:t>
+                        <a:t>BSc in CSE</a:t>
                       </a:r>
                       <a:endParaRPr lang="en-US" sz="2400" i="1" dirty="0">
                         <a:solidFill>

--- a/TERRARIUM-Presentation.pptx
+++ b/TERRARIUM-Presentation.pptx
@@ -2422,7 +2422,7 @@
         </p:nvGraphicFramePr>
         <p:xfrm>
           <a:off x="659786" y="4996918"/>
-          <a:ext cx="15359148" cy="2743200"/>
+          <a:ext cx="15359148" cy="2443083"/>
         </p:xfrm>
         <a:graphic>
           <a:graphicData uri="http://schemas.openxmlformats.org/drawingml/2006/table">
@@ -2652,7 +2652,7 @@
                   </a:ext>
                 </a:extLst>
               </a:tr>
-              <a:tr h="370840">
+              <a:tr h="347472">
                 <a:tc>
                   <a:txBody>
                     <a:bodyPr/>
@@ -2764,7 +2764,7 @@
                   </a:ext>
                 </a:extLst>
               </a:tr>
-              <a:tr h="370840">
+              <a:tr h="347472">
                 <a:tc>
                   <a:txBody>
                     <a:bodyPr/>
@@ -2795,7 +2795,7 @@
                             <a:schemeClr val="tx1"/>
                           </a:solidFill>
                         </a:rPr>
-                        <a:t>23-55027-3</a:t>
+                        <a:t>23-54483-3</a:t>
                       </a:r>
                     </a:p>
                   </a:txBody>
@@ -2813,7 +2813,7 @@
                             <a:schemeClr val="tx1"/>
                           </a:solidFill>
                         </a:rPr>
-                        <a:t>Tahomina Era</a:t>
+                        <a:t>MD. Shakhawat Hossen</a:t>
                       </a:r>
                     </a:p>
                   </a:txBody>
@@ -2876,7 +2876,7 @@
                   </a:ext>
                 </a:extLst>
               </a:tr>
-              <a:tr h="370840">
+              <a:tr h="347472">
                 <a:tc>
                   <a:txBody>
                     <a:bodyPr/>
@@ -2907,7 +2907,7 @@
                             <a:schemeClr val="tx1"/>
                           </a:solidFill>
                         </a:rPr>
-                        <a:t>23-54483-3</a:t>
+                        <a:t>23-55027-3</a:t>
                       </a:r>
                       <a:endParaRPr lang="en-US" sz="2400" i="1" dirty="0">
                         <a:solidFill>
@@ -2930,7 +2930,7 @@
                             <a:schemeClr val="tx1"/>
                           </a:solidFill>
                         </a:rPr>
-                        <a:t>MD. Shakhawat Hossen</a:t>
+                        <a:t>Tahomina Era</a:t>
                       </a:r>
                       <a:endParaRPr lang="en-US" sz="2400" i="1" dirty="0">
                         <a:solidFill>
@@ -3000,7 +3000,7 @@
                   </a:ext>
                 </a:extLst>
               </a:tr>
-              <a:tr h="370840">
+              <a:tr h="347472">
                 <a:tc>
                   <a:txBody>
                     <a:bodyPr/>
@@ -3124,7 +3124,7 @@
                   </a:ext>
                 </a:extLst>
               </a:tr>
-              <a:tr h="370840">
+              <a:tr h="347472">
                 <a:tc>
                   <a:txBody>
                     <a:bodyPr/>
@@ -3139,6 +3139,75 @@
                         </a:rPr>
                         <a:t>5</a:t>
                       </a:r>
+                    </a:p>
+                  </a:txBody>
+                  <a:tcPr anchor="ctr"/>
+                </a:tc>
+                <a:tc>
+                  <a:txBody>
+                    <a:bodyPr/>
+                    <a:lstStyle/>
+                    <a:p>
+                      <a:pPr algn="ctr"/>
+                      <a:r>
+                        <a:rPr lang="en-US" sz="2400" i="1" dirty="0">
+                          <a:solidFill>
+                            <a:schemeClr val="tx1"/>
+                          </a:solidFill>
+                        </a:rPr>
+                        <a:t>23-54545-3</a:t>
+                      </a:r>
+                      <a:endParaRPr lang="en-US" sz="2400" i="1" dirty="0">
+                        <a:solidFill>
+                          <a:schemeClr val="tx1"/>
+                        </a:solidFill>
+                      </a:endParaRPr>
+                    </a:p>
+                  </a:txBody>
+                  <a:tcPr anchor="ctr"/>
+                </a:tc>
+                <a:tc>
+                  <a:txBody>
+                    <a:bodyPr/>
+                    <a:lstStyle/>
+                    <a:p>
+                      <a:pPr algn="ctr"/>
+                      <a:r>
+                        <a:rPr lang="en-US" sz="2400" i="1" dirty="0">
+                          <a:solidFill>
+                            <a:schemeClr val="tx1"/>
+                          </a:solidFill>
+                        </a:rPr>
+                        <a:t>Jannatun Nur Deba</a:t>
+                      </a:r>
+                      <a:endParaRPr lang="en-US" sz="2400" i="1" dirty="0">
+                        <a:solidFill>
+                          <a:schemeClr val="tx1"/>
+                        </a:solidFill>
+                      </a:endParaRPr>
+                    </a:p>
+                  </a:txBody>
+                  <a:tcPr anchor="ctr"/>
+                </a:tc>
+                <a:tc>
+                  <a:txBody>
+                    <a:bodyPr/>
+                    <a:lstStyle/>
+                    <a:p>
+                      <a:pPr algn="ctr"/>
+                      <a:r>
+                        <a:rPr lang="en-US" sz="2400" i="1" dirty="0">
+                          <a:solidFill>
+                            <a:schemeClr val="tx1"/>
+                          </a:solidFill>
+                        </a:rPr>
+                        <a:t>BSc in CSE</a:t>
+                      </a:r>
+                      <a:endParaRPr lang="en-US" sz="2400" i="1" dirty="0">
+                        <a:solidFill>
+                          <a:schemeClr val="tx1"/>
+                        </a:solidFill>
+                      </a:endParaRPr>
                     </a:p>
                   </a:txBody>
                   <a:tcPr anchor="ctr"/>
@@ -3173,12 +3242,91 @@
                   </a:txBody>
                   <a:tcPr anchor="ctr"/>
                 </a:tc>
+                <a:extLst>
+                  <a:ext uri="{0D108BD9-81ED-4DB2-BD59-A6C34878D82A}">
+                    <a16:rowId xmlns:a16="http://schemas.microsoft.com/office/drawing/2014/main" val="901570957"/>
+                  </a:ext>
+                </a:extLst>
+              </a:tr>
+              <a:tr h="347472">
                 <a:tc>
                   <a:txBody>
                     <a:bodyPr/>
                     <a:lstStyle/>
                     <a:p>
                       <a:pPr algn="ctr"/>
+                      <a:r>
+                        <a:rPr lang="en-US" sz="2400" i="1" dirty="0">
+                          <a:solidFill>
+                            <a:schemeClr val="tx1"/>
+                          </a:solidFill>
+                        </a:rPr>
+                        <a:t>6</a:t>
+                      </a:r>
+                    </a:p>
+                  </a:txBody>
+                  <a:tcPr anchor="ctr"/>
+                </a:tc>
+                <a:tc>
+                  <a:txBody>
+                    <a:bodyPr/>
+                    <a:lstStyle/>
+                    <a:p>
+                      <a:pPr algn="ctr"/>
+                      <a:r>
+                        <a:rPr lang="en-US" sz="2400" i="1" dirty="0">
+                          <a:solidFill>
+                            <a:schemeClr val="tx1"/>
+                          </a:solidFill>
+                        </a:rPr>
+                        <a:t>23-55557-3</a:t>
+                      </a:r>
+                      <a:endParaRPr lang="en-US" sz="2400" i="1" dirty="0">
+                        <a:solidFill>
+                          <a:schemeClr val="tx1"/>
+                        </a:solidFill>
+                      </a:endParaRPr>
+                    </a:p>
+                  </a:txBody>
+                  <a:tcPr anchor="ctr"/>
+                </a:tc>
+                <a:tc>
+                  <a:txBody>
+                    <a:bodyPr/>
+                    <a:lstStyle/>
+                    <a:p>
+                      <a:pPr algn="ctr"/>
+                      <a:r>
+                        <a:rPr lang="en-US" sz="2400" i="1" dirty="0">
+                          <a:solidFill>
+                            <a:schemeClr val="tx1"/>
+                          </a:solidFill>
+                        </a:rPr>
+                        <a:t>MD. Alfaz Uddin</a:t>
+                      </a:r>
+                      <a:endParaRPr lang="en-US" sz="2400" i="1" dirty="0">
+                        <a:solidFill>
+                          <a:schemeClr val="tx1"/>
+                        </a:solidFill>
+                      </a:endParaRPr>
+                    </a:p>
+                  </a:txBody>
+                  <a:tcPr anchor="ctr"/>
+                </a:tc>
+                <a:tc>
+                  <a:txBody>
+                    <a:bodyPr/>
+                    <a:lstStyle/>
+                    <a:p>
+                      <a:pPr algn="ctr"/>
+                      <a:r>
+                        <a:rPr lang="en-US" sz="2400" i="1" dirty="0">
+                          <a:solidFill>
+                            <a:schemeClr val="tx1"/>
+                          </a:solidFill>
+                        </a:rPr>
+                        <a:t>BSc in CSE</a:t>
+                      </a:r>
                       <a:endParaRPr lang="en-US" sz="2400" i="1" dirty="0">
                         <a:solidFill>
                           <a:schemeClr val="tx1"/>
@@ -10266,6 +10414,64 @@
               <a:t>7</a:t>
             </a:fld>
             <a:endParaRPr lang="en-US" dirty="0"/>
+          </a:p>
+        </p:txBody>
+      </p:sp>
+      <p:pic>
+        <p:nvPicPr>
+          <p:cNvPr id="17412" name="Picture 17411" descr="prototype-photo.jpg"/>
+          <p:cNvPicPr>
+            <a:picLocks noChangeAspect="1"/>
+          </p:cNvPicPr>
+          <p:nvPr/>
+        </p:nvPicPr>
+        <p:blipFill>
+          <a:blip r:embed="rId3"/>
+          <a:stretch>
+            <a:fillRect/>
+          </a:stretch>
+        </p:blipFill>
+        <p:spPr>
+          <a:xfrm>
+            <a:off x="7059168" y="4526280"/>
+            <a:ext cx="2331720" cy="3108960"/>
+          </a:xfrm>
+          <a:prstGeom prst="rect">
+            <a:avLst/>
+          </a:prstGeom>
+        </p:spPr>
+      </p:pic>
+      <p:sp>
+        <p:nvSpPr>
+          <p:cNvPr id="17413" name="TextBox 17412"/>
+          <p:cNvSpPr txBox="1"/>
+          <p:nvPr/>
+        </p:nvSpPr>
+        <p:spPr>
+          <a:xfrm>
+            <a:off x="4572000" y="7662672"/>
+            <a:ext cx="7315200" cy="320040"/>
+          </a:xfrm>
+          <a:prstGeom prst="rect">
+            <a:avLst/>
+          </a:prstGeom>
+          <a:noFill/>
+        </p:spPr>
+        <p:txBody>
+          <a:bodyPr wrap="none">
+            <a:spAutoFit/>
+          </a:bodyPr>
+          <a:lstStyle/>
+          <a:p>
+            <a:pPr algn="ctr"/>
+            <a:r>
+              <a:rPr sz="1300" i="1">
+                <a:solidFill>
+                  <a:srgbClr val="444444"/>
+                </a:solidFill>
+              </a:rPr>
+              <a:t>Fig. 8: Working prototype with a live Fittonia plant under automatic control</a:t>
+            </a:r>
           </a:p>
         </p:txBody>
       </p:sp>
